--- a/presentations/stress-value-isekai.pptx
+++ b/presentations/stress-value-isekai.pptx
@@ -3486,9 +3486,9 @@
                 <a:solidFill>
                   <a:srgbClr val="FF8550"/>
                 </a:solidFill>
-                <a:latin typeface="Calibri" pitchFamily="34" charset="0"/>
-                <a:ea typeface="Calibri" pitchFamily="34" charset="-122"/>
-                <a:cs typeface="Calibri" pitchFamily="34" charset="-120"/>
+                <a:latin typeface="Rajdhani" pitchFamily="34" charset="0"/>
+                <a:ea typeface="Rajdhani" pitchFamily="34" charset="-122"/>
+                <a:cs typeface="Rajdhani" pitchFamily="34" charset="-120"/>
               </a:rPr>
               <a:t>ISEKAI · THE LAW AS CODE</a:t>
             </a:r>
@@ -3521,17 +3521,17 @@
               <a:buNone/>
             </a:pPr>
             <a:r>
-              <a:rPr lang="en-US" sz="6000" dirty="0">
+              <a:rPr lang="en-US" sz="5000" b="1" dirty="0">
                 <a:solidFill>
                   <a:srgbClr val="E8E8E8"/>
                 </a:solidFill>
-                <a:latin typeface="Arial Black" pitchFamily="34" charset="0"/>
-                <a:ea typeface="Arial Black" pitchFamily="34" charset="-122"/>
-                <a:cs typeface="Arial Black" pitchFamily="34" charset="-120"/>
+                <a:latin typeface="Orbitron" pitchFamily="34" charset="0"/>
+                <a:ea typeface="Orbitron" pitchFamily="34" charset="-122"/>
+                <a:cs typeface="Orbitron" pitchFamily="34" charset="-120"/>
               </a:rPr>
               <a:t>Stress and value</a:t>
             </a:r>
-            <a:endParaRPr lang="en-US" sz="6000" dirty="0"/>
+            <a:endParaRPr lang="en-US" sz="5000" dirty="0"/>
           </a:p>
         </p:txBody>
       </p:sp>
@@ -3564,9 +3564,9 @@
                 <a:solidFill>
                   <a:srgbClr val="CACACE"/>
                 </a:solidFill>
-                <a:latin typeface="Calibri" pitchFamily="34" charset="0"/>
-                <a:ea typeface="Calibri" pitchFamily="34" charset="-122"/>
-                <a:cs typeface="Calibri" pitchFamily="34" charset="-120"/>
+                <a:latin typeface="Rajdhani" pitchFamily="34" charset="0"/>
+                <a:ea typeface="Rajdhani" pitchFamily="34" charset="-122"/>
+                <a:cs typeface="Rajdhani" pitchFamily="34" charset="-120"/>
               </a:rPr>
               <a:t>How the harness knows a creature is struggling — and what it does about it</a:t>
             </a:r>
@@ -3603,9 +3603,9 @@
                 <a:solidFill>
                   <a:srgbClr val="55A9FF"/>
                 </a:solidFill>
-                <a:latin typeface="Consolas" pitchFamily="34" charset="0"/>
-                <a:ea typeface="Consolas" pitchFamily="34" charset="-122"/>
-                <a:cs typeface="Consolas" pitchFamily="34" charset="-120"/>
+                <a:latin typeface="JetBrains Mono" pitchFamily="34" charset="0"/>
+                <a:ea typeface="JetBrains Mono" pitchFamily="34" charset="-122"/>
+                <a:cs typeface="JetBrains Mono" pitchFamily="34" charset="-120"/>
               </a:rPr>
               <a:t>value ledger · family scores · meters · strain · council · relief · evolution</a:t>
             </a:r>
@@ -3694,9 +3694,9 @@
                 <a:solidFill>
                   <a:srgbClr val="A3A3AD"/>
                 </a:solidFill>
-                <a:latin typeface="Calibri" pitchFamily="34" charset="0"/>
-                <a:ea typeface="Calibri" pitchFamily="34" charset="-122"/>
-                <a:cs typeface="Calibri" pitchFamily="34" charset="-120"/>
+                <a:latin typeface="Rajdhani" pitchFamily="34" charset="0"/>
+                <a:ea typeface="Rajdhani" pitchFamily="34" charset="-122"/>
+                <a:cs typeface="Rajdhani" pitchFamily="34" charset="-120"/>
               </a:rPr>
               <a:t>ISEKAI ⋄ STRESS AND VALUE</a:t>
             </a:r>
@@ -3733,9 +3733,9 @@
                 <a:solidFill>
                   <a:srgbClr val="A3A3AD"/>
                 </a:solidFill>
-                <a:latin typeface="Calibri" pitchFamily="34" charset="0"/>
-                <a:ea typeface="Calibri" pitchFamily="34" charset="-122"/>
-                <a:cs typeface="Calibri" pitchFamily="34" charset="-120"/>
+                <a:latin typeface="Rajdhani" pitchFamily="34" charset="0"/>
+                <a:ea typeface="Rajdhani" pitchFamily="34" charset="-122"/>
+                <a:cs typeface="Rajdhani" pitchFamily="34" charset="-120"/>
               </a:rPr>
               <a:t>10</a:t>
             </a:r>
@@ -3772,9 +3772,9 @@
                 <a:solidFill>
                   <a:srgbClr val="FF8550"/>
                 </a:solidFill>
-                <a:latin typeface="Calibri" pitchFamily="34" charset="0"/>
-                <a:ea typeface="Calibri" pitchFamily="34" charset="-122"/>
-                <a:cs typeface="Calibri" pitchFamily="34" charset="-120"/>
+                <a:latin typeface="Rajdhani" pitchFamily="34" charset="0"/>
+                <a:ea typeface="Rajdhani" pitchFamily="34" charset="-122"/>
+                <a:cs typeface="Rajdhani" pitchFamily="34" charset="-120"/>
               </a:rPr>
               <a:t>EVOLUTION</a:t>
             </a:r>
@@ -3807,17 +3807,17 @@
               <a:buNone/>
             </a:pPr>
             <a:r>
-              <a:rPr lang="en-US" sz="2800" dirty="0">
+              <a:rPr lang="en-US" sz="2400" b="1" dirty="0">
                 <a:solidFill>
                   <a:srgbClr val="E8E8E8"/>
                 </a:solidFill>
-                <a:latin typeface="Arial Black" pitchFamily="34" charset="0"/>
-                <a:ea typeface="Arial Black" pitchFamily="34" charset="-122"/>
-                <a:cs typeface="Arial Black" pitchFamily="34" charset="-120"/>
+                <a:latin typeface="Orbitron" pitchFamily="34" charset="0"/>
+                <a:ea typeface="Orbitron" pitchFamily="34" charset="-122"/>
+                <a:cs typeface="Orbitron" pitchFamily="34" charset="-120"/>
               </a:rPr>
               <a:t>A stressed creature whose desk overflows reshapes itself</a:t>
             </a:r>
-            <a:endParaRPr lang="en-US" sz="2800" dirty="0"/>
+            <a:endParaRPr lang="en-US" sz="2400" dirty="0"/>
           </a:p>
         </p:txBody>
       </p:sp>
@@ -3891,17 +3891,17 @@
               <a:buNone/>
             </a:pPr>
             <a:r>
-              <a:rPr lang="en-US" sz="1600" b="1" dirty="0">
+              <a:rPr lang="en-US" sz="1800" b="1" dirty="0">
                 <a:solidFill>
                   <a:srgbClr val="55A9FF"/>
                 </a:solidFill>
-                <a:latin typeface="Calibri" pitchFamily="34" charset="0"/>
-                <a:ea typeface="Calibri" pitchFamily="34" charset="-122"/>
-                <a:cs typeface="Calibri" pitchFamily="34" charset="-120"/>
+                <a:latin typeface="Rajdhani" pitchFamily="34" charset="0"/>
+                <a:ea typeface="Rajdhani" pitchFamily="34" charset="-122"/>
+                <a:cs typeface="Rajdhani" pitchFamily="34" charset="-120"/>
               </a:rPr>
               <a:t>split</a:t>
             </a:r>
-            <a:endParaRPr lang="en-US" sz="1600" dirty="0"/>
+            <a:endParaRPr lang="en-US" sz="1800" dirty="0"/>
           </a:p>
         </p:txBody>
       </p:sp>
@@ -3933,17 +3933,17 @@
               <a:buNone/>
             </a:pPr>
             <a:r>
-              <a:rPr lang="en-US" sz="1300" dirty="0">
+              <a:rPr lang="en-US" sz="1500" dirty="0">
                 <a:solidFill>
                   <a:srgbClr val="CACACE"/>
                 </a:solidFill>
-                <a:latin typeface="Calibri" pitchFamily="34" charset="0"/>
-                <a:ea typeface="Calibri" pitchFamily="34" charset="-122"/>
-                <a:cs typeface="Calibri" pitchFamily="34" charset="-120"/>
+                <a:latin typeface="Rajdhani" pitchFamily="34" charset="0"/>
+                <a:ea typeface="Rajdhani" pitchFamily="34" charset="-122"/>
+                <a:cs typeface="Rajdhani" pitchFamily="34" charset="-120"/>
               </a:rPr>
               <a:t>its territory is large (1500 lines or 24 files) and its failures cluster: two young creatures take a half each, the parent retires</a:t>
             </a:r>
-            <a:endParaRPr lang="en-US" sz="1300" dirty="0"/>
+            <a:endParaRPr lang="en-US" sz="1500" dirty="0"/>
           </a:p>
         </p:txBody>
       </p:sp>
@@ -4017,17 +4017,17 @@
               <a:buNone/>
             </a:pPr>
             <a:r>
-              <a:rPr lang="en-US" sz="1600" b="1" dirty="0">
+              <a:rPr lang="en-US" sz="1800" b="1" dirty="0">
                 <a:solidFill>
                   <a:srgbClr val="FF8550"/>
                 </a:solidFill>
-                <a:latin typeface="Calibri" pitchFamily="34" charset="0"/>
-                <a:ea typeface="Calibri" pitchFamily="34" charset="-122"/>
-                <a:cs typeface="Calibri" pitchFamily="34" charset="-120"/>
+                <a:latin typeface="Rajdhani" pitchFamily="34" charset="0"/>
+                <a:ea typeface="Rajdhani" pitchFamily="34" charset="-122"/>
+                <a:cs typeface="Rajdhani" pitchFamily="34" charset="-120"/>
               </a:rPr>
               <a:t>mutate</a:t>
             </a:r>
-            <a:endParaRPr lang="en-US" sz="1600" dirty="0"/>
+            <a:endParaRPr lang="en-US" sz="1800" dirty="0"/>
           </a:p>
         </p:txBody>
       </p:sp>
@@ -4059,17 +4059,17 @@
               <a:buNone/>
             </a:pPr>
             <a:r>
-              <a:rPr lang="en-US" sz="1300" dirty="0">
+              <a:rPr lang="en-US" sz="1500" dirty="0">
                 <a:solidFill>
                   <a:srgbClr val="CACACE"/>
                 </a:solidFill>
-                <a:latin typeface="Calibri" pitchFamily="34" charset="0"/>
-                <a:ea typeface="Calibri" pitchFamily="34" charset="-122"/>
-                <a:cs typeface="Calibri" pitchFamily="34" charset="-120"/>
+                <a:latin typeface="Rajdhani" pitchFamily="34" charset="0"/>
+                <a:ea typeface="Rajdhani" pitchFamily="34" charset="-122"/>
+                <a:cs typeface="Rajdhani" pitchFamily="34" charset="-120"/>
               </a:rPr>
               <a:t>its thoughts repeat a lesson: distilled into an invariant (and a verify line), a recurring "how" minted as a crafted mind</a:t>
             </a:r>
-            <a:endParaRPr lang="en-US" sz="1300" dirty="0"/>
+            <a:endParaRPr lang="en-US" sz="1500" dirty="0"/>
           </a:p>
         </p:txBody>
       </p:sp>
@@ -4143,17 +4143,17 @@
               <a:buNone/>
             </a:pPr>
             <a:r>
-              <a:rPr lang="en-US" sz="1600" b="1" dirty="0">
+              <a:rPr lang="en-US" sz="1800" b="1" dirty="0">
                 <a:solidFill>
                   <a:srgbClr val="FE8184"/>
                 </a:solidFill>
-                <a:latin typeface="Calibri" pitchFamily="34" charset="0"/>
-                <a:ea typeface="Calibri" pitchFamily="34" charset="-122"/>
-                <a:cs typeface="Calibri" pitchFamily="34" charset="-120"/>
+                <a:latin typeface="Rajdhani" pitchFamily="34" charset="0"/>
+                <a:ea typeface="Rajdhani" pitchFamily="34" charset="-122"/>
+                <a:cs typeface="Rajdhani" pitchFamily="34" charset="-120"/>
               </a:rPr>
               <a:t>rebirth</a:t>
             </a:r>
-            <a:endParaRPr lang="en-US" sz="1600" dirty="0"/>
+            <a:endParaRPr lang="en-US" sz="1800" dirty="0"/>
           </a:p>
         </p:txBody>
       </p:sp>
@@ -4185,17 +4185,17 @@
               <a:buNone/>
             </a:pPr>
             <a:r>
-              <a:rPr lang="en-US" sz="1300" dirty="0">
+              <a:rPr lang="en-US" sz="1500" dirty="0">
                 <a:solidFill>
                   <a:srgbClr val="CACACE"/>
                 </a:solidFill>
-                <a:latin typeface="Calibri" pitchFamily="34" charset="0"/>
-                <a:ea typeface="Calibri" pitchFamily="34" charset="-122"/>
-                <a:cs typeface="Calibri" pitchFamily="34" charset="-120"/>
+                <a:latin typeface="Rajdhani" pitchFamily="34" charset="0"/>
+                <a:ea typeface="Rajdhani" pitchFamily="34" charset="-122"/>
+                <a:cs typeface="Rajdhani" pitchFamily="34" charset="-120"/>
               </a:rPr>
               <a:t>its doc is stale (verify lines red, soil gone): a fresh doc from the code as it is, lessons kept, the old one in the attic</a:t>
             </a:r>
-            <a:endParaRPr lang="en-US" sz="1300" dirty="0"/>
+            <a:endParaRPr lang="en-US" sz="1500" dirty="0"/>
           </a:p>
         </p:txBody>
       </p:sp>
@@ -4234,9 +4234,9 @@
                 <a:solidFill>
                   <a:srgbClr val="FFB300"/>
                 </a:solidFill>
-                <a:latin typeface="Calibri" pitchFamily="34" charset="0"/>
-                <a:ea typeface="Calibri" pitchFamily="34" charset="-122"/>
-                <a:cs typeface="Calibri" pitchFamily="34" charset="-120"/>
+                <a:latin typeface="Rajdhani" pitchFamily="34" charset="0"/>
+                <a:ea typeface="Rajdhani" pitchFamily="34" charset="-122"/>
+                <a:cs typeface="Rajdhani" pitchFamily="34" charset="-120"/>
               </a:rPr>
               <a:t>stressed + full</a:t>
             </a:r>
@@ -4303,9 +4303,9 @@
                 <a:solidFill>
                   <a:srgbClr val="FF8550"/>
                 </a:solidFill>
-                <a:latin typeface="Calibri" pitchFamily="34" charset="0"/>
-                <a:ea typeface="Calibri" pitchFamily="34" charset="-122"/>
-                <a:cs typeface="Calibri" pitchFamily="34" charset="-120"/>
+                <a:latin typeface="Rajdhani" pitchFamily="34" charset="0"/>
+                <a:ea typeface="Rajdhani" pitchFamily="34" charset="-122"/>
+                <a:cs typeface="Rajdhani" pitchFamily="34" charset="-120"/>
               </a:rPr>
               <a:t>arm chosen</a:t>
             </a:r>
@@ -4372,9 +4372,9 @@
                 <a:solidFill>
                   <a:srgbClr val="55A9FF"/>
                 </a:solidFill>
-                <a:latin typeface="Calibri" pitchFamily="34" charset="0"/>
-                <a:ea typeface="Calibri" pitchFamily="34" charset="-122"/>
-                <a:cs typeface="Calibri" pitchFamily="34" charset="-120"/>
+                <a:latin typeface="Rajdhani" pitchFamily="34" charset="0"/>
+                <a:ea typeface="Rajdhani" pitchFamily="34" charset="-122"/>
+                <a:cs typeface="Rajdhani" pitchFamily="34" charset="-120"/>
               </a:rPr>
               <a:t>staged</a:t>
             </a:r>
@@ -4441,9 +4441,9 @@
                 <a:solidFill>
                   <a:srgbClr val="3CD68C"/>
                 </a:solidFill>
-                <a:latin typeface="Calibri" pitchFamily="34" charset="0"/>
-                <a:ea typeface="Calibri" pitchFamily="34" charset="-122"/>
-                <a:cs typeface="Calibri" pitchFamily="34" charset="-120"/>
+                <a:latin typeface="Rajdhani" pitchFamily="34" charset="0"/>
+                <a:ea typeface="Rajdhani" pitchFamily="34" charset="-122"/>
+                <a:cs typeface="Rajdhani" pitchFamily="34" charset="-120"/>
               </a:rPr>
               <a:t>proven</a:t>
             </a:r>
@@ -4510,9 +4510,9 @@
                 <a:solidFill>
                   <a:srgbClr val="E8E8E8"/>
                 </a:solidFill>
-                <a:latin typeface="Calibri" pitchFamily="34" charset="0"/>
-                <a:ea typeface="Calibri" pitchFamily="34" charset="-122"/>
-                <a:cs typeface="Calibri" pitchFamily="34" charset="-120"/>
+                <a:latin typeface="Rajdhani" pitchFamily="34" charset="0"/>
+                <a:ea typeface="Rajdhani" pitchFamily="34" charset="-122"/>
+                <a:cs typeface="Rajdhani" pitchFamily="34" charset="-120"/>
               </a:rPr>
               <a:t>swapped in · logged</a:t>
             </a:r>
@@ -4549,9 +4549,9 @@
                 <a:solidFill>
                   <a:srgbClr val="A3A3AD"/>
                 </a:solidFill>
-                <a:latin typeface="Consolas" pitchFamily="34" charset="0"/>
-                <a:ea typeface="Consolas" pitchFamily="34" charset="-122"/>
-                <a:cs typeface="Consolas" pitchFamily="34" charset="-120"/>
+                <a:latin typeface="JetBrains Mono" pitchFamily="34" charset="0"/>
+                <a:ea typeface="JetBrains Mono" pitchFamily="34" charset="-122"/>
+                <a:cs typeface="JetBrains Mono" pitchFamily="34" charset="-120"/>
               </a:rPr>
               <a:t>mode auto (default) or propose · thoughtsMax 7 · failStreak 3 · cooldownRuns 10 · arms split, mutate, rebirth</a:t>
             </a:r>
@@ -4640,9 +4640,9 @@
                 <a:solidFill>
                   <a:srgbClr val="A3A3AD"/>
                 </a:solidFill>
-                <a:latin typeface="Calibri" pitchFamily="34" charset="0"/>
-                <a:ea typeface="Calibri" pitchFamily="34" charset="-122"/>
-                <a:cs typeface="Calibri" pitchFamily="34" charset="-120"/>
+                <a:latin typeface="Rajdhani" pitchFamily="34" charset="0"/>
+                <a:ea typeface="Rajdhani" pitchFamily="34" charset="-122"/>
+                <a:cs typeface="Rajdhani" pitchFamily="34" charset="-120"/>
               </a:rPr>
               <a:t>ISEKAI ⋄ STRESS AND VALUE</a:t>
             </a:r>
@@ -4679,9 +4679,9 @@
                 <a:solidFill>
                   <a:srgbClr val="A3A3AD"/>
                 </a:solidFill>
-                <a:latin typeface="Calibri" pitchFamily="34" charset="0"/>
-                <a:ea typeface="Calibri" pitchFamily="34" charset="-122"/>
-                <a:cs typeface="Calibri" pitchFamily="34" charset="-120"/>
+                <a:latin typeface="Rajdhani" pitchFamily="34" charset="0"/>
+                <a:ea typeface="Rajdhani" pitchFamily="34" charset="-122"/>
+                <a:cs typeface="Rajdhani" pitchFamily="34" charset="-120"/>
               </a:rPr>
               <a:t>11</a:t>
             </a:r>
@@ -4718,9 +4718,9 @@
                 <a:solidFill>
                   <a:srgbClr val="FF8550"/>
                 </a:solidFill>
-                <a:latin typeface="Calibri" pitchFamily="34" charset="0"/>
-                <a:ea typeface="Calibri" pitchFamily="34" charset="-122"/>
-                <a:cs typeface="Calibri" pitchFamily="34" charset="-120"/>
+                <a:latin typeface="Rajdhani" pitchFamily="34" charset="0"/>
+                <a:ea typeface="Rajdhani" pitchFamily="34" charset="-122"/>
+                <a:cs typeface="Rajdhani" pitchFamily="34" charset="-120"/>
               </a:rPr>
               <a:t>CONFIGURATION</a:t>
             </a:r>
@@ -4753,17 +4753,17 @@
               <a:buNone/>
             </a:pPr>
             <a:r>
-              <a:rPr lang="en-US" sz="2800" dirty="0">
+              <a:rPr lang="en-US" sz="2400" b="1" dirty="0">
                 <a:solidFill>
                   <a:srgbClr val="E8E8E8"/>
                 </a:solidFill>
-                <a:latin typeface="Arial Black" pitchFamily="34" charset="0"/>
-                <a:ea typeface="Arial Black" pitchFamily="34" charset="-122"/>
-                <a:cs typeface="Arial Black" pitchFamily="34" charset="-120"/>
+                <a:latin typeface="Orbitron" pitchFamily="34" charset="0"/>
+                <a:ea typeface="Orbitron" pitchFamily="34" charset="-122"/>
+                <a:cs typeface="Orbitron" pitchFamily="34" charset="-120"/>
               </a:rPr>
               <a:t>Every line of it is config — the defaults shown</a:t>
             </a:r>
-            <a:endParaRPr lang="en-US" sz="2800" dirty="0"/>
+            <a:endParaRPr lang="en-US" sz="2400" dirty="0"/>
           </a:p>
         </p:txBody>
       </p:sp>
@@ -4802,9 +4802,9 @@
                 <a:solidFill>
                   <a:srgbClr val="E8E8E8"/>
                 </a:solidFill>
-                <a:latin typeface="Consolas" pitchFamily="34" charset="0"/>
-                <a:ea typeface="Consolas" pitchFamily="34" charset="-122"/>
-                <a:cs typeface="Consolas" pitchFamily="34" charset="-120"/>
+                <a:latin typeface="JetBrains Mono" pitchFamily="34" charset="0"/>
+                <a:ea typeface="JetBrains Mono" pitchFamily="34" charset="-122"/>
+                <a:cs typeface="JetBrains Mono" pitchFamily="34" charset="-120"/>
               </a:rPr>
               <a:t>law:</a:t>
             </a:r>
@@ -4819,9 +4819,9 @@
                 <a:solidFill>
                   <a:srgbClr val="E8E8E8"/>
                 </a:solidFill>
-                <a:latin typeface="Consolas" pitchFamily="34" charset="0"/>
-                <a:ea typeface="Consolas" pitchFamily="34" charset="-122"/>
-                <a:cs typeface="Consolas" pitchFamily="34" charset="-120"/>
+                <a:latin typeface="JetBrains Mono" pitchFamily="34" charset="0"/>
+                <a:ea typeface="JetBrains Mono" pitchFamily="34" charset="-122"/>
+                <a:cs typeface="JetBrains Mono" pitchFamily="34" charset="-120"/>
               </a:rPr>
               <a:t>  value:</a:t>
             </a:r>
@@ -4836,9 +4836,9 @@
                 <a:solidFill>
                   <a:srgbClr val="E8E8E8"/>
                 </a:solidFill>
-                <a:latin typeface="Consolas" pitchFamily="34" charset="0"/>
-                <a:ea typeface="Consolas" pitchFamily="34" charset="-122"/>
-                <a:cs typeface="Consolas" pitchFamily="34" charset="-120"/>
+                <a:latin typeface="JetBrains Mono" pitchFamily="34" charset="0"/>
+                <a:ea typeface="JetBrains Mono" pitchFamily="34" charset="-122"/>
+                <a:cs typeface="JetBrains Mono" pitchFamily="34" charset="-120"/>
               </a:rPr>
               <a:t>    enabled: true</a:t>
             </a:r>
@@ -4853,9 +4853,9 @@
                 <a:solidFill>
                   <a:srgbClr val="E8E8E8"/>
                 </a:solidFill>
-                <a:latin typeface="Consolas" pitchFamily="34" charset="0"/>
-                <a:ea typeface="Consolas" pitchFamily="34" charset="-122"/>
-                <a:cs typeface="Consolas" pitchFamily="34" charset="-120"/>
+                <a:latin typeface="JetBrains Mono" pitchFamily="34" charset="0"/>
+                <a:ea typeface="JetBrains Mono" pitchFamily="34" charset="-122"/>
+                <a:cs typeface="JetBrains Mono" pitchFamily="34" charset="-120"/>
               </a:rPr>
               <a:t>    window: 28d</a:t>
             </a:r>
@@ -4870,9 +4870,9 @@
                 <a:solidFill>
                   <a:srgbClr val="E8E8E8"/>
                 </a:solidFill>
-                <a:latin typeface="Consolas" pitchFamily="34" charset="0"/>
-                <a:ea typeface="Consolas" pitchFamily="34" charset="-122"/>
-                <a:cs typeface="Consolas" pitchFamily="34" charset="-120"/>
+                <a:latin typeface="JetBrains Mono" pitchFamily="34" charset="0"/>
+                <a:ea typeface="JetBrains Mono" pitchFamily="34" charset="-122"/>
+                <a:cs typeface="JetBrains Mono" pitchFamily="34" charset="-120"/>
               </a:rPr>
               <a:t>    pass: [DONE, PASS]</a:t>
             </a:r>
@@ -4887,9 +4887,9 @@
                 <a:solidFill>
                   <a:srgbClr val="E8E8E8"/>
                 </a:solidFill>
-                <a:latin typeface="Consolas" pitchFamily="34" charset="0"/>
-                <a:ea typeface="Consolas" pitchFamily="34" charset="-122"/>
-                <a:cs typeface="Consolas" pitchFamily="34" charset="-120"/>
+                <a:latin typeface="JetBrains Mono" pitchFamily="34" charset="0"/>
+                <a:ea typeface="JetBrains Mono" pitchFamily="34" charset="-122"/>
+                <a:cs typeface="JetBrains Mono" pitchFamily="34" charset="-120"/>
               </a:rPr>
               <a:t>    fail: [FAIL, ESCALATE, CHECKPOINT]</a:t>
             </a:r>
@@ -4904,9 +4904,9 @@
                 <a:solidFill>
                   <a:srgbClr val="E8E8E8"/>
                 </a:solidFill>
-                <a:latin typeface="Consolas" pitchFamily="34" charset="0"/>
-                <a:ea typeface="Consolas" pitchFamily="34" charset="-122"/>
-                <a:cs typeface="Consolas" pitchFamily="34" charset="-120"/>
+                <a:latin typeface="JetBrains Mono" pitchFamily="34" charset="0"/>
+                <a:ea typeface="JetBrains Mono" pitchFamily="34" charset="-122"/>
+                <a:cs typeface="JetBrains Mono" pitchFamily="34" charset="-120"/>
               </a:rPr>
               <a:t>    neutral: [DENIED, INTERRUPTED, DRY, SUSPENDED]</a:t>
             </a:r>
@@ -4921,9 +4921,9 @@
                 <a:solidFill>
                   <a:srgbClr val="E8E8E8"/>
                 </a:solidFill>
-                <a:latin typeface="Consolas" pitchFamily="34" charset="0"/>
-                <a:ea typeface="Consolas" pitchFamily="34" charset="-122"/>
-                <a:cs typeface="Consolas" pitchFamily="34" charset="-120"/>
+                <a:latin typeface="JetBrains Mono" pitchFamily="34" charset="0"/>
+                <a:ea typeface="JetBrains Mono" pitchFamily="34" charset="-122"/>
+                <a:cs typeface="JetBrains Mono" pitchFamily="34" charset="-120"/>
               </a:rPr>
               <a:t>    reopenTurns: 3</a:t>
             </a:r>
@@ -4938,9 +4938,9 @@
                 <a:solidFill>
                   <a:srgbClr val="E8E8E8"/>
                 </a:solidFill>
-                <a:latin typeface="Consolas" pitchFamily="34" charset="0"/>
-                <a:ea typeface="Consolas" pitchFamily="34" charset="-122"/>
-                <a:cs typeface="Consolas" pitchFamily="34" charset="-120"/>
+                <a:latin typeface="JetBrains Mono" pitchFamily="34" charset="0"/>
+                <a:ea typeface="JetBrains Mono" pitchFamily="34" charset="-122"/>
+                <a:cs typeface="JetBrains Mono" pitchFamily="34" charset="-120"/>
               </a:rPr>
               <a:t>    minRecord: 5</a:t>
             </a:r>
@@ -4955,9 +4955,9 @@
                 <a:solidFill>
                   <a:srgbClr val="E8E8E8"/>
                 </a:solidFill>
-                <a:latin typeface="Consolas" pitchFamily="34" charset="0"/>
-                <a:ea typeface="Consolas" pitchFamily="34" charset="-122"/>
-                <a:cs typeface="Consolas" pitchFamily="34" charset="-120"/>
+                <a:latin typeface="JetBrains Mono" pitchFamily="34" charset="0"/>
+                <a:ea typeface="JetBrains Mono" pitchFamily="34" charset="-122"/>
+                <a:cs typeface="JetBrains Mono" pitchFamily="34" charset="-120"/>
               </a:rPr>
               <a:t>    families: {}</a:t>
             </a:r>
@@ -5000,9 +5000,9 @@
                 <a:solidFill>
                   <a:srgbClr val="E8E8E8"/>
                 </a:solidFill>
-                <a:latin typeface="Consolas" pitchFamily="34" charset="0"/>
-                <a:ea typeface="Consolas" pitchFamily="34" charset="-122"/>
-                <a:cs typeface="Consolas" pitchFamily="34" charset="-120"/>
+                <a:latin typeface="JetBrains Mono" pitchFamily="34" charset="0"/>
+                <a:ea typeface="JetBrains Mono" pitchFamily="34" charset="-122"/>
+                <a:cs typeface="JetBrains Mono" pitchFamily="34" charset="-120"/>
               </a:rPr>
               <a:t>law:</a:t>
             </a:r>
@@ -5017,9 +5017,9 @@
                 <a:solidFill>
                   <a:srgbClr val="E8E8E8"/>
                 </a:solidFill>
-                <a:latin typeface="Consolas" pitchFamily="34" charset="0"/>
-                <a:ea typeface="Consolas" pitchFamily="34" charset="-122"/>
-                <a:cs typeface="Consolas" pitchFamily="34" charset="-120"/>
+                <a:latin typeface="JetBrains Mono" pitchFamily="34" charset="0"/>
+                <a:ea typeface="JetBrains Mono" pitchFamily="34" charset="-122"/>
+                <a:cs typeface="JetBrains Mono" pitchFamily="34" charset="-120"/>
               </a:rPr>
               <a:t>  stress:</a:t>
             </a:r>
@@ -5034,9 +5034,9 @@
                 <a:solidFill>
                   <a:srgbClr val="E8E8E8"/>
                 </a:solidFill>
-                <a:latin typeface="Consolas" pitchFamily="34" charset="0"/>
-                <a:ea typeface="Consolas" pitchFamily="34" charset="-122"/>
-                <a:cs typeface="Consolas" pitchFamily="34" charset="-120"/>
+                <a:latin typeface="JetBrains Mono" pitchFamily="34" charset="0"/>
+                <a:ea typeface="JetBrains Mono" pitchFamily="34" charset="-122"/>
+                <a:cs typeface="JetBrains Mono" pitchFamily="34" charset="-120"/>
               </a:rPr>
               <a:t>    escalateAt: 5     # 0 = council off</a:t>
             </a:r>
@@ -5051,9 +5051,9 @@
                 <a:solidFill>
                   <a:srgbClr val="E8E8E8"/>
                 </a:solidFill>
-                <a:latin typeface="Consolas" pitchFamily="34" charset="0"/>
-                <a:ea typeface="Consolas" pitchFamily="34" charset="-122"/>
-                <a:cs typeface="Consolas" pitchFamily="34" charset="-120"/>
+                <a:latin typeface="JetBrains Mono" pitchFamily="34" charset="0"/>
+                <a:ea typeface="JetBrains Mono" pitchFamily="34" charset="-122"/>
+                <a:cs typeface="JetBrains Mono" pitchFamily="34" charset="-120"/>
               </a:rPr>
               <a:t>    maxConsults: 3</a:t>
             </a:r>
@@ -5068,9 +5068,9 @@
                 <a:solidFill>
                   <a:srgbClr val="E8E8E8"/>
                 </a:solidFill>
-                <a:latin typeface="Consolas" pitchFamily="34" charset="0"/>
-                <a:ea typeface="Consolas" pitchFamily="34" charset="-122"/>
-                <a:cs typeface="Consolas" pitchFamily="34" charset="-120"/>
+                <a:latin typeface="JetBrains Mono" pitchFamily="34" charset="0"/>
+                <a:ea typeface="JetBrains Mono" pitchFamily="34" charset="-122"/>
+                <a:cs typeface="JetBrains Mono" pitchFamily="34" charset="-120"/>
               </a:rPr>
               <a:t>    relieveAt: 7      # 0 = relief off</a:t>
             </a:r>
@@ -5085,9 +5085,9 @@
                 <a:solidFill>
                   <a:srgbClr val="E8E8E8"/>
                 </a:solidFill>
-                <a:latin typeface="Consolas" pitchFamily="34" charset="0"/>
-                <a:ea typeface="Consolas" pitchFamily="34" charset="-122"/>
-                <a:cs typeface="Consolas" pitchFamily="34" charset="-120"/>
+                <a:latin typeface="JetBrains Mono" pitchFamily="34" charset="0"/>
+                <a:ea typeface="JetBrains Mono" pitchFamily="34" charset="-122"/>
+                <a:cs typeface="JetBrains Mono" pitchFamily="34" charset="-120"/>
               </a:rPr>
               <a:t>  evolution:</a:t>
             </a:r>
@@ -5102,9 +5102,9 @@
                 <a:solidFill>
                   <a:srgbClr val="E8E8E8"/>
                 </a:solidFill>
-                <a:latin typeface="Consolas" pitchFamily="34" charset="0"/>
-                <a:ea typeface="Consolas" pitchFamily="34" charset="-122"/>
-                <a:cs typeface="Consolas" pitchFamily="34" charset="-120"/>
+                <a:latin typeface="JetBrains Mono" pitchFamily="34" charset="0"/>
+                <a:ea typeface="JetBrains Mono" pitchFamily="34" charset="-122"/>
+                <a:cs typeface="JetBrains Mono" pitchFamily="34" charset="-120"/>
               </a:rPr>
               <a:t>    enabled: true</a:t>
             </a:r>
@@ -5119,9 +5119,9 @@
                 <a:solidFill>
                   <a:srgbClr val="E8E8E8"/>
                 </a:solidFill>
-                <a:latin typeface="Consolas" pitchFamily="34" charset="0"/>
-                <a:ea typeface="Consolas" pitchFamily="34" charset="-122"/>
-                <a:cs typeface="Consolas" pitchFamily="34" charset="-120"/>
+                <a:latin typeface="JetBrains Mono" pitchFamily="34" charset="0"/>
+                <a:ea typeface="JetBrains Mono" pitchFamily="34" charset="-122"/>
+                <a:cs typeface="JetBrains Mono" pitchFamily="34" charset="-120"/>
               </a:rPr>
               <a:t>    mode: auto        # or propose</a:t>
             </a:r>
@@ -5136,9 +5136,9 @@
                 <a:solidFill>
                   <a:srgbClr val="E8E8E8"/>
                 </a:solidFill>
-                <a:latin typeface="Consolas" pitchFamily="34" charset="0"/>
-                <a:ea typeface="Consolas" pitchFamily="34" charset="-122"/>
-                <a:cs typeface="Consolas" pitchFamily="34" charset="-120"/>
+                <a:latin typeface="JetBrains Mono" pitchFamily="34" charset="0"/>
+                <a:ea typeface="JetBrains Mono" pitchFamily="34" charset="-122"/>
+                <a:cs typeface="JetBrains Mono" pitchFamily="34" charset="-120"/>
               </a:rPr>
               <a:t>    thoughtsMax: 7</a:t>
             </a:r>
@@ -5153,9 +5153,9 @@
                 <a:solidFill>
                   <a:srgbClr val="E8E8E8"/>
                 </a:solidFill>
-                <a:latin typeface="Consolas" pitchFamily="34" charset="0"/>
-                <a:ea typeface="Consolas" pitchFamily="34" charset="-122"/>
-                <a:cs typeface="Consolas" pitchFamily="34" charset="-120"/>
+                <a:latin typeface="JetBrains Mono" pitchFamily="34" charset="0"/>
+                <a:ea typeface="JetBrains Mono" pitchFamily="34" charset="-122"/>
+                <a:cs typeface="JetBrains Mono" pitchFamily="34" charset="-120"/>
               </a:rPr>
               <a:t>    stressAt: 0       # 0 = escalateAt</a:t>
             </a:r>
@@ -5170,9 +5170,9 @@
                 <a:solidFill>
                   <a:srgbClr val="E8E8E8"/>
                 </a:solidFill>
-                <a:latin typeface="Consolas" pitchFamily="34" charset="0"/>
-                <a:ea typeface="Consolas" pitchFamily="34" charset="-122"/>
-                <a:cs typeface="Consolas" pitchFamily="34" charset="-120"/>
+                <a:latin typeface="JetBrains Mono" pitchFamily="34" charset="0"/>
+                <a:ea typeface="JetBrains Mono" pitchFamily="34" charset="-122"/>
+                <a:cs typeface="JetBrains Mono" pitchFamily="34" charset="-120"/>
               </a:rPr>
               <a:t>    failStreak: 3</a:t>
             </a:r>
@@ -5187,9 +5187,9 @@
                 <a:solidFill>
                   <a:srgbClr val="E8E8E8"/>
                 </a:solidFill>
-                <a:latin typeface="Consolas" pitchFamily="34" charset="0"/>
-                <a:ea typeface="Consolas" pitchFamily="34" charset="-122"/>
-                <a:cs typeface="Consolas" pitchFamily="34" charset="-120"/>
+                <a:latin typeface="JetBrains Mono" pitchFamily="34" charset="0"/>
+                <a:ea typeface="JetBrains Mono" pitchFamily="34" charset="-122"/>
+                <a:cs typeface="JetBrains Mono" pitchFamily="34" charset="-120"/>
               </a:rPr>
               <a:t>    cooldownRuns: 10</a:t>
             </a:r>
@@ -5204,9 +5204,9 @@
                 <a:solidFill>
                   <a:srgbClr val="E8E8E8"/>
                 </a:solidFill>
-                <a:latin typeface="Consolas" pitchFamily="34" charset="0"/>
-                <a:ea typeface="Consolas" pitchFamily="34" charset="-122"/>
-                <a:cs typeface="Consolas" pitchFamily="34" charset="-120"/>
+                <a:latin typeface="JetBrains Mono" pitchFamily="34" charset="0"/>
+                <a:ea typeface="JetBrains Mono" pitchFamily="34" charset="-122"/>
+                <a:cs typeface="JetBrains Mono" pitchFamily="34" charset="-120"/>
               </a:rPr>
               <a:t>    arms: [split, mutate, rebirth]</a:t>
             </a:r>
@@ -5295,9 +5295,9 @@
                 <a:solidFill>
                   <a:srgbClr val="A3A3AD"/>
                 </a:solidFill>
-                <a:latin typeface="Calibri" pitchFamily="34" charset="0"/>
-                <a:ea typeface="Calibri" pitchFamily="34" charset="-122"/>
-                <a:cs typeface="Calibri" pitchFamily="34" charset="-120"/>
+                <a:latin typeface="Rajdhani" pitchFamily="34" charset="0"/>
+                <a:ea typeface="Rajdhani" pitchFamily="34" charset="-122"/>
+                <a:cs typeface="Rajdhani" pitchFamily="34" charset="-120"/>
               </a:rPr>
               <a:t>ISEKAI ⋄ STRESS AND VALUE</a:t>
             </a:r>
@@ -5334,9 +5334,9 @@
                 <a:solidFill>
                   <a:srgbClr val="A3A3AD"/>
                 </a:solidFill>
-                <a:latin typeface="Calibri" pitchFamily="34" charset="0"/>
-                <a:ea typeface="Calibri" pitchFamily="34" charset="-122"/>
-                <a:cs typeface="Calibri" pitchFamily="34" charset="-120"/>
+                <a:latin typeface="Rajdhani" pitchFamily="34" charset="0"/>
+                <a:ea typeface="Rajdhani" pitchFamily="34" charset="-122"/>
+                <a:cs typeface="Rajdhani" pitchFamily="34" charset="-120"/>
               </a:rPr>
               <a:t>12</a:t>
             </a:r>
@@ -5373,9 +5373,9 @@
                 <a:solidFill>
                   <a:srgbClr val="E8E8E8"/>
                 </a:solidFill>
-                <a:latin typeface="Arial Black" pitchFamily="34" charset="0"/>
-                <a:ea typeface="Arial Black" pitchFamily="34" charset="-122"/>
-                <a:cs typeface="Arial Black" pitchFamily="34" charset="-120"/>
+                <a:latin typeface="Orbitron" pitchFamily="34" charset="0"/>
+                <a:ea typeface="Orbitron" pitchFamily="34" charset="-122"/>
+                <a:cs typeface="Orbitron" pitchFamily="34" charset="-120"/>
               </a:rPr>
               <a:t>Measured, answered, healed</a:t>
             </a:r>
@@ -5432,9 +5432,9 @@
                 <a:solidFill>
                   <a:srgbClr val="CACACE"/>
                 </a:solidFill>
-                <a:latin typeface="Calibri" pitchFamily="34" charset="0"/>
-                <a:ea typeface="Calibri" pitchFamily="34" charset="-122"/>
-                <a:cs typeface="Calibri" pitchFamily="34" charset="-120"/>
+                <a:latin typeface="Rajdhani" pitchFamily="34" charset="0"/>
+                <a:ea typeface="Rajdhani" pitchFamily="34" charset="-122"/>
+                <a:cs typeface="Rajdhani" pitchFamily="34" charset="-120"/>
               </a:rPr>
               <a:t>Value — each family scored by its own job, banded on a meter</a:t>
             </a:r>
@@ -5491,9 +5491,9 @@
                 <a:solidFill>
                   <a:srgbClr val="CACACE"/>
                 </a:solidFill>
-                <a:latin typeface="Calibri" pitchFamily="34" charset="0"/>
-                <a:ea typeface="Calibri" pitchFamily="34" charset="-122"/>
-                <a:cs typeface="Calibri" pitchFamily="34" charset="-120"/>
+                <a:latin typeface="Rajdhani" pitchFamily="34" charset="0"/>
+                <a:ea typeface="Rajdhani" pitchFamily="34" charset="-122"/>
+                <a:cs typeface="Rajdhani" pitchFamily="34" charset="-120"/>
               </a:rPr>
               <a:t>Stress — strain from runs that never land, cleared by a clean one</a:t>
             </a:r>
@@ -5550,9 +5550,9 @@
                 <a:solidFill>
                   <a:srgbClr val="CACACE"/>
                 </a:solidFill>
-                <a:latin typeface="Calibri" pitchFamily="34" charset="0"/>
-                <a:ea typeface="Calibri" pitchFamily="34" charset="-122"/>
-                <a:cs typeface="Calibri" pitchFamily="34" charset="-120"/>
+                <a:latin typeface="Rajdhani" pitchFamily="34" charset="0"/>
+                <a:ea typeface="Rajdhani" pitchFamily="34" charset="-122"/>
+                <a:cs typeface="Rajdhani" pitchFamily="34" charset="-120"/>
               </a:rPr>
               <a:t>The council — the manager answers before the creature drowns</a:t>
             </a:r>
@@ -5609,9 +5609,9 @@
                 <a:solidFill>
                   <a:srgbClr val="CACACE"/>
                 </a:solidFill>
-                <a:latin typeface="Calibri" pitchFamily="34" charset="0"/>
-                <a:ea typeface="Calibri" pitchFamily="34" charset="-122"/>
-                <a:cs typeface="Calibri" pitchFamily="34" charset="-120"/>
+                <a:latin typeface="Rajdhani" pitchFamily="34" charset="0"/>
+                <a:ea typeface="Rajdhani" pitchFamily="34" charset="-122"/>
+                <a:cs typeface="Rajdhani" pitchFamily="34" charset="-120"/>
               </a:rPr>
               <a:t>Relief and evolution — the territory or the creature changes, proven first</a:t>
             </a:r>
@@ -5700,9 +5700,9 @@
                 <a:solidFill>
                   <a:srgbClr val="A3A3AD"/>
                 </a:solidFill>
-                <a:latin typeface="Calibri" pitchFamily="34" charset="0"/>
-                <a:ea typeface="Calibri" pitchFamily="34" charset="-122"/>
-                <a:cs typeface="Calibri" pitchFamily="34" charset="-120"/>
+                <a:latin typeface="Rajdhani" pitchFamily="34" charset="0"/>
+                <a:ea typeface="Rajdhani" pitchFamily="34" charset="-122"/>
+                <a:cs typeface="Rajdhani" pitchFamily="34" charset="-120"/>
               </a:rPr>
               <a:t>ISEKAI ⋄ STRESS AND VALUE</a:t>
             </a:r>
@@ -5739,9 +5739,9 @@
                 <a:solidFill>
                   <a:srgbClr val="A3A3AD"/>
                 </a:solidFill>
-                <a:latin typeface="Calibri" pitchFamily="34" charset="0"/>
-                <a:ea typeface="Calibri" pitchFamily="34" charset="-122"/>
-                <a:cs typeface="Calibri" pitchFamily="34" charset="-120"/>
+                <a:latin typeface="Rajdhani" pitchFamily="34" charset="0"/>
+                <a:ea typeface="Rajdhani" pitchFamily="34" charset="-122"/>
+                <a:cs typeface="Rajdhani" pitchFamily="34" charset="-120"/>
               </a:rPr>
               <a:t>2</a:t>
             </a:r>
@@ -5778,9 +5778,9 @@
                 <a:solidFill>
                   <a:srgbClr val="FF8550"/>
                 </a:solidFill>
-                <a:latin typeface="Calibri" pitchFamily="34" charset="0"/>
-                <a:ea typeface="Calibri" pitchFamily="34" charset="-122"/>
-                <a:cs typeface="Calibri" pitchFamily="34" charset="-120"/>
+                <a:latin typeface="Rajdhani" pitchFamily="34" charset="0"/>
+                <a:ea typeface="Rajdhani" pitchFamily="34" charset="-122"/>
+                <a:cs typeface="Rajdhani" pitchFamily="34" charset="-120"/>
               </a:rPr>
               <a:t>THE LOOP</a:t>
             </a:r>
@@ -5813,17 +5813,17 @@
               <a:buNone/>
             </a:pPr>
             <a:r>
-              <a:rPr lang="en-US" sz="2800" dirty="0">
+              <a:rPr lang="en-US" sz="2400" b="1" dirty="0">
                 <a:solidFill>
                   <a:srgbClr val="E8E8E8"/>
                 </a:solidFill>
-                <a:latin typeface="Arial Black" pitchFamily="34" charset="0"/>
-                <a:ea typeface="Arial Black" pitchFamily="34" charset="-122"/>
-                <a:cs typeface="Arial Black" pitchFamily="34" charset="-120"/>
+                <a:latin typeface="Orbitron" pitchFamily="34" charset="0"/>
+                <a:ea typeface="Orbitron" pitchFamily="34" charset="-122"/>
+                <a:cs typeface="Orbitron" pitchFamily="34" charset="-120"/>
               </a:rPr>
               <a:t>Two readings: value says how well, stress says how often it breaks</a:t>
             </a:r>
-            <a:endParaRPr lang="en-US" sz="2800" dirty="0"/>
+            <a:endParaRPr lang="en-US" sz="2400" dirty="0"/>
           </a:p>
         </p:txBody>
       </p:sp>
@@ -5897,17 +5897,17 @@
               <a:buNone/>
             </a:pPr>
             <a:r>
-              <a:rPr lang="en-US" sz="1600" b="1" dirty="0">
+              <a:rPr lang="en-US" sz="1800" b="1" dirty="0">
                 <a:solidFill>
                   <a:srgbClr val="55A9FF"/>
                 </a:solidFill>
-                <a:latin typeface="Calibri" pitchFamily="34" charset="0"/>
-                <a:ea typeface="Calibri" pitchFamily="34" charset="-122"/>
-                <a:cs typeface="Calibri" pitchFamily="34" charset="-120"/>
+                <a:latin typeface="Rajdhani" pitchFamily="34" charset="0"/>
+                <a:ea typeface="Rajdhani" pitchFamily="34" charset="-122"/>
+                <a:cs typeface="Rajdhani" pitchFamily="34" charset="-120"/>
               </a:rPr>
               <a:t>Run lands</a:t>
             </a:r>
-            <a:endParaRPr lang="en-US" sz="1600" dirty="0"/>
+            <a:endParaRPr lang="en-US" sz="1800" dirty="0"/>
           </a:p>
         </p:txBody>
       </p:sp>
@@ -5939,17 +5939,17 @@
               <a:buNone/>
             </a:pPr>
             <a:r>
-              <a:rPr lang="en-US" sz="1300" dirty="0">
+              <a:rPr lang="en-US" sz="1500" dirty="0">
                 <a:solidFill>
                   <a:srgbClr val="CACACE"/>
                 </a:solidFill>
-                <a:latin typeface="Calibri" pitchFamily="34" charset="0"/>
-                <a:ea typeface="Calibri" pitchFamily="34" charset="-122"/>
-                <a:cs typeface="Calibri" pitchFamily="34" charset="-120"/>
+                <a:latin typeface="Rajdhani" pitchFamily="34" charset="0"/>
+                <a:ea typeface="Rajdhani" pitchFamily="34" charset="-122"/>
+                <a:cs typeface="Rajdhani" pitchFamily="34" charset="-120"/>
               </a:rPr>
               <a:t>pass · fail · neutral</a:t>
             </a:r>
-            <a:endParaRPr lang="en-US" sz="1300" dirty="0"/>
+            <a:endParaRPr lang="en-US" sz="1500" dirty="0"/>
           </a:p>
         </p:txBody>
       </p:sp>
@@ -6047,17 +6047,17 @@
               <a:buNone/>
             </a:pPr>
             <a:r>
-              <a:rPr lang="en-US" sz="1600" b="1" dirty="0">
+              <a:rPr lang="en-US" sz="1800" b="1" dirty="0">
                 <a:solidFill>
                   <a:srgbClr val="3CD68C"/>
                 </a:solidFill>
-                <a:latin typeface="Calibri" pitchFamily="34" charset="0"/>
-                <a:ea typeface="Calibri" pitchFamily="34" charset="-122"/>
-                <a:cs typeface="Calibri" pitchFamily="34" charset="-120"/>
+                <a:latin typeface="Rajdhani" pitchFamily="34" charset="0"/>
+                <a:ea typeface="Rajdhani" pitchFamily="34" charset="-122"/>
+                <a:cs typeface="Rajdhani" pitchFamily="34" charset="-120"/>
               </a:rPr>
               <a:t>Value</a:t>
             </a:r>
-            <a:endParaRPr lang="en-US" sz="1600" dirty="0"/>
+            <a:endParaRPr lang="en-US" sz="1800" dirty="0"/>
           </a:p>
         </p:txBody>
       </p:sp>
@@ -6089,17 +6089,17 @@
               <a:buNone/>
             </a:pPr>
             <a:r>
-              <a:rPr lang="en-US" sz="1300" dirty="0">
+              <a:rPr lang="en-US" sz="1500" dirty="0">
                 <a:solidFill>
                   <a:srgbClr val="CACACE"/>
                 </a:solidFill>
-                <a:latin typeface="Calibri" pitchFamily="34" charset="0"/>
-                <a:ea typeface="Calibri" pitchFamily="34" charset="-122"/>
-                <a:cs typeface="Calibri" pitchFamily="34" charset="-120"/>
+                <a:latin typeface="Rajdhani" pitchFamily="34" charset="0"/>
+                <a:ea typeface="Rajdhani" pitchFamily="34" charset="-122"/>
+                <a:cs typeface="Rajdhani" pitchFamily="34" charset="-120"/>
               </a:rPr>
               <a:t>a score per family</a:t>
             </a:r>
-            <a:endParaRPr lang="en-US" sz="1300" dirty="0"/>
+            <a:endParaRPr lang="en-US" sz="1500" dirty="0"/>
           </a:p>
         </p:txBody>
       </p:sp>
@@ -6197,17 +6197,17 @@
               <a:buNone/>
             </a:pPr>
             <a:r>
-              <a:rPr lang="en-US" sz="1600" b="1" dirty="0">
+              <a:rPr lang="en-US" sz="1800" b="1" dirty="0">
                 <a:solidFill>
                   <a:srgbClr val="FFB300"/>
                 </a:solidFill>
-                <a:latin typeface="Calibri" pitchFamily="34" charset="0"/>
-                <a:ea typeface="Calibri" pitchFamily="34" charset="-122"/>
-                <a:cs typeface="Calibri" pitchFamily="34" charset="-120"/>
+                <a:latin typeface="Rajdhani" pitchFamily="34" charset="0"/>
+                <a:ea typeface="Rajdhani" pitchFamily="34" charset="-122"/>
+                <a:cs typeface="Rajdhani" pitchFamily="34" charset="-120"/>
               </a:rPr>
               <a:t>Strain</a:t>
             </a:r>
-            <a:endParaRPr lang="en-US" sz="1600" dirty="0"/>
+            <a:endParaRPr lang="en-US" sz="1800" dirty="0"/>
           </a:p>
         </p:txBody>
       </p:sp>
@@ -6239,17 +6239,17 @@
               <a:buNone/>
             </a:pPr>
             <a:r>
-              <a:rPr lang="en-US" sz="1300" dirty="0">
+              <a:rPr lang="en-US" sz="1500" dirty="0">
                 <a:solidFill>
                   <a:srgbClr val="CACACE"/>
                 </a:solidFill>
-                <a:latin typeface="Calibri" pitchFamily="34" charset="0"/>
-                <a:ea typeface="Calibri" pitchFamily="34" charset="-122"/>
-                <a:cs typeface="Calibri" pitchFamily="34" charset="-120"/>
+                <a:latin typeface="Rajdhani" pitchFamily="34" charset="0"/>
+                <a:ea typeface="Rajdhani" pitchFamily="34" charset="-122"/>
+                <a:cs typeface="Rajdhani" pitchFamily="34" charset="-120"/>
               </a:rPr>
               <a:t>runs that never land</a:t>
             </a:r>
-            <a:endParaRPr lang="en-US" sz="1300" dirty="0"/>
+            <a:endParaRPr lang="en-US" sz="1500" dirty="0"/>
           </a:p>
         </p:txBody>
       </p:sp>
@@ -6347,17 +6347,17 @@
               <a:buNone/>
             </a:pPr>
             <a:r>
-              <a:rPr lang="en-US" sz="1600" b="1" dirty="0">
+              <a:rPr lang="en-US" sz="1800" b="1" dirty="0">
                 <a:solidFill>
                   <a:srgbClr val="FF8550"/>
                 </a:solidFill>
-                <a:latin typeface="Calibri" pitchFamily="34" charset="0"/>
-                <a:ea typeface="Calibri" pitchFamily="34" charset="-122"/>
-                <a:cs typeface="Calibri" pitchFamily="34" charset="-120"/>
+                <a:latin typeface="Rajdhani" pitchFamily="34" charset="0"/>
+                <a:ea typeface="Rajdhani" pitchFamily="34" charset="-122"/>
+                <a:cs typeface="Rajdhani" pitchFamily="34" charset="-120"/>
               </a:rPr>
               <a:t>Council</a:t>
             </a:r>
-            <a:endParaRPr lang="en-US" sz="1600" dirty="0"/>
+            <a:endParaRPr lang="en-US" sz="1800" dirty="0"/>
           </a:p>
         </p:txBody>
       </p:sp>
@@ -6389,17 +6389,17 @@
               <a:buNone/>
             </a:pPr>
             <a:r>
-              <a:rPr lang="en-US" sz="1300" dirty="0">
+              <a:rPr lang="en-US" sz="1500" dirty="0">
                 <a:solidFill>
                   <a:srgbClr val="CACACE"/>
                 </a:solidFill>
-                <a:latin typeface="Calibri" pitchFamily="34" charset="0"/>
-                <a:ea typeface="Calibri" pitchFamily="34" charset="-122"/>
-                <a:cs typeface="Calibri" pitchFamily="34" charset="-120"/>
+                <a:latin typeface="Rajdhani" pitchFamily="34" charset="0"/>
+                <a:ea typeface="Rajdhani" pitchFamily="34" charset="-122"/>
+                <a:cs typeface="Rajdhani" pitchFamily="34" charset="-120"/>
               </a:rPr>
               <a:t>the manager must answer</a:t>
             </a:r>
-            <a:endParaRPr lang="en-US" sz="1300" dirty="0"/>
+            <a:endParaRPr lang="en-US" sz="1500" dirty="0"/>
           </a:p>
         </p:txBody>
       </p:sp>
@@ -6497,17 +6497,17 @@
               <a:buNone/>
             </a:pPr>
             <a:r>
-              <a:rPr lang="en-US" sz="1600" b="1" dirty="0">
+              <a:rPr lang="en-US" sz="1800" b="1" dirty="0">
                 <a:solidFill>
                   <a:srgbClr val="FE8184"/>
                 </a:solidFill>
-                <a:latin typeface="Calibri" pitchFamily="34" charset="0"/>
-                <a:ea typeface="Calibri" pitchFamily="34" charset="-122"/>
-                <a:cs typeface="Calibri" pitchFamily="34" charset="-120"/>
+                <a:latin typeface="Rajdhani" pitchFamily="34" charset="0"/>
+                <a:ea typeface="Rajdhani" pitchFamily="34" charset="-122"/>
+                <a:cs typeface="Rajdhani" pitchFamily="34" charset="-120"/>
               </a:rPr>
               <a:t>Relief / evolution</a:t>
             </a:r>
-            <a:endParaRPr lang="en-US" sz="1600" dirty="0"/>
+            <a:endParaRPr lang="en-US" sz="1800" dirty="0"/>
           </a:p>
         </p:txBody>
       </p:sp>
@@ -6539,17 +6539,17 @@
               <a:buNone/>
             </a:pPr>
             <a:r>
-              <a:rPr lang="en-US" sz="1300" dirty="0">
+              <a:rPr lang="en-US" sz="1500" dirty="0">
                 <a:solidFill>
                   <a:srgbClr val="CACACE"/>
                 </a:solidFill>
-                <a:latin typeface="Calibri" pitchFamily="34" charset="0"/>
-                <a:ea typeface="Calibri" pitchFamily="34" charset="-122"/>
-                <a:cs typeface="Calibri" pitchFamily="34" charset="-120"/>
+                <a:latin typeface="Rajdhani" pitchFamily="34" charset="0"/>
+                <a:ea typeface="Rajdhani" pitchFamily="34" charset="-122"/>
+                <a:cs typeface="Rajdhani" pitchFamily="34" charset="-120"/>
               </a:rPr>
               <a:t>the territory or the creature changes</a:t>
             </a:r>
-            <a:endParaRPr lang="en-US" sz="1300" dirty="0"/>
+            <a:endParaRPr lang="en-US" sz="1500" dirty="0"/>
           </a:p>
         </p:txBody>
       </p:sp>
@@ -6582,9 +6582,9 @@
                 <a:solidFill>
                   <a:srgbClr val="E8E8E8"/>
                 </a:solidFill>
-                <a:latin typeface="Calibri" pitchFamily="34" charset="0"/>
-                <a:ea typeface="Calibri" pitchFamily="34" charset="-122"/>
-                <a:cs typeface="Calibri" pitchFamily="34" charset="-120"/>
+                <a:latin typeface="Rajdhani" pitchFamily="34" charset="0"/>
+                <a:ea typeface="Rajdhani" pitchFamily="34" charset="-122"/>
+                <a:cs typeface="Rajdhani" pitchFamily="34" charset="-120"/>
               </a:rPr>
               <a:t>Stress flows back into value: an orc's score reads the strain of the creatures it dispatched (slimeHealth), an elf's the re-asks a warrant forced (reaskRate).</a:t>
             </a:r>
@@ -6621,9 +6621,9 @@
                 <a:solidFill>
                   <a:srgbClr val="A3A3AD"/>
                 </a:solidFill>
-                <a:latin typeface="Calibri" pitchFamily="34" charset="0"/>
-                <a:ea typeface="Calibri" pitchFamily="34" charset="-122"/>
-                <a:cs typeface="Calibri" pitchFamily="34" charset="-120"/>
+                <a:latin typeface="Rajdhani" pitchFamily="34" charset="0"/>
+                <a:ea typeface="Rajdhani" pitchFamily="34" charset="-122"/>
+                <a:cs typeface="Rajdhani" pitchFamily="34" charset="-120"/>
               </a:rPr>
               <a:t>Everything here is law.value, law.stress and law.evolution — on by default, every switch listed when it is off.</a:t>
             </a:r>
@@ -6712,9 +6712,9 @@
                 <a:solidFill>
                   <a:srgbClr val="A3A3AD"/>
                 </a:solidFill>
-                <a:latin typeface="Calibri" pitchFamily="34" charset="0"/>
-                <a:ea typeface="Calibri" pitchFamily="34" charset="-122"/>
-                <a:cs typeface="Calibri" pitchFamily="34" charset="-120"/>
+                <a:latin typeface="Rajdhani" pitchFamily="34" charset="0"/>
+                <a:ea typeface="Rajdhani" pitchFamily="34" charset="-122"/>
+                <a:cs typeface="Rajdhani" pitchFamily="34" charset="-120"/>
               </a:rPr>
               <a:t>ISEKAI ⋄ STRESS AND VALUE</a:t>
             </a:r>
@@ -6751,9 +6751,9 @@
                 <a:solidFill>
                   <a:srgbClr val="A3A3AD"/>
                 </a:solidFill>
-                <a:latin typeface="Calibri" pitchFamily="34" charset="0"/>
-                <a:ea typeface="Calibri" pitchFamily="34" charset="-122"/>
-                <a:cs typeface="Calibri" pitchFamily="34" charset="-120"/>
+                <a:latin typeface="Rajdhani" pitchFamily="34" charset="0"/>
+                <a:ea typeface="Rajdhani" pitchFamily="34" charset="-122"/>
+                <a:cs typeface="Rajdhani" pitchFamily="34" charset="-120"/>
               </a:rPr>
               <a:t>3</a:t>
             </a:r>
@@ -6790,9 +6790,9 @@
                 <a:solidFill>
                   <a:srgbClr val="FF8550"/>
                 </a:solidFill>
-                <a:latin typeface="Calibri" pitchFamily="34" charset="0"/>
-                <a:ea typeface="Calibri" pitchFamily="34" charset="-122"/>
-                <a:cs typeface="Calibri" pitchFamily="34" charset="-120"/>
+                <a:latin typeface="Rajdhani" pitchFamily="34" charset="0"/>
+                <a:ea typeface="Rajdhani" pitchFamily="34" charset="-122"/>
+                <a:cs typeface="Rajdhani" pitchFamily="34" charset="-120"/>
               </a:rPr>
               <a:t>THE VALUE LEDGER</a:t>
             </a:r>
@@ -6825,17 +6825,17 @@
               <a:buNone/>
             </a:pPr>
             <a:r>
-              <a:rPr lang="en-US" sz="2800" dirty="0">
+              <a:rPr lang="en-US" sz="2400" b="1" dirty="0">
                 <a:solidFill>
                   <a:srgbClr val="E8E8E8"/>
                 </a:solidFill>
-                <a:latin typeface="Arial Black" pitchFamily="34" charset="0"/>
-                <a:ea typeface="Arial Black" pitchFamily="34" charset="-122"/>
-                <a:cs typeface="Arial Black" pitchFamily="34" charset="-120"/>
+                <a:latin typeface="Orbitron" pitchFamily="34" charset="0"/>
+                <a:ea typeface="Orbitron" pitchFamily="34" charset="-122"/>
+                <a:cs typeface="Orbitron" pitchFamily="34" charset="-120"/>
               </a:rPr>
               <a:t>Every run is one line: pass, fail or neutral</a:t>
             </a:r>
-            <a:endParaRPr lang="en-US" sz="2800" dirty="0"/>
+            <a:endParaRPr lang="en-US" sz="2400" dirty="0"/>
           </a:p>
         </p:txBody>
       </p:sp>
@@ -6909,17 +6909,17 @@
               <a:buNone/>
             </a:pPr>
             <a:r>
-              <a:rPr lang="en-US" sz="1600" b="1" dirty="0">
+              <a:rPr lang="en-US" sz="1800" b="1" dirty="0">
                 <a:solidFill>
                   <a:srgbClr val="3CD68C"/>
                 </a:solidFill>
-                <a:latin typeface="Calibri" pitchFamily="34" charset="0"/>
-                <a:ea typeface="Calibri" pitchFamily="34" charset="-122"/>
-                <a:cs typeface="Calibri" pitchFamily="34" charset="-120"/>
+                <a:latin typeface="Rajdhani" pitchFamily="34" charset="0"/>
+                <a:ea typeface="Rajdhani" pitchFamily="34" charset="-122"/>
+                <a:cs typeface="Rajdhani" pitchFamily="34" charset="-120"/>
               </a:rPr>
               <a:t>pass</a:t>
             </a:r>
-            <a:endParaRPr lang="en-US" sz="1600" dirty="0"/>
+            <a:endParaRPr lang="en-US" sz="1800" dirty="0"/>
           </a:p>
         </p:txBody>
       </p:sp>
@@ -6951,17 +6951,17 @@
               <a:buNone/>
             </a:pPr>
             <a:r>
-              <a:rPr lang="en-US" sz="1300" dirty="0">
+              <a:rPr lang="en-US" sz="1500" dirty="0">
                 <a:solidFill>
                   <a:srgbClr val="CACACE"/>
                 </a:solidFill>
-                <a:latin typeface="Calibri" pitchFamily="34" charset="0"/>
-                <a:ea typeface="Calibri" pitchFamily="34" charset="-122"/>
-                <a:cs typeface="Calibri" pitchFamily="34" charset="-120"/>
+                <a:latin typeface="Rajdhani" pitchFamily="34" charset="0"/>
+                <a:ea typeface="Rajdhani" pitchFamily="34" charset="-122"/>
+                <a:cs typeface="Rajdhani" pitchFamily="34" charset="-120"/>
               </a:rPr>
               <a:t>DONE · PASS</a:t>
             </a:r>
-            <a:endParaRPr lang="en-US" sz="1300" dirty="0"/>
+            <a:endParaRPr lang="en-US" sz="1500" dirty="0"/>
           </a:p>
         </p:txBody>
       </p:sp>
@@ -7035,17 +7035,17 @@
               <a:buNone/>
             </a:pPr>
             <a:r>
-              <a:rPr lang="en-US" sz="1600" b="1" dirty="0">
+              <a:rPr lang="en-US" sz="1800" b="1" dirty="0">
                 <a:solidFill>
                   <a:srgbClr val="FE8184"/>
                 </a:solidFill>
-                <a:latin typeface="Calibri" pitchFamily="34" charset="0"/>
-                <a:ea typeface="Calibri" pitchFamily="34" charset="-122"/>
-                <a:cs typeface="Calibri" pitchFamily="34" charset="-120"/>
+                <a:latin typeface="Rajdhani" pitchFamily="34" charset="0"/>
+                <a:ea typeface="Rajdhani" pitchFamily="34" charset="-122"/>
+                <a:cs typeface="Rajdhani" pitchFamily="34" charset="-120"/>
               </a:rPr>
               <a:t>fail</a:t>
             </a:r>
-            <a:endParaRPr lang="en-US" sz="1600" dirty="0"/>
+            <a:endParaRPr lang="en-US" sz="1800" dirty="0"/>
           </a:p>
         </p:txBody>
       </p:sp>
@@ -7077,17 +7077,17 @@
               <a:buNone/>
             </a:pPr>
             <a:r>
-              <a:rPr lang="en-US" sz="1300" dirty="0">
+              <a:rPr lang="en-US" sz="1500" dirty="0">
                 <a:solidFill>
                   <a:srgbClr val="CACACE"/>
                 </a:solidFill>
-                <a:latin typeface="Calibri" pitchFamily="34" charset="0"/>
-                <a:ea typeface="Calibri" pitchFamily="34" charset="-122"/>
-                <a:cs typeface="Calibri" pitchFamily="34" charset="-120"/>
+                <a:latin typeface="Rajdhani" pitchFamily="34" charset="0"/>
+                <a:ea typeface="Rajdhani" pitchFamily="34" charset="-122"/>
+                <a:cs typeface="Rajdhani" pitchFamily="34" charset="-120"/>
               </a:rPr>
               <a:t>FAIL · ESCALATE · CHECKPOINT</a:t>
             </a:r>
-            <a:endParaRPr lang="en-US" sz="1300" dirty="0"/>
+            <a:endParaRPr lang="en-US" sz="1500" dirty="0"/>
           </a:p>
         </p:txBody>
       </p:sp>
@@ -7161,17 +7161,17 @@
               <a:buNone/>
             </a:pPr>
             <a:r>
-              <a:rPr lang="en-US" sz="1600" b="1" dirty="0">
+              <a:rPr lang="en-US" sz="1800" b="1" dirty="0">
                 <a:solidFill>
                   <a:srgbClr val="A3A3AD"/>
                 </a:solidFill>
-                <a:latin typeface="Calibri" pitchFamily="34" charset="0"/>
-                <a:ea typeface="Calibri" pitchFamily="34" charset="-122"/>
-                <a:cs typeface="Calibri" pitchFamily="34" charset="-120"/>
+                <a:latin typeface="Rajdhani" pitchFamily="34" charset="0"/>
+                <a:ea typeface="Rajdhani" pitchFamily="34" charset="-122"/>
+                <a:cs typeface="Rajdhani" pitchFamily="34" charset="-120"/>
               </a:rPr>
               <a:t>neutral</a:t>
             </a:r>
-            <a:endParaRPr lang="en-US" sz="1600" dirty="0"/>
+            <a:endParaRPr lang="en-US" sz="1800" dirty="0"/>
           </a:p>
         </p:txBody>
       </p:sp>
@@ -7203,17 +7203,17 @@
               <a:buNone/>
             </a:pPr>
             <a:r>
-              <a:rPr lang="en-US" sz="1300" dirty="0">
+              <a:rPr lang="en-US" sz="1500" dirty="0">
                 <a:solidFill>
                   <a:srgbClr val="CACACE"/>
                 </a:solidFill>
-                <a:latin typeface="Calibri" pitchFamily="34" charset="0"/>
-                <a:ea typeface="Calibri" pitchFamily="34" charset="-122"/>
-                <a:cs typeface="Calibri" pitchFamily="34" charset="-120"/>
+                <a:latin typeface="Rajdhani" pitchFamily="34" charset="0"/>
+                <a:ea typeface="Rajdhani" pitchFamily="34" charset="-122"/>
+                <a:cs typeface="Rajdhani" pitchFamily="34" charset="-120"/>
               </a:rPr>
               <a:t>DENIED · INTERRUPTED · DRY · SUSPENDED — the human said no, or nothing ran</a:t>
             </a:r>
-            <a:endParaRPr lang="en-US" sz="1300" dirty="0"/>
+            <a:endParaRPr lang="en-US" sz="1500" dirty="0"/>
           </a:p>
         </p:txBody>
       </p:sp>
@@ -7252,9 +7252,9 @@
                 <a:solidFill>
                   <a:srgbClr val="E8E8E8"/>
                 </a:solidFill>
-                <a:latin typeface="Consolas" pitchFamily="34" charset="0"/>
-                <a:ea typeface="Consolas" pitchFamily="34" charset="-122"/>
-                <a:cs typeface="Consolas" pitchFamily="34" charset="-120"/>
+                <a:latin typeface="JetBrains Mono" pitchFamily="34" charset="0"/>
+                <a:ea typeface="JetBrains Mono" pitchFamily="34" charset="-122"/>
+                <a:cs typeface="JetBrains Mono" pitchFamily="34" charset="-120"/>
               </a:rPr>
               <a:t>law.value:</a:t>
             </a:r>
@@ -7269,9 +7269,9 @@
                 <a:solidFill>
                   <a:srgbClr val="E8E8E8"/>
                 </a:solidFill>
-                <a:latin typeface="Consolas" pitchFamily="34" charset="0"/>
-                <a:ea typeface="Consolas" pitchFamily="34" charset="-122"/>
-                <a:cs typeface="Consolas" pitchFamily="34" charset="-120"/>
+                <a:latin typeface="JetBrains Mono" pitchFamily="34" charset="0"/>
+                <a:ea typeface="JetBrains Mono" pitchFamily="34" charset="-122"/>
+                <a:cs typeface="JetBrains Mono" pitchFamily="34" charset="-120"/>
               </a:rPr>
               <a:t>  window: 28d        # how far back the score looks</a:t>
             </a:r>
@@ -7286,9 +7286,9 @@
                 <a:solidFill>
                   <a:srgbClr val="E8E8E8"/>
                 </a:solidFill>
-                <a:latin typeface="Consolas" pitchFamily="34" charset="0"/>
-                <a:ea typeface="Consolas" pitchFamily="34" charset="-122"/>
-                <a:cs typeface="Consolas" pitchFamily="34" charset="-120"/>
+                <a:latin typeface="JetBrains Mono" pitchFamily="34" charset="0"/>
+                <a:ea typeface="JetBrains Mono" pitchFamily="34" charset="-122"/>
+                <a:cs typeface="JetBrains Mono" pitchFamily="34" charset="-120"/>
               </a:rPr>
               <a:t>  reopenTurns: 3     # a pass reopened this soon counts as a fail</a:t>
             </a:r>
@@ -7303,9 +7303,9 @@
                 <a:solidFill>
                   <a:srgbClr val="E8E8E8"/>
                 </a:solidFill>
-                <a:latin typeface="Consolas" pitchFamily="34" charset="0"/>
-                <a:ea typeface="Consolas" pitchFamily="34" charset="-122"/>
-                <a:cs typeface="Consolas" pitchFamily="34" charset="-120"/>
+                <a:latin typeface="JetBrains Mono" pitchFamily="34" charset="0"/>
+                <a:ea typeface="JetBrains Mono" pitchFamily="34" charset="-122"/>
+                <a:cs typeface="JetBrains Mono" pitchFamily="34" charset="-120"/>
               </a:rPr>
               <a:t>  minRecord: 5       # runs before a creature is ranked</a:t>
             </a:r>
@@ -7320,9 +7320,9 @@
                 <a:solidFill>
                   <a:srgbClr val="E8E8E8"/>
                 </a:solidFill>
-                <a:latin typeface="Consolas" pitchFamily="34" charset="0"/>
-                <a:ea typeface="Consolas" pitchFamily="34" charset="-122"/>
-                <a:cs typeface="Consolas" pitchFamily="34" charset="-120"/>
+                <a:latin typeface="JetBrains Mono" pitchFamily="34" charset="0"/>
+                <a:ea typeface="JetBrains Mono" pitchFamily="34" charset="-122"/>
+                <a:cs typeface="JetBrains Mono" pitchFamily="34" charset="-120"/>
               </a:rPr>
               <a:t>  families: {}       # each family's score and meter (next slides)</a:t>
             </a:r>
@@ -7411,9 +7411,9 @@
                 <a:solidFill>
                   <a:srgbClr val="A3A3AD"/>
                 </a:solidFill>
-                <a:latin typeface="Calibri" pitchFamily="34" charset="0"/>
-                <a:ea typeface="Calibri" pitchFamily="34" charset="-122"/>
-                <a:cs typeface="Calibri" pitchFamily="34" charset="-120"/>
+                <a:latin typeface="Rajdhani" pitchFamily="34" charset="0"/>
+                <a:ea typeface="Rajdhani" pitchFamily="34" charset="-122"/>
+                <a:cs typeface="Rajdhani" pitchFamily="34" charset="-120"/>
               </a:rPr>
               <a:t>ISEKAI ⋄ STRESS AND VALUE</a:t>
             </a:r>
@@ -7450,9 +7450,9 @@
                 <a:solidFill>
                   <a:srgbClr val="A3A3AD"/>
                 </a:solidFill>
-                <a:latin typeface="Calibri" pitchFamily="34" charset="0"/>
-                <a:ea typeface="Calibri" pitchFamily="34" charset="-122"/>
-                <a:cs typeface="Calibri" pitchFamily="34" charset="-120"/>
+                <a:latin typeface="Rajdhani" pitchFamily="34" charset="0"/>
+                <a:ea typeface="Rajdhani" pitchFamily="34" charset="-122"/>
+                <a:cs typeface="Rajdhani" pitchFamily="34" charset="-120"/>
               </a:rPr>
               <a:t>4</a:t>
             </a:r>
@@ -7489,9 +7489,9 @@
                 <a:solidFill>
                   <a:srgbClr val="FF8550"/>
                 </a:solidFill>
-                <a:latin typeface="Calibri" pitchFamily="34" charset="0"/>
-                <a:ea typeface="Calibri" pitchFamily="34" charset="-122"/>
-                <a:cs typeface="Calibri" pitchFamily="34" charset="-120"/>
+                <a:latin typeface="Rajdhani" pitchFamily="34" charset="0"/>
+                <a:ea typeface="Rajdhani" pitchFamily="34" charset="-122"/>
+                <a:cs typeface="Rajdhani" pitchFamily="34" charset="-120"/>
               </a:rPr>
               <a:t>THE SIGNALS</a:t>
             </a:r>
@@ -7524,17 +7524,17 @@
               <a:buNone/>
             </a:pPr>
             <a:r>
-              <a:rPr lang="en-US" sz="2800" dirty="0">
+              <a:rPr lang="en-US" sz="2400" b="1" dirty="0">
                 <a:solidFill>
                   <a:srgbClr val="E8E8E8"/>
                 </a:solidFill>
-                <a:latin typeface="Arial Black" pitchFamily="34" charset="0"/>
-                <a:ea typeface="Arial Black" pitchFamily="34" charset="-122"/>
-                <a:cs typeface="Arial Black" pitchFamily="34" charset="-120"/>
+                <a:latin typeface="Orbitron" pitchFamily="34" charset="0"/>
+                <a:ea typeface="Orbitron" pitchFamily="34" charset="-122"/>
+                <a:cs typeface="Orbitron" pitchFamily="34" charset="-120"/>
               </a:rPr>
               <a:t>A score is built from signals the ledger folds per body</a:t>
             </a:r>
-            <a:endParaRPr lang="en-US" sz="2800" dirty="0"/>
+            <a:endParaRPr lang="en-US" sz="2400" dirty="0"/>
           </a:p>
         </p:txBody>
       </p:sp>
@@ -7575,20 +7575,20 @@
                         <a:buNone/>
                       </a:pPr>
                       <a:r>
-                        <a:rPr lang="en-US" sz="1250" b="1" dirty="0">
+                        <a:rPr lang="en-US" sz="1400" b="1" dirty="0">
                           <a:solidFill>
                             <a:srgbClr val="FF8550"/>
                           </a:solidFill>
-                          <a:latin typeface="Calibri" pitchFamily="34" charset="0"/>
-                          <a:ea typeface="Calibri" pitchFamily="34" charset="-122"/>
-                          <a:cs typeface="Calibri" pitchFamily="34" charset="-120"/>
+                          <a:latin typeface="Rajdhani" pitchFamily="34" charset="0"/>
+                          <a:ea typeface="Rajdhani" pitchFamily="34" charset="-122"/>
+                          <a:cs typeface="Rajdhani" pitchFamily="34" charset="-120"/>
                         </a:rPr>
                         <a:t>signal</a:t>
                       </a:r>
-                      <a:endParaRPr lang="en-US" sz="1250" dirty="0">
-                        <a:latin typeface="Calibri" charset="0"/>
-                        <a:ea typeface="Calibri" charset="0"/>
-                        <a:cs typeface="Calibri" charset="0"/>
+                      <a:endParaRPr lang="en-US" sz="1400" dirty="0">
+                        <a:latin typeface="Rajdhani" charset="0"/>
+                        <a:ea typeface="Rajdhani" charset="0"/>
+                        <a:cs typeface="Rajdhani" charset="0"/>
                       </a:endParaRPr>
                     </a:p>
                   </a:txBody>
@@ -7643,20 +7643,20 @@
                         <a:buNone/>
                       </a:pPr>
                       <a:r>
-                        <a:rPr lang="en-US" sz="1250" b="1" dirty="0">
+                        <a:rPr lang="en-US" sz="1400" b="1" dirty="0">
                           <a:solidFill>
                             <a:srgbClr val="FF8550"/>
                           </a:solidFill>
-                          <a:latin typeface="Calibri" pitchFamily="34" charset="0"/>
-                          <a:ea typeface="Calibri" pitchFamily="34" charset="-122"/>
-                          <a:cs typeface="Calibri" pitchFamily="34" charset="-120"/>
+                          <a:latin typeface="Rajdhani" pitchFamily="34" charset="0"/>
+                          <a:ea typeface="Rajdhani" pitchFamily="34" charset="-122"/>
+                          <a:cs typeface="Rajdhani" pitchFamily="34" charset="-120"/>
                         </a:rPr>
                         <a:t>what it counts</a:t>
                       </a:r>
-                      <a:endParaRPr lang="en-US" sz="1250" dirty="0">
-                        <a:latin typeface="Calibri" charset="0"/>
-                        <a:ea typeface="Calibri" charset="0"/>
-                        <a:cs typeface="Calibri" charset="0"/>
+                      <a:endParaRPr lang="en-US" sz="1400" dirty="0">
+                        <a:latin typeface="Rajdhani" charset="0"/>
+                        <a:ea typeface="Rajdhani" charset="0"/>
+                        <a:cs typeface="Rajdhani" charset="0"/>
                       </a:endParaRPr>
                     </a:p>
                   </a:txBody>
@@ -7711,20 +7711,20 @@
                         <a:buNone/>
                       </a:pPr>
                       <a:r>
-                        <a:rPr lang="en-US" sz="1250" b="1" dirty="0">
+                        <a:rPr lang="en-US" sz="1400" b="1" dirty="0">
                           <a:solidFill>
                             <a:srgbClr val="FF8550"/>
                           </a:solidFill>
-                          <a:latin typeface="Calibri" pitchFamily="34" charset="0"/>
-                          <a:ea typeface="Calibri" pitchFamily="34" charset="-122"/>
-                          <a:cs typeface="Calibri" pitchFamily="34" charset="-120"/>
+                          <a:latin typeface="Rajdhani" pitchFamily="34" charset="0"/>
+                          <a:ea typeface="Rajdhani" pitchFamily="34" charset="-122"/>
+                          <a:cs typeface="Rajdhani" pitchFamily="34" charset="-120"/>
                         </a:rPr>
                         <a:t>who produces it</a:t>
                       </a:r>
-                      <a:endParaRPr lang="en-US" sz="1250" dirty="0">
-                        <a:latin typeface="Calibri" charset="0"/>
-                        <a:ea typeface="Calibri" charset="0"/>
-                        <a:cs typeface="Calibri" charset="0"/>
+                      <a:endParaRPr lang="en-US" sz="1400" dirty="0">
+                        <a:latin typeface="Rajdhani" charset="0"/>
+                        <a:ea typeface="Rajdhani" charset="0"/>
+                        <a:cs typeface="Rajdhani" charset="0"/>
                       </a:endParaRPr>
                     </a:p>
                   </a:txBody>
@@ -7781,20 +7781,20 @@
                         <a:buNone/>
                       </a:pPr>
                       <a:r>
-                        <a:rPr lang="en-US" sz="1250" dirty="0">
+                        <a:rPr lang="en-US" sz="1400" dirty="0">
                           <a:solidFill>
                             <a:srgbClr val="55A9FF"/>
                           </a:solidFill>
-                          <a:latin typeface="Consolas" pitchFamily="34" charset="0"/>
-                          <a:ea typeface="Consolas" pitchFamily="34" charset="-122"/>
-                          <a:cs typeface="Consolas" pitchFamily="34" charset="-120"/>
+                          <a:latin typeface="JetBrains Mono" pitchFamily="34" charset="0"/>
+                          <a:ea typeface="JetBrains Mono" pitchFamily="34" charset="-122"/>
+                          <a:cs typeface="JetBrains Mono" pitchFamily="34" charset="-120"/>
                         </a:rPr>
                         <a:t>landRate</a:t>
                       </a:r>
-                      <a:endParaRPr lang="en-US" sz="1250" dirty="0">
-                        <a:latin typeface="Consolas" charset="0"/>
-                        <a:ea typeface="Consolas" charset="0"/>
-                        <a:cs typeface="Consolas" charset="0"/>
+                      <a:endParaRPr lang="en-US" sz="1400" dirty="0">
+                        <a:latin typeface="JetBrains Mono" charset="0"/>
+                        <a:ea typeface="JetBrains Mono" charset="0"/>
+                        <a:cs typeface="JetBrains Mono" charset="0"/>
                       </a:endParaRPr>
                     </a:p>
                   </a:txBody>
@@ -7849,20 +7849,20 @@
                         <a:buNone/>
                       </a:pPr>
                       <a:r>
-                        <a:rPr lang="en-US" sz="1250" dirty="0">
+                        <a:rPr lang="en-US" sz="1400" dirty="0">
                           <a:solidFill>
                             <a:srgbClr val="CACACE"/>
                           </a:solidFill>
-                          <a:latin typeface="Calibri" pitchFamily="34" charset="0"/>
-                          <a:ea typeface="Calibri" pitchFamily="34" charset="-122"/>
-                          <a:cs typeface="Calibri" pitchFamily="34" charset="-120"/>
+                          <a:latin typeface="Rajdhani" pitchFamily="34" charset="0"/>
+                          <a:ea typeface="Rajdhani" pitchFamily="34" charset="-122"/>
+                          <a:cs typeface="Rajdhani" pitchFamily="34" charset="-120"/>
                         </a:rPr>
                         <a:t>reports that landed: DONE, no fail word, no gate failed</a:t>
                       </a:r>
-                      <a:endParaRPr lang="en-US" sz="1250" dirty="0">
-                        <a:latin typeface="Calibri" charset="0"/>
-                        <a:ea typeface="Calibri" charset="0"/>
-                        <a:cs typeface="Calibri" charset="0"/>
+                      <a:endParaRPr lang="en-US" sz="1400" dirty="0">
+                        <a:latin typeface="Rajdhani" charset="0"/>
+                        <a:ea typeface="Rajdhani" charset="0"/>
+                        <a:cs typeface="Rajdhani" charset="0"/>
                       </a:endParaRPr>
                     </a:p>
                   </a:txBody>
@@ -7917,20 +7917,20 @@
                         <a:buNone/>
                       </a:pPr>
                       <a:r>
-                        <a:rPr lang="en-US" sz="1250" dirty="0">
+                        <a:rPr lang="en-US" sz="1400" dirty="0">
                           <a:solidFill>
                             <a:srgbClr val="CACACE"/>
                           </a:solidFill>
-                          <a:latin typeface="Calibri" pitchFamily="34" charset="0"/>
-                          <a:ea typeface="Calibri" pitchFamily="34" charset="-122"/>
-                          <a:cs typeface="Calibri" pitchFamily="34" charset="-120"/>
+                          <a:latin typeface="Rajdhani" pitchFamily="34" charset="0"/>
+                          <a:ea typeface="Rajdhani" pitchFamily="34" charset="-122"/>
+                          <a:cs typeface="Rajdhani" pitchFamily="34" charset="-120"/>
                         </a:rPr>
                         <a:t>every body</a:t>
                       </a:r>
-                      <a:endParaRPr lang="en-US" sz="1250" dirty="0">
-                        <a:latin typeface="Calibri" charset="0"/>
-                        <a:ea typeface="Calibri" charset="0"/>
-                        <a:cs typeface="Calibri" charset="0"/>
+                      <a:endParaRPr lang="en-US" sz="1400" dirty="0">
+                        <a:latin typeface="Rajdhani" charset="0"/>
+                        <a:ea typeface="Rajdhani" charset="0"/>
+                        <a:cs typeface="Rajdhani" charset="0"/>
                       </a:endParaRPr>
                     </a:p>
                   </a:txBody>
@@ -7987,20 +7987,20 @@
                         <a:buNone/>
                       </a:pPr>
                       <a:r>
-                        <a:rPr lang="en-US" sz="1250" dirty="0">
+                        <a:rPr lang="en-US" sz="1400" dirty="0">
                           <a:solidFill>
                             <a:srgbClr val="55A9FF"/>
                           </a:solidFill>
-                          <a:latin typeface="Consolas" pitchFamily="34" charset="0"/>
-                          <a:ea typeface="Consolas" pitchFamily="34" charset="-122"/>
-                          <a:cs typeface="Consolas" pitchFamily="34" charset="-120"/>
+                          <a:latin typeface="JetBrains Mono" pitchFamily="34" charset="0"/>
+                          <a:ea typeface="JetBrains Mono" pitchFamily="34" charset="-122"/>
+                          <a:cs typeface="JetBrains Mono" pitchFamily="34" charset="-120"/>
                         </a:rPr>
                         <a:t>holeRate</a:t>
                       </a:r>
-                      <a:endParaRPr lang="en-US" sz="1250" dirty="0">
-                        <a:latin typeface="Consolas" charset="0"/>
-                        <a:ea typeface="Consolas" charset="0"/>
-                        <a:cs typeface="Consolas" charset="0"/>
+                      <a:endParaRPr lang="en-US" sz="1400" dirty="0">
+                        <a:latin typeface="JetBrains Mono" charset="0"/>
+                        <a:ea typeface="JetBrains Mono" charset="0"/>
+                        <a:cs typeface="JetBrains Mono" charset="0"/>
                       </a:endParaRPr>
                     </a:p>
                   </a:txBody>
@@ -8055,20 +8055,20 @@
                         <a:buNone/>
                       </a:pPr>
                       <a:r>
-                        <a:rPr lang="en-US" sz="1250" dirty="0">
+                        <a:rPr lang="en-US" sz="1400" dirty="0">
                           <a:solidFill>
                             <a:srgbClr val="CACACE"/>
                           </a:solidFill>
-                          <a:latin typeface="Calibri" pitchFamily="34" charset="0"/>
-                          <a:ea typeface="Calibri" pitchFamily="34" charset="-122"/>
-                          <a:cs typeface="Calibri" pitchFamily="34" charset="-120"/>
+                          <a:latin typeface="Rajdhani" pitchFamily="34" charset="0"/>
+                          <a:ea typeface="Rajdhani" pitchFamily="34" charset="-122"/>
+                          <a:cs typeface="Rajdhani" pitchFamily="34" charset="-120"/>
                         </a:rPr>
                         <a:t>reports carrying at least one harness hole</a:t>
                       </a:r>
-                      <a:endParaRPr lang="en-US" sz="1250" dirty="0">
-                        <a:latin typeface="Calibri" charset="0"/>
-                        <a:ea typeface="Calibri" charset="0"/>
-                        <a:cs typeface="Calibri" charset="0"/>
+                      <a:endParaRPr lang="en-US" sz="1400" dirty="0">
+                        <a:latin typeface="Rajdhani" charset="0"/>
+                        <a:ea typeface="Rajdhani" charset="0"/>
+                        <a:cs typeface="Rajdhani" charset="0"/>
                       </a:endParaRPr>
                     </a:p>
                   </a:txBody>
@@ -8123,20 +8123,20 @@
                         <a:buNone/>
                       </a:pPr>
                       <a:r>
-                        <a:rPr lang="en-US" sz="1250" dirty="0">
+                        <a:rPr lang="en-US" sz="1400" dirty="0">
                           <a:solidFill>
                             <a:srgbClr val="CACACE"/>
                           </a:solidFill>
-                          <a:latin typeface="Calibri" pitchFamily="34" charset="0"/>
-                          <a:ea typeface="Calibri" pitchFamily="34" charset="-122"/>
-                          <a:cs typeface="Calibri" pitchFamily="34" charset="-120"/>
+                          <a:latin typeface="Rajdhani" pitchFamily="34" charset="0"/>
+                          <a:ea typeface="Rajdhani" pitchFamily="34" charset="-122"/>
+                          <a:cs typeface="Rajdhani" pitchFamily="34" charset="-120"/>
                         </a:rPr>
                         <a:t>every body</a:t>
                       </a:r>
-                      <a:endParaRPr lang="en-US" sz="1250" dirty="0">
-                        <a:latin typeface="Calibri" charset="0"/>
-                        <a:ea typeface="Calibri" charset="0"/>
-                        <a:cs typeface="Calibri" charset="0"/>
+                      <a:endParaRPr lang="en-US" sz="1400" dirty="0">
+                        <a:latin typeface="Rajdhani" charset="0"/>
+                        <a:ea typeface="Rajdhani" charset="0"/>
+                        <a:cs typeface="Rajdhani" charset="0"/>
                       </a:endParaRPr>
                     </a:p>
                   </a:txBody>
@@ -8193,20 +8193,20 @@
                         <a:buNone/>
                       </a:pPr>
                       <a:r>
-                        <a:rPr lang="en-US" sz="1250" dirty="0">
+                        <a:rPr lang="en-US" sz="1400" dirty="0">
                           <a:solidFill>
                             <a:srgbClr val="55A9FF"/>
                           </a:solidFill>
-                          <a:latin typeface="Consolas" pitchFamily="34" charset="0"/>
-                          <a:ea typeface="Consolas" pitchFamily="34" charset="-122"/>
-                          <a:cs typeface="Consolas" pitchFamily="34" charset="-120"/>
+                          <a:latin typeface="JetBrains Mono" pitchFamily="34" charset="0"/>
+                          <a:ea typeface="JetBrains Mono" pitchFamily="34" charset="-122"/>
+                          <a:cs typeface="JetBrains Mono" pitchFamily="34" charset="-120"/>
                         </a:rPr>
                         <a:t>gateRate</a:t>
                       </a:r>
-                      <a:endParaRPr lang="en-US" sz="1250" dirty="0">
-                        <a:latin typeface="Consolas" charset="0"/>
-                        <a:ea typeface="Consolas" charset="0"/>
-                        <a:cs typeface="Consolas" charset="0"/>
+                      <a:endParaRPr lang="en-US" sz="1400" dirty="0">
+                        <a:latin typeface="JetBrains Mono" charset="0"/>
+                        <a:ea typeface="JetBrains Mono" charset="0"/>
+                        <a:cs typeface="JetBrains Mono" charset="0"/>
                       </a:endParaRPr>
                     </a:p>
                   </a:txBody>
@@ -8261,20 +8261,20 @@
                         <a:buNone/>
                       </a:pPr>
                       <a:r>
-                        <a:rPr lang="en-US" sz="1250" dirty="0">
+                        <a:rPr lang="en-US" sz="1400" dirty="0">
                           <a:solidFill>
                             <a:srgbClr val="CACACE"/>
                           </a:solidFill>
-                          <a:latin typeface="Calibri" pitchFamily="34" charset="0"/>
-                          <a:ea typeface="Calibri" pitchFamily="34" charset="-122"/>
-                          <a:cs typeface="Calibri" pitchFamily="34" charset="-120"/>
+                          <a:latin typeface="Rajdhani" pitchFamily="34" charset="0"/>
+                          <a:ea typeface="Rajdhani" pitchFamily="34" charset="-122"/>
+                          <a:cs typeface="Rajdhani" pitchFamily="34" charset="-120"/>
                         </a:rPr>
                         <a:t>gated runs that passed the gate on the first try</a:t>
                       </a:r>
-                      <a:endParaRPr lang="en-US" sz="1250" dirty="0">
-                        <a:latin typeface="Calibri" charset="0"/>
-                        <a:ea typeface="Calibri" charset="0"/>
-                        <a:cs typeface="Calibri" charset="0"/>
+                      <a:endParaRPr lang="en-US" sz="1400" dirty="0">
+                        <a:latin typeface="Rajdhani" charset="0"/>
+                        <a:ea typeface="Rajdhani" charset="0"/>
+                        <a:cs typeface="Rajdhani" charset="0"/>
                       </a:endParaRPr>
                     </a:p>
                   </a:txBody>
@@ -8329,20 +8329,20 @@
                         <a:buNone/>
                       </a:pPr>
                       <a:r>
-                        <a:rPr lang="en-US" sz="1250" dirty="0">
+                        <a:rPr lang="en-US" sz="1400" dirty="0">
                           <a:solidFill>
                             <a:srgbClr val="CACACE"/>
                           </a:solidFill>
-                          <a:latin typeface="Calibri" pitchFamily="34" charset="0"/>
-                          <a:ea typeface="Calibri" pitchFamily="34" charset="-122"/>
-                          <a:cs typeface="Calibri" pitchFamily="34" charset="-120"/>
+                          <a:latin typeface="Rajdhani" pitchFamily="34" charset="0"/>
+                          <a:ea typeface="Rajdhani" pitchFamily="34" charset="-122"/>
+                          <a:cs typeface="Rajdhani" pitchFamily="34" charset="-120"/>
                         </a:rPr>
                         <a:t>authors (slime)</a:t>
                       </a:r>
-                      <a:endParaRPr lang="en-US" sz="1250" dirty="0">
-                        <a:latin typeface="Calibri" charset="0"/>
-                        <a:ea typeface="Calibri" charset="0"/>
-                        <a:cs typeface="Calibri" charset="0"/>
+                      <a:endParaRPr lang="en-US" sz="1400" dirty="0">
+                        <a:latin typeface="Rajdhani" charset="0"/>
+                        <a:ea typeface="Rajdhani" charset="0"/>
+                        <a:cs typeface="Rajdhani" charset="0"/>
                       </a:endParaRPr>
                     </a:p>
                   </a:txBody>
@@ -8399,20 +8399,20 @@
                         <a:buNone/>
                       </a:pPr>
                       <a:r>
-                        <a:rPr lang="en-US" sz="1250" dirty="0">
+                        <a:rPr lang="en-US" sz="1400" dirty="0">
                           <a:solidFill>
                             <a:srgbClr val="55A9FF"/>
                           </a:solidFill>
-                          <a:latin typeface="Consolas" pitchFamily="34" charset="0"/>
-                          <a:ea typeface="Consolas" pitchFamily="34" charset="-122"/>
-                          <a:cs typeface="Consolas" pitchFamily="34" charset="-120"/>
+                          <a:latin typeface="JetBrains Mono" pitchFamily="34" charset="0"/>
+                          <a:ea typeface="JetBrains Mono" pitchFamily="34" charset="-122"/>
+                          <a:cs typeface="JetBrains Mono" pitchFamily="34" charset="-120"/>
                         </a:rPr>
                         <a:t>verifyGreenRate</a:t>
                       </a:r>
-                      <a:endParaRPr lang="en-US" sz="1250" dirty="0">
-                        <a:latin typeface="Consolas" charset="0"/>
-                        <a:ea typeface="Consolas" charset="0"/>
-                        <a:cs typeface="Consolas" charset="0"/>
+                      <a:endParaRPr lang="en-US" sz="1400" dirty="0">
+                        <a:latin typeface="JetBrains Mono" charset="0"/>
+                        <a:ea typeface="JetBrains Mono" charset="0"/>
+                        <a:cs typeface="JetBrains Mono" charset="0"/>
                       </a:endParaRPr>
                     </a:p>
                   </a:txBody>
@@ -8467,20 +8467,20 @@
                         <a:buNone/>
                       </a:pPr>
                       <a:r>
-                        <a:rPr lang="en-US" sz="1250" dirty="0">
+                        <a:rPr lang="en-US" sz="1400" dirty="0">
                           <a:solidFill>
                             <a:srgbClr val="CACACE"/>
                           </a:solidFill>
-                          <a:latin typeface="Calibri" pitchFamily="34" charset="0"/>
-                          <a:ea typeface="Calibri" pitchFamily="34" charset="-122"/>
-                          <a:cs typeface="Calibri" pitchFamily="34" charset="-120"/>
+                          <a:latin typeface="Rajdhani" pitchFamily="34" charset="0"/>
+                          <a:ea typeface="Rajdhani" pitchFamily="34" charset="-122"/>
+                          <a:cs typeface="Rajdhani" pitchFamily="34" charset="-120"/>
                         </a:rPr>
                         <a:t>verify lines that ran green at the gate</a:t>
                       </a:r>
-                      <a:endParaRPr lang="en-US" sz="1250" dirty="0">
-                        <a:latin typeface="Calibri" charset="0"/>
-                        <a:ea typeface="Calibri" charset="0"/>
-                        <a:cs typeface="Calibri" charset="0"/>
+                      <a:endParaRPr lang="en-US" sz="1400" dirty="0">
+                        <a:latin typeface="Rajdhani" charset="0"/>
+                        <a:ea typeface="Rajdhani" charset="0"/>
+                        <a:cs typeface="Rajdhani" charset="0"/>
                       </a:endParaRPr>
                     </a:p>
                   </a:txBody>
@@ -8535,20 +8535,20 @@
                         <a:buNone/>
                       </a:pPr>
                       <a:r>
-                        <a:rPr lang="en-US" sz="1250" dirty="0">
+                        <a:rPr lang="en-US" sz="1400" dirty="0">
                           <a:solidFill>
                             <a:srgbClr val="CACACE"/>
                           </a:solidFill>
-                          <a:latin typeface="Calibri" pitchFamily="34" charset="0"/>
-                          <a:ea typeface="Calibri" pitchFamily="34" charset="-122"/>
-                          <a:cs typeface="Calibri" pitchFamily="34" charset="-120"/>
+                          <a:latin typeface="Rajdhani" pitchFamily="34" charset="0"/>
+                          <a:ea typeface="Rajdhani" pitchFamily="34" charset="-122"/>
+                          <a:cs typeface="Rajdhani" pitchFamily="34" charset="-120"/>
                         </a:rPr>
                         <a:t>authors</a:t>
                       </a:r>
-                      <a:endParaRPr lang="en-US" sz="1250" dirty="0">
-                        <a:latin typeface="Calibri" charset="0"/>
-                        <a:ea typeface="Calibri" charset="0"/>
-                        <a:cs typeface="Calibri" charset="0"/>
+                      <a:endParaRPr lang="en-US" sz="1400" dirty="0">
+                        <a:latin typeface="Rajdhani" charset="0"/>
+                        <a:ea typeface="Rajdhani" charset="0"/>
+                        <a:cs typeface="Rajdhani" charset="0"/>
                       </a:endParaRPr>
                     </a:p>
                   </a:txBody>
@@ -8605,20 +8605,20 @@
                         <a:buNone/>
                       </a:pPr>
                       <a:r>
-                        <a:rPr lang="en-US" sz="1250" dirty="0">
+                        <a:rPr lang="en-US" sz="1400" dirty="0">
                           <a:solidFill>
                             <a:srgbClr val="55A9FF"/>
                           </a:solidFill>
-                          <a:latin typeface="Consolas" pitchFamily="34" charset="0"/>
-                          <a:ea typeface="Consolas" pitchFamily="34" charset="-122"/>
-                          <a:cs typeface="Consolas" pitchFamily="34" charset="-120"/>
+                          <a:latin typeface="JetBrains Mono" pitchFamily="34" charset="0"/>
+                          <a:ea typeface="JetBrains Mono" pitchFamily="34" charset="-122"/>
+                          <a:cs typeface="JetBrains Mono" pitchFamily="34" charset="-120"/>
                         </a:rPr>
                         <a:t>gateRight</a:t>
                       </a:r>
-                      <a:endParaRPr lang="en-US" sz="1250" dirty="0">
-                        <a:latin typeface="Consolas" charset="0"/>
-                        <a:ea typeface="Consolas" charset="0"/>
-                        <a:cs typeface="Consolas" charset="0"/>
+                      <a:endParaRPr lang="en-US" sz="1400" dirty="0">
+                        <a:latin typeface="JetBrains Mono" charset="0"/>
+                        <a:ea typeface="JetBrains Mono" charset="0"/>
+                        <a:cs typeface="JetBrains Mono" charset="0"/>
                       </a:endParaRPr>
                     </a:p>
                   </a:txBody>
@@ -8673,20 +8673,20 @@
                         <a:buNone/>
                       </a:pPr>
                       <a:r>
-                        <a:rPr lang="en-US" sz="1250" dirty="0">
+                        <a:rPr lang="en-US" sz="1400" dirty="0">
                           <a:solidFill>
                             <a:srgbClr val="CACACE"/>
                           </a:solidFill>
-                          <a:latin typeface="Calibri" pitchFamily="34" charset="0"/>
-                          <a:ea typeface="Calibri" pitchFamily="34" charset="-122"/>
-                          <a:cs typeface="Calibri" pitchFamily="34" charset="-120"/>
+                          <a:latin typeface="Rajdhani" pitchFamily="34" charset="0"/>
+                          <a:ea typeface="Rajdhani" pitchFamily="34" charset="-122"/>
+                          <a:cs typeface="Rajdhani" pitchFamily="34" charset="-120"/>
                         </a:rPr>
                         <a:t>verdicts held that were not overturned later</a:t>
                       </a:r>
-                      <a:endParaRPr lang="en-US" sz="1250" dirty="0">
-                        <a:latin typeface="Calibri" charset="0"/>
-                        <a:ea typeface="Calibri" charset="0"/>
-                        <a:cs typeface="Calibri" charset="0"/>
+                      <a:endParaRPr lang="en-US" sz="1400" dirty="0">
+                        <a:latin typeface="Rajdhani" charset="0"/>
+                        <a:ea typeface="Rajdhani" charset="0"/>
+                        <a:cs typeface="Rajdhani" charset="0"/>
                       </a:endParaRPr>
                     </a:p>
                   </a:txBody>
@@ -8741,20 +8741,20 @@
                         <a:buNone/>
                       </a:pPr>
                       <a:r>
-                        <a:rPr lang="en-US" sz="1250" dirty="0">
+                        <a:rPr lang="en-US" sz="1400" dirty="0">
                           <a:solidFill>
                             <a:srgbClr val="CACACE"/>
                           </a:solidFill>
-                          <a:latin typeface="Calibri" pitchFamily="34" charset="0"/>
-                          <a:ea typeface="Calibri" pitchFamily="34" charset="-122"/>
-                          <a:cs typeface="Calibri" pitchFamily="34" charset="-120"/>
+                          <a:latin typeface="Rajdhani" pitchFamily="34" charset="0"/>
+                          <a:ea typeface="Rajdhani" pitchFamily="34" charset="-122"/>
+                          <a:cs typeface="Rajdhani" pitchFamily="34" charset="-120"/>
                         </a:rPr>
                         <a:t>gates (orc)</a:t>
                       </a:r>
-                      <a:endParaRPr lang="en-US" sz="1250" dirty="0">
-                        <a:latin typeface="Calibri" charset="0"/>
-                        <a:ea typeface="Calibri" charset="0"/>
-                        <a:cs typeface="Calibri" charset="0"/>
+                      <a:endParaRPr lang="en-US" sz="1400" dirty="0">
+                        <a:latin typeface="Rajdhani" charset="0"/>
+                        <a:ea typeface="Rajdhani" charset="0"/>
+                        <a:cs typeface="Rajdhani" charset="0"/>
                       </a:endParaRPr>
                     </a:p>
                   </a:txBody>
@@ -8811,20 +8811,20 @@
                         <a:buNone/>
                       </a:pPr>
                       <a:r>
-                        <a:rPr lang="en-US" sz="1250" dirty="0">
+                        <a:rPr lang="en-US" sz="1400" dirty="0">
                           <a:solidFill>
                             <a:srgbClr val="55A9FF"/>
                           </a:solidFill>
-                          <a:latin typeface="Consolas" pitchFamily="34" charset="0"/>
-                          <a:ea typeface="Consolas" pitchFamily="34" charset="-122"/>
-                          <a:cs typeface="Consolas" pitchFamily="34" charset="-120"/>
+                          <a:latin typeface="JetBrains Mono" pitchFamily="34" charset="0"/>
+                          <a:ea typeface="JetBrains Mono" pitchFamily="34" charset="-122"/>
+                          <a:cs typeface="JetBrains Mono" pitchFamily="34" charset="-120"/>
                         </a:rPr>
                         <a:t>slimeHealth</a:t>
                       </a:r>
-                      <a:endParaRPr lang="en-US" sz="1250" dirty="0">
-                        <a:latin typeface="Consolas" charset="0"/>
-                        <a:ea typeface="Consolas" charset="0"/>
-                        <a:cs typeface="Consolas" charset="0"/>
+                      <a:endParaRPr lang="en-US" sz="1400" dirty="0">
+                        <a:latin typeface="JetBrains Mono" charset="0"/>
+                        <a:ea typeface="JetBrains Mono" charset="0"/>
+                        <a:cs typeface="JetBrains Mono" charset="0"/>
                       </a:endParaRPr>
                     </a:p>
                   </a:txBody>
@@ -8879,20 +8879,20 @@
                         <a:buNone/>
                       </a:pPr>
                       <a:r>
-                        <a:rPr lang="en-US" sz="1250" dirty="0">
+                        <a:rPr lang="en-US" sz="1400" dirty="0">
                           <a:solidFill>
                             <a:srgbClr val="CACACE"/>
                           </a:solidFill>
-                          <a:latin typeface="Calibri" pitchFamily="34" charset="0"/>
-                          <a:ea typeface="Calibri" pitchFamily="34" charset="-122"/>
-                          <a:cs typeface="Calibri" pitchFamily="34" charset="-120"/>
+                          <a:latin typeface="Rajdhani" pitchFamily="34" charset="0"/>
+                          <a:ea typeface="Rajdhani" pitchFamily="34" charset="-122"/>
+                          <a:cs typeface="Rajdhani" pitchFamily="34" charset="-120"/>
                         </a:rPr>
                         <a:t>100 − the mean strain of the bodies it dispatched (% of escalateAt)</a:t>
                       </a:r>
-                      <a:endParaRPr lang="en-US" sz="1250" dirty="0">
-                        <a:latin typeface="Calibri" charset="0"/>
-                        <a:ea typeface="Calibri" charset="0"/>
-                        <a:cs typeface="Calibri" charset="0"/>
+                      <a:endParaRPr lang="en-US" sz="1400" dirty="0">
+                        <a:latin typeface="Rajdhani" charset="0"/>
+                        <a:ea typeface="Rajdhani" charset="0"/>
+                        <a:cs typeface="Rajdhani" charset="0"/>
                       </a:endParaRPr>
                     </a:p>
                   </a:txBody>
@@ -8947,20 +8947,20 @@
                         <a:buNone/>
                       </a:pPr>
                       <a:r>
-                        <a:rPr lang="en-US" sz="1250" dirty="0">
+                        <a:rPr lang="en-US" sz="1400" dirty="0">
                           <a:solidFill>
                             <a:srgbClr val="CACACE"/>
                           </a:solidFill>
-                          <a:latin typeface="Calibri" pitchFamily="34" charset="0"/>
-                          <a:ea typeface="Calibri" pitchFamily="34" charset="-122"/>
-                          <a:cs typeface="Calibri" pitchFamily="34" charset="-120"/>
+                          <a:latin typeface="Rajdhani" pitchFamily="34" charset="0"/>
+                          <a:ea typeface="Rajdhani" pitchFamily="34" charset="-122"/>
+                          <a:cs typeface="Rajdhani" pitchFamily="34" charset="-120"/>
                         </a:rPr>
                         <a:t>dispatchers</a:t>
                       </a:r>
-                      <a:endParaRPr lang="en-US" sz="1250" dirty="0">
-                        <a:latin typeface="Calibri" charset="0"/>
-                        <a:ea typeface="Calibri" charset="0"/>
-                        <a:cs typeface="Calibri" charset="0"/>
+                      <a:endParaRPr lang="en-US" sz="1400" dirty="0">
+                        <a:latin typeface="Rajdhani" charset="0"/>
+                        <a:ea typeface="Rajdhani" charset="0"/>
+                        <a:cs typeface="Rajdhani" charset="0"/>
                       </a:endParaRPr>
                     </a:p>
                   </a:txBody>
@@ -9017,20 +9017,20 @@
                         <a:buNone/>
                       </a:pPr>
                       <a:r>
-                        <a:rPr lang="en-US" sz="1250" dirty="0">
+                        <a:rPr lang="en-US" sz="1400" dirty="0">
                           <a:solidFill>
                             <a:srgbClr val="55A9FF"/>
                           </a:solidFill>
-                          <a:latin typeface="Consolas" pitchFamily="34" charset="0"/>
-                          <a:ea typeface="Consolas" pitchFamily="34" charset="-122"/>
-                          <a:cs typeface="Consolas" pitchFamily="34" charset="-120"/>
+                          <a:latin typeface="JetBrains Mono" pitchFamily="34" charset="0"/>
+                          <a:ea typeface="JetBrains Mono" pitchFamily="34" charset="-122"/>
+                          <a:cs typeface="JetBrains Mono" pitchFamily="34" charset="-120"/>
                         </a:rPr>
                         <a:t>planLandRate</a:t>
                       </a:r>
-                      <a:endParaRPr lang="en-US" sz="1250" dirty="0">
-                        <a:latin typeface="Consolas" charset="0"/>
-                        <a:ea typeface="Consolas" charset="0"/>
-                        <a:cs typeface="Consolas" charset="0"/>
+                      <a:endParaRPr lang="en-US" sz="1400" dirty="0">
+                        <a:latin typeface="JetBrains Mono" charset="0"/>
+                        <a:ea typeface="JetBrains Mono" charset="0"/>
+                        <a:cs typeface="JetBrains Mono" charset="0"/>
                       </a:endParaRPr>
                     </a:p>
                   </a:txBody>
@@ -9085,20 +9085,20 @@
                         <a:buNone/>
                       </a:pPr>
                       <a:r>
-                        <a:rPr lang="en-US" sz="1250" dirty="0">
+                        <a:rPr lang="en-US" sz="1400" dirty="0">
                           <a:solidFill>
                             <a:srgbClr val="CACACE"/>
                           </a:solidFill>
-                          <a:latin typeface="Calibri" pitchFamily="34" charset="0"/>
-                          <a:ea typeface="Calibri" pitchFamily="34" charset="-122"/>
-                          <a:cs typeface="Calibri" pitchFamily="34" charset="-120"/>
+                          <a:latin typeface="Rajdhani" pitchFamily="34" charset="0"/>
+                          <a:ea typeface="Rajdhani" pitchFamily="34" charset="-122"/>
+                          <a:cs typeface="Rajdhani" pitchFamily="34" charset="-120"/>
                         </a:rPr>
                         <a:t>its dispatches that landed</a:t>
                       </a:r>
-                      <a:endParaRPr lang="en-US" sz="1250" dirty="0">
-                        <a:latin typeface="Calibri" charset="0"/>
-                        <a:ea typeface="Calibri" charset="0"/>
-                        <a:cs typeface="Calibri" charset="0"/>
+                      <a:endParaRPr lang="en-US" sz="1400" dirty="0">
+                        <a:latin typeface="Rajdhani" charset="0"/>
+                        <a:ea typeface="Rajdhani" charset="0"/>
+                        <a:cs typeface="Rajdhani" charset="0"/>
                       </a:endParaRPr>
                     </a:p>
                   </a:txBody>
@@ -9153,20 +9153,20 @@
                         <a:buNone/>
                       </a:pPr>
                       <a:r>
-                        <a:rPr lang="en-US" sz="1250" dirty="0">
+                        <a:rPr lang="en-US" sz="1400" dirty="0">
                           <a:solidFill>
                             <a:srgbClr val="CACACE"/>
                           </a:solidFill>
-                          <a:latin typeface="Calibri" pitchFamily="34" charset="0"/>
-                          <a:ea typeface="Calibri" pitchFamily="34" charset="-122"/>
-                          <a:cs typeface="Calibri" pitchFamily="34" charset="-120"/>
+                          <a:latin typeface="Rajdhani" pitchFamily="34" charset="0"/>
+                          <a:ea typeface="Rajdhani" pitchFamily="34" charset="-122"/>
+                          <a:cs typeface="Rajdhani" pitchFamily="34" charset="-120"/>
                         </a:rPr>
                         <a:t>planners (elf)</a:t>
                       </a:r>
-                      <a:endParaRPr lang="en-US" sz="1250" dirty="0">
-                        <a:latin typeface="Calibri" charset="0"/>
-                        <a:ea typeface="Calibri" charset="0"/>
-                        <a:cs typeface="Calibri" charset="0"/>
+                      <a:endParaRPr lang="en-US" sz="1400" dirty="0">
+                        <a:latin typeface="Rajdhani" charset="0"/>
+                        <a:ea typeface="Rajdhani" charset="0"/>
+                        <a:cs typeface="Rajdhani" charset="0"/>
                       </a:endParaRPr>
                     </a:p>
                   </a:txBody>
@@ -9223,20 +9223,20 @@
                         <a:buNone/>
                       </a:pPr>
                       <a:r>
-                        <a:rPr lang="en-US" sz="1250" dirty="0">
+                        <a:rPr lang="en-US" sz="1400" dirty="0">
                           <a:solidFill>
                             <a:srgbClr val="55A9FF"/>
                           </a:solidFill>
-                          <a:latin typeface="Consolas" pitchFamily="34" charset="0"/>
-                          <a:ea typeface="Consolas" pitchFamily="34" charset="-122"/>
-                          <a:cs typeface="Consolas" pitchFamily="34" charset="-120"/>
+                          <a:latin typeface="JetBrains Mono" pitchFamily="34" charset="0"/>
+                          <a:ea typeface="JetBrains Mono" pitchFamily="34" charset="-122"/>
+                          <a:cs typeface="JetBrains Mono" pitchFamily="34" charset="-120"/>
                         </a:rPr>
                         <a:t>reaskRate</a:t>
                       </a:r>
-                      <a:endParaRPr lang="en-US" sz="1250" dirty="0">
-                        <a:latin typeface="Consolas" charset="0"/>
-                        <a:ea typeface="Consolas" charset="0"/>
-                        <a:cs typeface="Consolas" charset="0"/>
+                      <a:endParaRPr lang="en-US" sz="1400" dirty="0">
+                        <a:latin typeface="JetBrains Mono" charset="0"/>
+                        <a:ea typeface="JetBrains Mono" charset="0"/>
+                        <a:cs typeface="JetBrains Mono" charset="0"/>
                       </a:endParaRPr>
                     </a:p>
                   </a:txBody>
@@ -9291,20 +9291,20 @@
                         <a:buNone/>
                       </a:pPr>
                       <a:r>
-                        <a:rPr lang="en-US" sz="1250" dirty="0">
+                        <a:rPr lang="en-US" sz="1400" dirty="0">
                           <a:solidFill>
                             <a:srgbClr val="CACACE"/>
                           </a:solidFill>
-                          <a:latin typeface="Calibri" pitchFamily="34" charset="0"/>
-                          <a:ea typeface="Calibri" pitchFamily="34" charset="-122"/>
-                          <a:cs typeface="Calibri" pitchFamily="34" charset="-120"/>
+                          <a:latin typeface="Rajdhani" pitchFamily="34" charset="0"/>
+                          <a:ea typeface="Rajdhani" pitchFamily="34" charset="-122"/>
+                          <a:cs typeface="Rajdhani" pitchFamily="34" charset="-120"/>
                         </a:rPr>
                         <a:t>dispatches that re-commissioned a body after a warrant</a:t>
                       </a:r>
-                      <a:endParaRPr lang="en-US" sz="1250" dirty="0">
-                        <a:latin typeface="Calibri" charset="0"/>
-                        <a:ea typeface="Calibri" charset="0"/>
-                        <a:cs typeface="Calibri" charset="0"/>
+                      <a:endParaRPr lang="en-US" sz="1400" dirty="0">
+                        <a:latin typeface="Rajdhani" charset="0"/>
+                        <a:ea typeface="Rajdhani" charset="0"/>
+                        <a:cs typeface="Rajdhani" charset="0"/>
                       </a:endParaRPr>
                     </a:p>
                   </a:txBody>
@@ -9359,20 +9359,20 @@
                         <a:buNone/>
                       </a:pPr>
                       <a:r>
-                        <a:rPr lang="en-US" sz="1250" dirty="0">
+                        <a:rPr lang="en-US" sz="1400" dirty="0">
                           <a:solidFill>
                             <a:srgbClr val="CACACE"/>
                           </a:solidFill>
-                          <a:latin typeface="Calibri" pitchFamily="34" charset="0"/>
-                          <a:ea typeface="Calibri" pitchFamily="34" charset="-122"/>
-                          <a:cs typeface="Calibri" pitchFamily="34" charset="-120"/>
+                          <a:latin typeface="Rajdhani" pitchFamily="34" charset="0"/>
+                          <a:ea typeface="Rajdhani" pitchFamily="34" charset="-122"/>
+                          <a:cs typeface="Rajdhani" pitchFamily="34" charset="-120"/>
                         </a:rPr>
                         <a:t>planners</a:t>
                       </a:r>
-                      <a:endParaRPr lang="en-US" sz="1250" dirty="0">
-                        <a:latin typeface="Calibri" charset="0"/>
-                        <a:ea typeface="Calibri" charset="0"/>
-                        <a:cs typeface="Calibri" charset="0"/>
+                      <a:endParaRPr lang="en-US" sz="1400" dirty="0">
+                        <a:latin typeface="Rajdhani" charset="0"/>
+                        <a:ea typeface="Rajdhani" charset="0"/>
+                        <a:cs typeface="Rajdhani" charset="0"/>
                       </a:endParaRPr>
                     </a:p>
                   </a:txBody>
@@ -9429,20 +9429,20 @@
                         <a:buNone/>
                       </a:pPr>
                       <a:r>
-                        <a:rPr lang="en-US" sz="1250" dirty="0">
+                        <a:rPr lang="en-US" sz="1400" dirty="0">
                           <a:solidFill>
                             <a:srgbClr val="55A9FF"/>
                           </a:solidFill>
-                          <a:latin typeface="Consolas" pitchFamily="34" charset="0"/>
-                          <a:ea typeface="Consolas" pitchFamily="34" charset="-122"/>
-                          <a:cs typeface="Consolas" pitchFamily="34" charset="-120"/>
+                          <a:latin typeface="JetBrains Mono" pitchFamily="34" charset="0"/>
+                          <a:ea typeface="JetBrains Mono" pitchFamily="34" charset="-122"/>
+                          <a:cs typeface="JetBrains Mono" pitchFamily="34" charset="-120"/>
                         </a:rPr>
                         <a:t>askDoneRate</a:t>
                       </a:r>
-                      <a:endParaRPr lang="en-US" sz="1250" dirty="0">
-                        <a:latin typeface="Consolas" charset="0"/>
-                        <a:ea typeface="Consolas" charset="0"/>
-                        <a:cs typeface="Consolas" charset="0"/>
+                      <a:endParaRPr lang="en-US" sz="1400" dirty="0">
+                        <a:latin typeface="JetBrains Mono" charset="0"/>
+                        <a:ea typeface="JetBrains Mono" charset="0"/>
+                        <a:cs typeface="JetBrains Mono" charset="0"/>
                       </a:endParaRPr>
                     </a:p>
                   </a:txBody>
@@ -9497,20 +9497,20 @@
                         <a:buNone/>
                       </a:pPr>
                       <a:r>
-                        <a:rPr lang="en-US" sz="1250" dirty="0">
+                        <a:rPr lang="en-US" sz="1400" dirty="0">
                           <a:solidFill>
                             <a:srgbClr val="CACACE"/>
                           </a:solidFill>
-                          <a:latin typeface="Calibri" pitchFamily="34" charset="0"/>
-                          <a:ea typeface="Calibri" pitchFamily="34" charset="-122"/>
-                          <a:cs typeface="Calibri" pitchFamily="34" charset="-120"/>
+                          <a:latin typeface="Rajdhani" pitchFamily="34" charset="0"/>
+                          <a:ea typeface="Rajdhani" pitchFamily="34" charset="-122"/>
+                          <a:cs typeface="Rajdhani" pitchFamily="34" charset="-120"/>
                         </a:rPr>
                         <a:t>the human's turns closed with a pass and not reopened</a:t>
                       </a:r>
-                      <a:endParaRPr lang="en-US" sz="1250" dirty="0">
-                        <a:latin typeface="Calibri" charset="0"/>
-                        <a:ea typeface="Calibri" charset="0"/>
-                        <a:cs typeface="Calibri" charset="0"/>
+                      <a:endParaRPr lang="en-US" sz="1400" dirty="0">
+                        <a:latin typeface="Rajdhani" charset="0"/>
+                        <a:ea typeface="Rajdhani" charset="0"/>
+                        <a:cs typeface="Rajdhani" charset="0"/>
                       </a:endParaRPr>
                     </a:p>
                   </a:txBody>
@@ -9565,20 +9565,20 @@
                         <a:buNone/>
                       </a:pPr>
                       <a:r>
-                        <a:rPr lang="en-US" sz="1250" dirty="0">
+                        <a:rPr lang="en-US" sz="1400" dirty="0">
                           <a:solidFill>
                             <a:srgbClr val="CACACE"/>
                           </a:solidFill>
-                          <a:latin typeface="Calibri" pitchFamily="34" charset="0"/>
-                          <a:ea typeface="Calibri" pitchFamily="34" charset="-122"/>
-                          <a:cs typeface="Calibri" pitchFamily="34" charset="-120"/>
+                          <a:latin typeface="Rajdhani" pitchFamily="34" charset="0"/>
+                          <a:ea typeface="Rajdhani" pitchFamily="34" charset="-122"/>
+                          <a:cs typeface="Rajdhani" pitchFamily="34" charset="-120"/>
                         </a:rPr>
                         <a:t>the root (Rimuru)</a:t>
                       </a:r>
-                      <a:endParaRPr lang="en-US" sz="1250" dirty="0">
-                        <a:latin typeface="Calibri" charset="0"/>
-                        <a:ea typeface="Calibri" charset="0"/>
-                        <a:cs typeface="Calibri" charset="0"/>
+                      <a:endParaRPr lang="en-US" sz="1400" dirty="0">
+                        <a:latin typeface="Rajdhani" charset="0"/>
+                        <a:ea typeface="Rajdhani" charset="0"/>
+                        <a:cs typeface="Rajdhani" charset="0"/>
                       </a:endParaRPr>
                     </a:p>
                   </a:txBody>
@@ -9635,20 +9635,20 @@
                         <a:buNone/>
                       </a:pPr>
                       <a:r>
-                        <a:rPr lang="en-US" sz="1250" dirty="0">
+                        <a:rPr lang="en-US" sz="1400" dirty="0">
                           <a:solidFill>
                             <a:srgbClr val="55A9FF"/>
                           </a:solidFill>
-                          <a:latin typeface="Consolas" pitchFamily="34" charset="0"/>
-                          <a:ea typeface="Consolas" pitchFamily="34" charset="-122"/>
-                          <a:cs typeface="Consolas" pitchFamily="34" charset="-120"/>
+                          <a:latin typeface="JetBrains Mono" pitchFamily="34" charset="0"/>
+                          <a:ea typeface="JetBrains Mono" pitchFamily="34" charset="-122"/>
+                          <a:cs typeface="JetBrains Mono" pitchFamily="34" charset="-120"/>
                         </a:rPr>
                         <a:t>upheldRate</a:t>
                       </a:r>
-                      <a:endParaRPr lang="en-US" sz="1250" dirty="0">
-                        <a:latin typeface="Consolas" charset="0"/>
-                        <a:ea typeface="Consolas" charset="0"/>
-                        <a:cs typeface="Consolas" charset="0"/>
+                      <a:endParaRPr lang="en-US" sz="1400" dirty="0">
+                        <a:latin typeface="JetBrains Mono" charset="0"/>
+                        <a:ea typeface="JetBrains Mono" charset="0"/>
+                        <a:cs typeface="JetBrains Mono" charset="0"/>
                       </a:endParaRPr>
                     </a:p>
                   </a:txBody>
@@ -9703,20 +9703,20 @@
                         <a:buNone/>
                       </a:pPr>
                       <a:r>
-                        <a:rPr lang="en-US" sz="1250" dirty="0">
+                        <a:rPr lang="en-US" sz="1400" dirty="0">
                           <a:solidFill>
                             <a:srgbClr val="CACACE"/>
                           </a:solidFill>
-                          <a:latin typeface="Calibri" pitchFamily="34" charset="0"/>
-                          <a:ea typeface="Calibri" pitchFamily="34" charset="-122"/>
-                          <a:cs typeface="Calibri" pitchFamily="34" charset="-120"/>
+                          <a:latin typeface="Rajdhani" pitchFamily="34" charset="0"/>
+                          <a:ea typeface="Rajdhani" pitchFamily="34" charset="-122"/>
+                          <a:cs typeface="Rajdhani" pitchFamily="34" charset="-120"/>
                         </a:rPr>
                         <a:t>reports that filed findings (@F) and landed</a:t>
                       </a:r>
-                      <a:endParaRPr lang="en-US" sz="1250" dirty="0">
-                        <a:latin typeface="Calibri" charset="0"/>
-                        <a:ea typeface="Calibri" charset="0"/>
-                        <a:cs typeface="Calibri" charset="0"/>
+                      <a:endParaRPr lang="en-US" sz="1400" dirty="0">
+                        <a:latin typeface="Rajdhani" charset="0"/>
+                        <a:ea typeface="Rajdhani" charset="0"/>
+                        <a:cs typeface="Rajdhani" charset="0"/>
                       </a:endParaRPr>
                     </a:p>
                   </a:txBody>
@@ -9771,20 +9771,20 @@
                         <a:buNone/>
                       </a:pPr>
                       <a:r>
-                        <a:rPr lang="en-US" sz="1250" dirty="0">
+                        <a:rPr lang="en-US" sz="1400" dirty="0">
                           <a:solidFill>
                             <a:srgbClr val="CACACE"/>
                           </a:solidFill>
-                          <a:latin typeface="Calibri" pitchFamily="34" charset="0"/>
-                          <a:ea typeface="Calibri" pitchFamily="34" charset="-122"/>
-                          <a:cs typeface="Calibri" pitchFamily="34" charset="-120"/>
+                          <a:latin typeface="Rajdhani" pitchFamily="34" charset="0"/>
+                          <a:ea typeface="Rajdhani" pitchFamily="34" charset="-122"/>
+                          <a:cs typeface="Rajdhani" pitchFamily="34" charset="-120"/>
                         </a:rPr>
                         <a:t>auditors</a:t>
                       </a:r>
-                      <a:endParaRPr lang="en-US" sz="1250" dirty="0">
-                        <a:latin typeface="Calibri" charset="0"/>
-                        <a:ea typeface="Calibri" charset="0"/>
-                        <a:cs typeface="Calibri" charset="0"/>
+                      <a:endParaRPr lang="en-US" sz="1400" dirty="0">
+                        <a:latin typeface="Rajdhani" charset="0"/>
+                        <a:ea typeface="Rajdhani" charset="0"/>
+                        <a:cs typeface="Rajdhani" charset="0"/>
                       </a:endParaRPr>
                     </a:p>
                   </a:txBody>
@@ -9916,9 +9916,9 @@
                 <a:solidFill>
                   <a:srgbClr val="A3A3AD"/>
                 </a:solidFill>
-                <a:latin typeface="Calibri" pitchFamily="34" charset="0"/>
-                <a:ea typeface="Calibri" pitchFamily="34" charset="-122"/>
-                <a:cs typeface="Calibri" pitchFamily="34" charset="-120"/>
+                <a:latin typeface="Rajdhani" pitchFamily="34" charset="0"/>
+                <a:ea typeface="Rajdhani" pitchFamily="34" charset="-122"/>
+                <a:cs typeface="Rajdhani" pitchFamily="34" charset="-120"/>
               </a:rPr>
               <a:t>ISEKAI ⋄ STRESS AND VALUE</a:t>
             </a:r>
@@ -9955,9 +9955,9 @@
                 <a:solidFill>
                   <a:srgbClr val="A3A3AD"/>
                 </a:solidFill>
-                <a:latin typeface="Calibri" pitchFamily="34" charset="0"/>
-                <a:ea typeface="Calibri" pitchFamily="34" charset="-122"/>
-                <a:cs typeface="Calibri" pitchFamily="34" charset="-120"/>
+                <a:latin typeface="Rajdhani" pitchFamily="34" charset="0"/>
+                <a:ea typeface="Rajdhani" pitchFamily="34" charset="-122"/>
+                <a:cs typeface="Rajdhani" pitchFamily="34" charset="-120"/>
               </a:rPr>
               <a:t>5</a:t>
             </a:r>
@@ -9994,9 +9994,9 @@
                 <a:solidFill>
                   <a:srgbClr val="FF8550"/>
                 </a:solidFill>
-                <a:latin typeface="Calibri" pitchFamily="34" charset="0"/>
-                <a:ea typeface="Calibri" pitchFamily="34" charset="-122"/>
-                <a:cs typeface="Calibri" pitchFamily="34" charset="-120"/>
+                <a:latin typeface="Rajdhani" pitchFamily="34" charset="0"/>
+                <a:ea typeface="Rajdhani" pitchFamily="34" charset="-122"/>
+                <a:cs typeface="Rajdhani" pitchFamily="34" charset="-120"/>
               </a:rPr>
               <a:t>THE FAMILY SCORES</a:t>
             </a:r>
@@ -10029,17 +10029,17 @@
               <a:buNone/>
             </a:pPr>
             <a:r>
-              <a:rPr lang="en-US" sz="2800" dirty="0">
+              <a:rPr lang="en-US" sz="2400" b="1" dirty="0">
                 <a:solidFill>
                   <a:srgbClr val="E8E8E8"/>
                 </a:solidFill>
-                <a:latin typeface="Arial Black" pitchFamily="34" charset="0"/>
-                <a:ea typeface="Arial Black" pitchFamily="34" charset="-122"/>
-                <a:cs typeface="Arial Black" pitchFamily="34" charset="-120"/>
+                <a:latin typeface="Orbitron" pitchFamily="34" charset="0"/>
+                <a:ea typeface="Orbitron" pitchFamily="34" charset="-122"/>
+                <a:cs typeface="Orbitron" pitchFamily="34" charset="-120"/>
               </a:rPr>
               <a:t>Each family is judged by its own job</a:t>
             </a:r>
-            <a:endParaRPr lang="en-US" sz="2800" dirty="0"/>
+            <a:endParaRPr lang="en-US" sz="2400" dirty="0"/>
           </a:p>
         </p:txBody>
       </p:sp>
@@ -10072,9 +10072,9 @@
                 <a:solidFill>
                   <a:srgbClr val="FF8550"/>
                 </a:solidFill>
-                <a:latin typeface="Calibri" pitchFamily="34" charset="0"/>
-                <a:ea typeface="Calibri" pitchFamily="34" charset="-122"/>
-                <a:cs typeface="Calibri" pitchFamily="34" charset="-120"/>
+                <a:latin typeface="Rajdhani" pitchFamily="34" charset="0"/>
+                <a:ea typeface="Rajdhani" pitchFamily="34" charset="-122"/>
+                <a:cs typeface="Rajdhani" pitchFamily="34" charset="-120"/>
               </a:rPr>
               <a:t>author · slime</a:t>
             </a:r>
@@ -10113,9 +10113,9 @@
                 <a:solidFill>
                   <a:srgbClr val="E8E8E8"/>
                 </a:solidFill>
-                <a:latin typeface="Consolas" pitchFamily="34" charset="0"/>
-                <a:ea typeface="Consolas" pitchFamily="34" charset="-122"/>
-                <a:cs typeface="Consolas" pitchFamily="34" charset="-120"/>
+                <a:latin typeface="JetBrains Mono" pitchFamily="34" charset="0"/>
+                <a:ea typeface="JetBrains Mono" pitchFamily="34" charset="-122"/>
+                <a:cs typeface="JetBrains Mono" pitchFamily="34" charset="-120"/>
               </a:rPr>
               <a:t>0.6·landRate + 0.3·gateRate − 0.1·holeRate</a:t>
             </a:r>
@@ -10152,9 +10152,9 @@
                 <a:solidFill>
                   <a:srgbClr val="FF8550"/>
                 </a:solidFill>
-                <a:latin typeface="Calibri" pitchFamily="34" charset="0"/>
-                <a:ea typeface="Calibri" pitchFamily="34" charset="-122"/>
-                <a:cs typeface="Calibri" pitchFamily="34" charset="-120"/>
+                <a:latin typeface="Rajdhani" pitchFamily="34" charset="0"/>
+                <a:ea typeface="Rajdhani" pitchFamily="34" charset="-122"/>
+                <a:cs typeface="Rajdhani" pitchFamily="34" charset="-120"/>
               </a:rPr>
               <a:t>gate · orc</a:t>
             </a:r>
@@ -10193,9 +10193,9 @@
                 <a:solidFill>
                   <a:srgbClr val="E8E8E8"/>
                 </a:solidFill>
-                <a:latin typeface="Consolas" pitchFamily="34" charset="0"/>
-                <a:ea typeface="Consolas" pitchFamily="34" charset="-122"/>
-                <a:cs typeface="Consolas" pitchFamily="34" charset="-120"/>
+                <a:latin typeface="JetBrains Mono" pitchFamily="34" charset="0"/>
+                <a:ea typeface="JetBrains Mono" pitchFamily="34" charset="-122"/>
+                <a:cs typeface="JetBrains Mono" pitchFamily="34" charset="-120"/>
               </a:rPr>
               <a:t>0.5·gateRight + 0.3·slimeHealth + 0.2·landRate</a:t>
             </a:r>
@@ -10232,9 +10232,9 @@
                 <a:solidFill>
                   <a:srgbClr val="FF8550"/>
                 </a:solidFill>
-                <a:latin typeface="Calibri" pitchFamily="34" charset="0"/>
-                <a:ea typeface="Calibri" pitchFamily="34" charset="-122"/>
-                <a:cs typeface="Calibri" pitchFamily="34" charset="-120"/>
+                <a:latin typeface="Rajdhani" pitchFamily="34" charset="0"/>
+                <a:ea typeface="Rajdhani" pitchFamily="34" charset="-122"/>
+                <a:cs typeface="Rajdhani" pitchFamily="34" charset="-120"/>
               </a:rPr>
               <a:t>planner · elf</a:t>
             </a:r>
@@ -10273,9 +10273,9 @@
                 <a:solidFill>
                   <a:srgbClr val="E8E8E8"/>
                 </a:solidFill>
-                <a:latin typeface="Consolas" pitchFamily="34" charset="0"/>
-                <a:ea typeface="Consolas" pitchFamily="34" charset="-122"/>
-                <a:cs typeface="Consolas" pitchFamily="34" charset="-120"/>
+                <a:latin typeface="JetBrains Mono" pitchFamily="34" charset="0"/>
+                <a:ea typeface="JetBrains Mono" pitchFamily="34" charset="-122"/>
+                <a:cs typeface="JetBrains Mono" pitchFamily="34" charset="-120"/>
               </a:rPr>
               <a:t>0.6·planLandRate − 0.2·reaskRate + 0.2·landRate</a:t>
             </a:r>
@@ -10312,9 +10312,9 @@
                 <a:solidFill>
                   <a:srgbClr val="FF8550"/>
                 </a:solidFill>
-                <a:latin typeface="Calibri" pitchFamily="34" charset="0"/>
-                <a:ea typeface="Calibri" pitchFamily="34" charset="-122"/>
-                <a:cs typeface="Calibri" pitchFamily="34" charset="-120"/>
+                <a:latin typeface="Rajdhani" pitchFamily="34" charset="0"/>
+                <a:ea typeface="Rajdhani" pitchFamily="34" charset="-122"/>
+                <a:cs typeface="Rajdhani" pitchFamily="34" charset="-120"/>
               </a:rPr>
               <a:t>steward · kijin</a:t>
             </a:r>
@@ -10353,9 +10353,9 @@
                 <a:solidFill>
                   <a:srgbClr val="E8E8E8"/>
                 </a:solidFill>
-                <a:latin typeface="Consolas" pitchFamily="34" charset="0"/>
-                <a:ea typeface="Consolas" pitchFamily="34" charset="-122"/>
-                <a:cs typeface="Consolas" pitchFamily="34" charset="-120"/>
+                <a:latin typeface="JetBrains Mono" pitchFamily="34" charset="0"/>
+                <a:ea typeface="JetBrains Mono" pitchFamily="34" charset="-122"/>
+                <a:cs typeface="JetBrains Mono" pitchFamily="34" charset="-120"/>
               </a:rPr>
               <a:t>0.7·verifyGreenRate + 0.3·landRate</a:t>
             </a:r>
@@ -10392,9 +10392,9 @@
                 <a:solidFill>
                   <a:srgbClr val="FF8550"/>
                 </a:solidFill>
-                <a:latin typeface="Calibri" pitchFamily="34" charset="0"/>
-                <a:ea typeface="Calibri" pitchFamily="34" charset="-122"/>
-                <a:cs typeface="Calibri" pitchFamily="34" charset="-120"/>
+                <a:latin typeface="Rajdhani" pitchFamily="34" charset="0"/>
+                <a:ea typeface="Rajdhani" pitchFamily="34" charset="-122"/>
+                <a:cs typeface="Rajdhani" pitchFamily="34" charset="-120"/>
               </a:rPr>
               <a:t>auditor · dark elf</a:t>
             </a:r>
@@ -10433,9 +10433,9 @@
                 <a:solidFill>
                   <a:srgbClr val="E8E8E8"/>
                 </a:solidFill>
-                <a:latin typeface="Consolas" pitchFamily="34" charset="0"/>
-                <a:ea typeface="Consolas" pitchFamily="34" charset="-122"/>
-                <a:cs typeface="Consolas" pitchFamily="34" charset="-120"/>
+                <a:latin typeface="JetBrains Mono" pitchFamily="34" charset="0"/>
+                <a:ea typeface="JetBrains Mono" pitchFamily="34" charset="-122"/>
+                <a:cs typeface="JetBrains Mono" pitchFamily="34" charset="-120"/>
               </a:rPr>
               <a:t>0.7·upheldRate + 0.3·passRate</a:t>
             </a:r>
@@ -10472,9 +10472,9 @@
                 <a:solidFill>
                   <a:srgbClr val="FF8550"/>
                 </a:solidFill>
-                <a:latin typeface="Calibri" pitchFamily="34" charset="0"/>
-                <a:ea typeface="Calibri" pitchFamily="34" charset="-122"/>
-                <a:cs typeface="Calibri" pitchFamily="34" charset="-120"/>
+                <a:latin typeface="Rajdhani" pitchFamily="34" charset="0"/>
+                <a:ea typeface="Rajdhani" pitchFamily="34" charset="-122"/>
+                <a:cs typeface="Rajdhani" pitchFamily="34" charset="-120"/>
               </a:rPr>
               <a:t>root · Rimuru</a:t>
             </a:r>
@@ -10513,9 +10513,9 @@
                 <a:solidFill>
                   <a:srgbClr val="E8E8E8"/>
                 </a:solidFill>
-                <a:latin typeface="Consolas" pitchFamily="34" charset="0"/>
-                <a:ea typeface="Consolas" pitchFamily="34" charset="-122"/>
-                <a:cs typeface="Consolas" pitchFamily="34" charset="-120"/>
+                <a:latin typeface="JetBrains Mono" pitchFamily="34" charset="0"/>
+                <a:ea typeface="JetBrains Mono" pitchFamily="34" charset="-122"/>
+                <a:cs typeface="JetBrains Mono" pitchFamily="34" charset="-120"/>
               </a:rPr>
               <a:t>askDoneRate</a:t>
             </a:r>
@@ -10620,9 +10620,9 @@
                 <a:solidFill>
                   <a:srgbClr val="A3A3AD"/>
                 </a:solidFill>
-                <a:latin typeface="Calibri" pitchFamily="34" charset="0"/>
-                <a:ea typeface="Calibri" pitchFamily="34" charset="-122"/>
-                <a:cs typeface="Calibri" pitchFamily="34" charset="-120"/>
+                <a:latin typeface="Rajdhani" pitchFamily="34" charset="0"/>
+                <a:ea typeface="Rajdhani" pitchFamily="34" charset="-122"/>
+                <a:cs typeface="Rajdhani" pitchFamily="34" charset="-120"/>
               </a:rPr>
               <a:t>ISEKAI ⋄ STRESS AND VALUE</a:t>
             </a:r>
@@ -10659,9 +10659,9 @@
                 <a:solidFill>
                   <a:srgbClr val="A3A3AD"/>
                 </a:solidFill>
-                <a:latin typeface="Calibri" pitchFamily="34" charset="0"/>
-                <a:ea typeface="Calibri" pitchFamily="34" charset="-122"/>
-                <a:cs typeface="Calibri" pitchFamily="34" charset="-120"/>
+                <a:latin typeface="Rajdhani" pitchFamily="34" charset="0"/>
+                <a:ea typeface="Rajdhani" pitchFamily="34" charset="-122"/>
+                <a:cs typeface="Rajdhani" pitchFamily="34" charset="-120"/>
               </a:rPr>
               <a:t>6</a:t>
             </a:r>
@@ -10698,9 +10698,9 @@
                 <a:solidFill>
                   <a:srgbClr val="FF8550"/>
                 </a:solidFill>
-                <a:latin typeface="Calibri" pitchFamily="34" charset="0"/>
-                <a:ea typeface="Calibri" pitchFamily="34" charset="-122"/>
-                <a:cs typeface="Calibri" pitchFamily="34" charset="-120"/>
+                <a:latin typeface="Rajdhani" pitchFamily="34" charset="0"/>
+                <a:ea typeface="Rajdhani" pitchFamily="34" charset="-122"/>
+                <a:cs typeface="Rajdhani" pitchFamily="34" charset="-120"/>
               </a:rPr>
               <a:t>WORKED EXAMPLE</a:t>
             </a:r>
@@ -10733,17 +10733,17 @@
               <a:buNone/>
             </a:pPr>
             <a:r>
-              <a:rPr lang="en-US" sz="2800" dirty="0">
+              <a:rPr lang="en-US" sz="2400" b="1" dirty="0">
                 <a:solidFill>
                   <a:srgbClr val="E8E8E8"/>
                 </a:solidFill>
-                <a:latin typeface="Arial Black" pitchFamily="34" charset="0"/>
-                <a:ea typeface="Arial Black" pitchFamily="34" charset="-122"/>
-                <a:cs typeface="Arial Black" pitchFamily="34" charset="-120"/>
+                <a:latin typeface="Orbitron" pitchFamily="34" charset="0"/>
+                <a:ea typeface="Orbitron" pitchFamily="34" charset="-122"/>
+                <a:cs typeface="Orbitron" pitchFamily="34" charset="-120"/>
               </a:rPr>
               <a:t>One slime, one score: 68</a:t>
             </a:r>
-            <a:endParaRPr lang="en-US" sz="2800" dirty="0"/>
+            <a:endParaRPr lang="en-US" sz="2400" dirty="0"/>
           </a:p>
         </p:txBody>
       </p:sp>
@@ -10833,17 +10833,17 @@
               <a:buNone/>
             </a:pPr>
             <a:r>
-              <a:rPr lang="en-US" sz="1600" b="1" dirty="0">
+              <a:rPr lang="en-US" sz="1800" b="1" dirty="0">
                 <a:solidFill>
                   <a:srgbClr val="FFB300"/>
                 </a:solidFill>
-                <a:latin typeface="Calibri" pitchFamily="34" charset="0"/>
-                <a:ea typeface="Calibri" pitchFamily="34" charset="-122"/>
-                <a:cs typeface="Calibri" pitchFamily="34" charset="-120"/>
+                <a:latin typeface="Rajdhani" pitchFamily="34" charset="0"/>
+                <a:ea typeface="Rajdhani" pitchFamily="34" charset="-122"/>
+                <a:cs typeface="Rajdhani" pitchFamily="34" charset="-120"/>
               </a:rPr>
               <a:t>the score: 68 → warn</a:t>
             </a:r>
-            <a:endParaRPr lang="en-US" sz="1600" dirty="0"/>
+            <a:endParaRPr lang="en-US" sz="1800" dirty="0"/>
           </a:p>
         </p:txBody>
       </p:sp>
@@ -10875,17 +10875,17 @@
               <a:buNone/>
             </a:pPr>
             <a:r>
-              <a:rPr lang="en-US" sz="1300" dirty="0">
+              <a:rPr lang="en-US" sz="1500" dirty="0">
                 <a:solidFill>
                   <a:srgbClr val="CACACE"/>
                 </a:solidFill>
-                <a:latin typeface="Calibri" pitchFamily="34" charset="0"/>
-                <a:ea typeface="Calibri" pitchFamily="34" charset="-122"/>
-                <a:cs typeface="Calibri" pitchFamily="34" charset="-120"/>
+                <a:latin typeface="Rajdhani" pitchFamily="34" charset="0"/>
+                <a:ea typeface="Rajdhani" pitchFamily="34" charset="-122"/>
+                <a:cs typeface="Rajdhani" pitchFamily="34" charset="-120"/>
               </a:rPr>
               <a:t>score bands: ok ≥ 70 · warn ≥ 40 · bad below. One number to rank and tint the net.</a:t>
             </a:r>
-            <a:endParaRPr lang="en-US" sz="1300" dirty="0"/>
+            <a:endParaRPr lang="en-US" sz="1500" dirty="0"/>
           </a:p>
         </p:txBody>
       </p:sp>
@@ -10959,17 +10959,17 @@
               <a:buNone/>
             </a:pPr>
             <a:r>
-              <a:rPr lang="en-US" sz="1600" b="1" dirty="0">
+              <a:rPr lang="en-US" sz="1800" b="1" dirty="0">
                 <a:solidFill>
                   <a:srgbClr val="3CD68C"/>
                 </a:solidFill>
-                <a:latin typeface="Calibri" pitchFamily="34" charset="0"/>
-                <a:ea typeface="Calibri" pitchFamily="34" charset="-122"/>
-                <a:cs typeface="Calibri" pitchFamily="34" charset="-120"/>
+                <a:latin typeface="Rajdhani" pitchFamily="34" charset="0"/>
+                <a:ea typeface="Rajdhani" pitchFamily="34" charset="-122"/>
+                <a:cs typeface="Rajdhani" pitchFamily="34" charset="-120"/>
               </a:rPr>
               <a:t>the meter: landRate 80% → ok</a:t>
             </a:r>
-            <a:endParaRPr lang="en-US" sz="1600" dirty="0"/>
+            <a:endParaRPr lang="en-US" sz="1800" dirty="0"/>
           </a:p>
         </p:txBody>
       </p:sp>
@@ -11001,17 +11001,17 @@
               <a:buNone/>
             </a:pPr>
             <a:r>
-              <a:rPr lang="en-US" sz="1300" dirty="0">
+              <a:rPr lang="en-US" sz="1500" dirty="0">
                 <a:solidFill>
                   <a:srgbClr val="CACACE"/>
                 </a:solidFill>
-                <a:latin typeface="Calibri" pitchFamily="34" charset="0"/>
-                <a:ea typeface="Calibri" pitchFamily="34" charset="-122"/>
-                <a:cs typeface="Calibri" pitchFamily="34" charset="-120"/>
+                <a:latin typeface="Rajdhani" pitchFamily="34" charset="0"/>
+                <a:ea typeface="Rajdhani" pitchFamily="34" charset="-122"/>
+                <a:cs typeface="Rajdhani" pitchFamily="34" charset="-120"/>
               </a:rPr>
               <a:t>the slime's meter shows its own job's signal, banded ok ≥ 80 · warn ≥ 50 — what the sidebar and the dashboard draw.</a:t>
             </a:r>
-            <a:endParaRPr lang="en-US" sz="1300" dirty="0"/>
+            <a:endParaRPr lang="en-US" sz="1500" dirty="0"/>
           </a:p>
         </p:txBody>
       </p:sp>
@@ -11096,9 +11096,9 @@
                 <a:solidFill>
                   <a:srgbClr val="A3A3AD"/>
                 </a:solidFill>
-                <a:latin typeface="Calibri" pitchFamily="34" charset="0"/>
-                <a:ea typeface="Calibri" pitchFamily="34" charset="-122"/>
-                <a:cs typeface="Calibri" pitchFamily="34" charset="-120"/>
+                <a:latin typeface="Rajdhani" pitchFamily="34" charset="0"/>
+                <a:ea typeface="Rajdhani" pitchFamily="34" charset="-122"/>
+                <a:cs typeface="Rajdhani" pitchFamily="34" charset="-120"/>
               </a:rPr>
               <a:t>ISEKAI ⋄ STRESS AND VALUE</a:t>
             </a:r>
@@ -11135,9 +11135,9 @@
                 <a:solidFill>
                   <a:srgbClr val="A3A3AD"/>
                 </a:solidFill>
-                <a:latin typeface="Calibri" pitchFamily="34" charset="0"/>
-                <a:ea typeface="Calibri" pitchFamily="34" charset="-122"/>
-                <a:cs typeface="Calibri" pitchFamily="34" charset="-120"/>
+                <a:latin typeface="Rajdhani" pitchFamily="34" charset="0"/>
+                <a:ea typeface="Rajdhani" pitchFamily="34" charset="-122"/>
+                <a:cs typeface="Rajdhani" pitchFamily="34" charset="-120"/>
               </a:rPr>
               <a:t>7</a:t>
             </a:r>
@@ -11174,9 +11174,9 @@
                 <a:solidFill>
                   <a:srgbClr val="FF8550"/>
                 </a:solidFill>
-                <a:latin typeface="Calibri" pitchFamily="34" charset="0"/>
-                <a:ea typeface="Calibri" pitchFamily="34" charset="-122"/>
-                <a:cs typeface="Calibri" pitchFamily="34" charset="-120"/>
+                <a:latin typeface="Rajdhani" pitchFamily="34" charset="0"/>
+                <a:ea typeface="Rajdhani" pitchFamily="34" charset="-122"/>
+                <a:cs typeface="Rajdhani" pitchFamily="34" charset="-120"/>
               </a:rPr>
               <a:t>METERS</a:t>
             </a:r>
@@ -11209,17 +11209,17 @@
               <a:buNone/>
             </a:pPr>
             <a:r>
-              <a:rPr lang="en-US" sz="2800" dirty="0">
+              <a:rPr lang="en-US" sz="2400" b="1" dirty="0">
                 <a:solidFill>
                   <a:srgbClr val="E8E8E8"/>
                 </a:solidFill>
-                <a:latin typeface="Arial Black" pitchFamily="34" charset="0"/>
-                <a:ea typeface="Arial Black" pitchFamily="34" charset="-122"/>
-                <a:cs typeface="Arial Black" pitchFamily="34" charset="-120"/>
+                <a:latin typeface="Orbitron" pitchFamily="34" charset="0"/>
+                <a:ea typeface="Orbitron" pitchFamily="34" charset="-122"/>
+                <a:cs typeface="Orbitron" pitchFamily="34" charset="-120"/>
               </a:rPr>
               <a:t>A meter is one signal, banded — what the faces draw</a:t>
             </a:r>
-            <a:endParaRPr lang="en-US" sz="2800" dirty="0"/>
+            <a:endParaRPr lang="en-US" sz="2400" dirty="0"/>
           </a:p>
         </p:txBody>
       </p:sp>
@@ -11265,16 +11265,16 @@
                           <a:solidFill>
                             <a:srgbClr val="FF8550"/>
                           </a:solidFill>
-                          <a:latin typeface="Calibri" pitchFamily="34" charset="0"/>
-                          <a:ea typeface="Calibri" pitchFamily="34" charset="-122"/>
-                          <a:cs typeface="Calibri" pitchFamily="34" charset="-120"/>
+                          <a:latin typeface="Rajdhani" pitchFamily="34" charset="0"/>
+                          <a:ea typeface="Rajdhani" pitchFamily="34" charset="-122"/>
+                          <a:cs typeface="Rajdhani" pitchFamily="34" charset="-120"/>
                         </a:rPr>
                         <a:t>family</a:t>
                       </a:r>
                       <a:endParaRPr lang="en-US" sz="1300" dirty="0">
-                        <a:latin typeface="Calibri" charset="0"/>
-                        <a:ea typeface="Calibri" charset="0"/>
-                        <a:cs typeface="Calibri" charset="0"/>
+                        <a:latin typeface="Rajdhani" charset="0"/>
+                        <a:ea typeface="Rajdhani" charset="0"/>
+                        <a:cs typeface="Rajdhani" charset="0"/>
                       </a:endParaRPr>
                     </a:p>
                   </a:txBody>
@@ -11333,16 +11333,16 @@
                           <a:solidFill>
                             <a:srgbClr val="FF8550"/>
                           </a:solidFill>
-                          <a:latin typeface="Calibri" pitchFamily="34" charset="0"/>
-                          <a:ea typeface="Calibri" pitchFamily="34" charset="-122"/>
-                          <a:cs typeface="Calibri" pitchFamily="34" charset="-120"/>
+                          <a:latin typeface="Rajdhani" pitchFamily="34" charset="0"/>
+                          <a:ea typeface="Rajdhani" pitchFamily="34" charset="-122"/>
+                          <a:cs typeface="Rajdhani" pitchFamily="34" charset="-120"/>
                         </a:rPr>
                         <a:t>signal · label</a:t>
                       </a:r>
                       <a:endParaRPr lang="en-US" sz="1300" dirty="0">
-                        <a:latin typeface="Calibri" charset="0"/>
-                        <a:ea typeface="Calibri" charset="0"/>
-                        <a:cs typeface="Calibri" charset="0"/>
+                        <a:latin typeface="Rajdhani" charset="0"/>
+                        <a:ea typeface="Rajdhani" charset="0"/>
+                        <a:cs typeface="Rajdhani" charset="0"/>
                       </a:endParaRPr>
                     </a:p>
                   </a:txBody>
@@ -11401,16 +11401,16 @@
                           <a:solidFill>
                             <a:srgbClr val="3CD68C"/>
                           </a:solidFill>
-                          <a:latin typeface="Calibri" pitchFamily="34" charset="0"/>
-                          <a:ea typeface="Calibri" pitchFamily="34" charset="-122"/>
-                          <a:cs typeface="Calibri" pitchFamily="34" charset="-120"/>
+                          <a:latin typeface="Rajdhani" pitchFamily="34" charset="0"/>
+                          <a:ea typeface="Rajdhani" pitchFamily="34" charset="-122"/>
+                          <a:cs typeface="Rajdhani" pitchFamily="34" charset="-120"/>
                         </a:rPr>
                         <a:t>ok ≥</a:t>
                       </a:r>
                       <a:endParaRPr lang="en-US" sz="1300" dirty="0">
-                        <a:latin typeface="Calibri" charset="0"/>
-                        <a:ea typeface="Calibri" charset="0"/>
-                        <a:cs typeface="Calibri" charset="0"/>
+                        <a:latin typeface="Rajdhani" charset="0"/>
+                        <a:ea typeface="Rajdhani" charset="0"/>
+                        <a:cs typeface="Rajdhani" charset="0"/>
                       </a:endParaRPr>
                     </a:p>
                   </a:txBody>
@@ -11469,16 +11469,16 @@
                           <a:solidFill>
                             <a:srgbClr val="FFB300"/>
                           </a:solidFill>
-                          <a:latin typeface="Calibri" pitchFamily="34" charset="0"/>
-                          <a:ea typeface="Calibri" pitchFamily="34" charset="-122"/>
-                          <a:cs typeface="Calibri" pitchFamily="34" charset="-120"/>
+                          <a:latin typeface="Rajdhani" pitchFamily="34" charset="0"/>
+                          <a:ea typeface="Rajdhani" pitchFamily="34" charset="-122"/>
+                          <a:cs typeface="Rajdhani" pitchFamily="34" charset="-120"/>
                         </a:rPr>
                         <a:t>warn ≥</a:t>
                       </a:r>
                       <a:endParaRPr lang="en-US" sz="1300" dirty="0">
-                        <a:latin typeface="Calibri" charset="0"/>
-                        <a:ea typeface="Calibri" charset="0"/>
-                        <a:cs typeface="Calibri" charset="0"/>
+                        <a:latin typeface="Rajdhani" charset="0"/>
+                        <a:ea typeface="Rajdhani" charset="0"/>
+                        <a:cs typeface="Rajdhani" charset="0"/>
                       </a:endParaRPr>
                     </a:p>
                   </a:txBody>
@@ -11539,16 +11539,16 @@
                           <a:solidFill>
                             <a:srgbClr val="CACACE"/>
                           </a:solidFill>
-                          <a:latin typeface="Calibri" pitchFamily="34" charset="0"/>
-                          <a:ea typeface="Calibri" pitchFamily="34" charset="-122"/>
-                          <a:cs typeface="Calibri" pitchFamily="34" charset="-120"/>
+                          <a:latin typeface="Rajdhani" pitchFamily="34" charset="0"/>
+                          <a:ea typeface="Rajdhani" pitchFamily="34" charset="-122"/>
+                          <a:cs typeface="Rajdhani" pitchFamily="34" charset="-120"/>
                         </a:rPr>
                         <a:t>author</a:t>
                       </a:r>
                       <a:endParaRPr lang="en-US" sz="1300" dirty="0">
-                        <a:latin typeface="Calibri" charset="0"/>
-                        <a:ea typeface="Calibri" charset="0"/>
-                        <a:cs typeface="Calibri" charset="0"/>
+                        <a:latin typeface="Rajdhani" charset="0"/>
+                        <a:ea typeface="Rajdhani" charset="0"/>
+                        <a:cs typeface="Rajdhani" charset="0"/>
                       </a:endParaRPr>
                     </a:p>
                   </a:txBody>
@@ -11607,16 +11607,16 @@
                           <a:solidFill>
                             <a:srgbClr val="CACACE"/>
                           </a:solidFill>
-                          <a:latin typeface="Consolas" pitchFamily="34" charset="0"/>
-                          <a:ea typeface="Consolas" pitchFamily="34" charset="-122"/>
-                          <a:cs typeface="Consolas" pitchFamily="34" charset="-120"/>
+                          <a:latin typeface="JetBrains Mono" pitchFamily="34" charset="0"/>
+                          <a:ea typeface="JetBrains Mono" pitchFamily="34" charset="-122"/>
+                          <a:cs typeface="JetBrains Mono" pitchFamily="34" charset="-120"/>
                         </a:rPr>
                         <a:t>landRate · Landed</a:t>
                       </a:r>
                       <a:endParaRPr lang="en-US" sz="1300" dirty="0">
-                        <a:latin typeface="Consolas" charset="0"/>
-                        <a:ea typeface="Consolas" charset="0"/>
-                        <a:cs typeface="Consolas" charset="0"/>
+                        <a:latin typeface="JetBrains Mono" charset="0"/>
+                        <a:ea typeface="JetBrains Mono" charset="0"/>
+                        <a:cs typeface="JetBrains Mono" charset="0"/>
                       </a:endParaRPr>
                     </a:p>
                   </a:txBody>
@@ -11675,16 +11675,16 @@
                           <a:solidFill>
                             <a:srgbClr val="3CD68C"/>
                           </a:solidFill>
-                          <a:latin typeface="Calibri" pitchFamily="34" charset="0"/>
-                          <a:ea typeface="Calibri" pitchFamily="34" charset="-122"/>
-                          <a:cs typeface="Calibri" pitchFamily="34" charset="-120"/>
+                          <a:latin typeface="Rajdhani" pitchFamily="34" charset="0"/>
+                          <a:ea typeface="Rajdhani" pitchFamily="34" charset="-122"/>
+                          <a:cs typeface="Rajdhani" pitchFamily="34" charset="-120"/>
                         </a:rPr>
                         <a:t>80</a:t>
                       </a:r>
                       <a:endParaRPr lang="en-US" sz="1300" dirty="0">
-                        <a:latin typeface="Calibri" charset="0"/>
-                        <a:ea typeface="Calibri" charset="0"/>
-                        <a:cs typeface="Calibri" charset="0"/>
+                        <a:latin typeface="Rajdhani" charset="0"/>
+                        <a:ea typeface="Rajdhani" charset="0"/>
+                        <a:cs typeface="Rajdhani" charset="0"/>
                       </a:endParaRPr>
                     </a:p>
                   </a:txBody>
@@ -11743,16 +11743,16 @@
                           <a:solidFill>
                             <a:srgbClr val="FFB300"/>
                           </a:solidFill>
-                          <a:latin typeface="Calibri" pitchFamily="34" charset="0"/>
-                          <a:ea typeface="Calibri" pitchFamily="34" charset="-122"/>
-                          <a:cs typeface="Calibri" pitchFamily="34" charset="-120"/>
+                          <a:latin typeface="Rajdhani" pitchFamily="34" charset="0"/>
+                          <a:ea typeface="Rajdhani" pitchFamily="34" charset="-122"/>
+                          <a:cs typeface="Rajdhani" pitchFamily="34" charset="-120"/>
                         </a:rPr>
                         <a:t>50</a:t>
                       </a:r>
                       <a:endParaRPr lang="en-US" sz="1300" dirty="0">
-                        <a:latin typeface="Calibri" charset="0"/>
-                        <a:ea typeface="Calibri" charset="0"/>
-                        <a:cs typeface="Calibri" charset="0"/>
+                        <a:latin typeface="Rajdhani" charset="0"/>
+                        <a:ea typeface="Rajdhani" charset="0"/>
+                        <a:cs typeface="Rajdhani" charset="0"/>
                       </a:endParaRPr>
                     </a:p>
                   </a:txBody>
@@ -11813,16 +11813,16 @@
                           <a:solidFill>
                             <a:srgbClr val="CACACE"/>
                           </a:solidFill>
-                          <a:latin typeface="Calibri" pitchFamily="34" charset="0"/>
-                          <a:ea typeface="Calibri" pitchFamily="34" charset="-122"/>
-                          <a:cs typeface="Calibri" pitchFamily="34" charset="-120"/>
+                          <a:latin typeface="Rajdhani" pitchFamily="34" charset="0"/>
+                          <a:ea typeface="Rajdhani" pitchFamily="34" charset="-122"/>
+                          <a:cs typeface="Rajdhani" pitchFamily="34" charset="-120"/>
                         </a:rPr>
                         <a:t>gate</a:t>
                       </a:r>
                       <a:endParaRPr lang="en-US" sz="1300" dirty="0">
-                        <a:latin typeface="Calibri" charset="0"/>
-                        <a:ea typeface="Calibri" charset="0"/>
-                        <a:cs typeface="Calibri" charset="0"/>
+                        <a:latin typeface="Rajdhani" charset="0"/>
+                        <a:ea typeface="Rajdhani" charset="0"/>
+                        <a:cs typeface="Rajdhani" charset="0"/>
                       </a:endParaRPr>
                     </a:p>
                   </a:txBody>
@@ -11881,16 +11881,16 @@
                           <a:solidFill>
                             <a:srgbClr val="CACACE"/>
                           </a:solidFill>
-                          <a:latin typeface="Consolas" pitchFamily="34" charset="0"/>
-                          <a:ea typeface="Consolas" pitchFamily="34" charset="-122"/>
-                          <a:cs typeface="Consolas" pitchFamily="34" charset="-120"/>
+                          <a:latin typeface="JetBrains Mono" pitchFamily="34" charset="0"/>
+                          <a:ea typeface="JetBrains Mono" pitchFamily="34" charset="-122"/>
+                          <a:cs typeface="JetBrains Mono" pitchFamily="34" charset="-120"/>
                         </a:rPr>
                         <a:t>gateRight · Gate right</a:t>
                       </a:r>
                       <a:endParaRPr lang="en-US" sz="1300" dirty="0">
-                        <a:latin typeface="Consolas" charset="0"/>
-                        <a:ea typeface="Consolas" charset="0"/>
-                        <a:cs typeface="Consolas" charset="0"/>
+                        <a:latin typeface="JetBrains Mono" charset="0"/>
+                        <a:ea typeface="JetBrains Mono" charset="0"/>
+                        <a:cs typeface="JetBrains Mono" charset="0"/>
                       </a:endParaRPr>
                     </a:p>
                   </a:txBody>
@@ -11949,16 +11949,16 @@
                           <a:solidFill>
                             <a:srgbClr val="3CD68C"/>
                           </a:solidFill>
-                          <a:latin typeface="Calibri" pitchFamily="34" charset="0"/>
-                          <a:ea typeface="Calibri" pitchFamily="34" charset="-122"/>
-                          <a:cs typeface="Calibri" pitchFamily="34" charset="-120"/>
+                          <a:latin typeface="Rajdhani" pitchFamily="34" charset="0"/>
+                          <a:ea typeface="Rajdhani" pitchFamily="34" charset="-122"/>
+                          <a:cs typeface="Rajdhani" pitchFamily="34" charset="-120"/>
                         </a:rPr>
                         <a:t>90</a:t>
                       </a:r>
                       <a:endParaRPr lang="en-US" sz="1300" dirty="0">
-                        <a:latin typeface="Calibri" charset="0"/>
-                        <a:ea typeface="Calibri" charset="0"/>
-                        <a:cs typeface="Calibri" charset="0"/>
+                        <a:latin typeface="Rajdhani" charset="0"/>
+                        <a:ea typeface="Rajdhani" charset="0"/>
+                        <a:cs typeface="Rajdhani" charset="0"/>
                       </a:endParaRPr>
                     </a:p>
                   </a:txBody>
@@ -12017,16 +12017,16 @@
                           <a:solidFill>
                             <a:srgbClr val="FFB300"/>
                           </a:solidFill>
-                          <a:latin typeface="Calibri" pitchFamily="34" charset="0"/>
-                          <a:ea typeface="Calibri" pitchFamily="34" charset="-122"/>
-                          <a:cs typeface="Calibri" pitchFamily="34" charset="-120"/>
+                          <a:latin typeface="Rajdhani" pitchFamily="34" charset="0"/>
+                          <a:ea typeface="Rajdhani" pitchFamily="34" charset="-122"/>
+                          <a:cs typeface="Rajdhani" pitchFamily="34" charset="-120"/>
                         </a:rPr>
                         <a:t>70</a:t>
                       </a:r>
                       <a:endParaRPr lang="en-US" sz="1300" dirty="0">
-                        <a:latin typeface="Calibri" charset="0"/>
-                        <a:ea typeface="Calibri" charset="0"/>
-                        <a:cs typeface="Calibri" charset="0"/>
+                        <a:latin typeface="Rajdhani" charset="0"/>
+                        <a:ea typeface="Rajdhani" charset="0"/>
+                        <a:cs typeface="Rajdhani" charset="0"/>
                       </a:endParaRPr>
                     </a:p>
                   </a:txBody>
@@ -12087,16 +12087,16 @@
                           <a:solidFill>
                             <a:srgbClr val="CACACE"/>
                           </a:solidFill>
-                          <a:latin typeface="Calibri" pitchFamily="34" charset="0"/>
-                          <a:ea typeface="Calibri" pitchFamily="34" charset="-122"/>
-                          <a:cs typeface="Calibri" pitchFamily="34" charset="-120"/>
+                          <a:latin typeface="Rajdhani" pitchFamily="34" charset="0"/>
+                          <a:ea typeface="Rajdhani" pitchFamily="34" charset="-122"/>
+                          <a:cs typeface="Rajdhani" pitchFamily="34" charset="-120"/>
                         </a:rPr>
                         <a:t>planner</a:t>
                       </a:r>
                       <a:endParaRPr lang="en-US" sz="1300" dirty="0">
-                        <a:latin typeface="Calibri" charset="0"/>
-                        <a:ea typeface="Calibri" charset="0"/>
-                        <a:cs typeface="Calibri" charset="0"/>
+                        <a:latin typeface="Rajdhani" charset="0"/>
+                        <a:ea typeface="Rajdhani" charset="0"/>
+                        <a:cs typeface="Rajdhani" charset="0"/>
                       </a:endParaRPr>
                     </a:p>
                   </a:txBody>
@@ -12155,16 +12155,16 @@
                           <a:solidFill>
                             <a:srgbClr val="CACACE"/>
                           </a:solidFill>
-                          <a:latin typeface="Consolas" pitchFamily="34" charset="0"/>
-                          <a:ea typeface="Consolas" pitchFamily="34" charset="-122"/>
-                          <a:cs typeface="Consolas" pitchFamily="34" charset="-120"/>
+                          <a:latin typeface="JetBrains Mono" pitchFamily="34" charset="0"/>
+                          <a:ea typeface="JetBrains Mono" pitchFamily="34" charset="-122"/>
+                          <a:cs typeface="JetBrains Mono" pitchFamily="34" charset="-120"/>
                         </a:rPr>
                         <a:t>planLandRate · Plans landed</a:t>
                       </a:r>
                       <a:endParaRPr lang="en-US" sz="1300" dirty="0">
-                        <a:latin typeface="Consolas" charset="0"/>
-                        <a:ea typeface="Consolas" charset="0"/>
-                        <a:cs typeface="Consolas" charset="0"/>
+                        <a:latin typeface="JetBrains Mono" charset="0"/>
+                        <a:ea typeface="JetBrains Mono" charset="0"/>
+                        <a:cs typeface="JetBrains Mono" charset="0"/>
                       </a:endParaRPr>
                     </a:p>
                   </a:txBody>
@@ -12223,16 +12223,16 @@
                           <a:solidFill>
                             <a:srgbClr val="3CD68C"/>
                           </a:solidFill>
-                          <a:latin typeface="Calibri" pitchFamily="34" charset="0"/>
-                          <a:ea typeface="Calibri" pitchFamily="34" charset="-122"/>
-                          <a:cs typeface="Calibri" pitchFamily="34" charset="-120"/>
+                          <a:latin typeface="Rajdhani" pitchFamily="34" charset="0"/>
+                          <a:ea typeface="Rajdhani" pitchFamily="34" charset="-122"/>
+                          <a:cs typeface="Rajdhani" pitchFamily="34" charset="-120"/>
                         </a:rPr>
                         <a:t>80</a:t>
                       </a:r>
                       <a:endParaRPr lang="en-US" sz="1300" dirty="0">
-                        <a:latin typeface="Calibri" charset="0"/>
-                        <a:ea typeface="Calibri" charset="0"/>
-                        <a:cs typeface="Calibri" charset="0"/>
+                        <a:latin typeface="Rajdhani" charset="0"/>
+                        <a:ea typeface="Rajdhani" charset="0"/>
+                        <a:cs typeface="Rajdhani" charset="0"/>
                       </a:endParaRPr>
                     </a:p>
                   </a:txBody>
@@ -12291,16 +12291,16 @@
                           <a:solidFill>
                             <a:srgbClr val="FFB300"/>
                           </a:solidFill>
-                          <a:latin typeface="Calibri" pitchFamily="34" charset="0"/>
-                          <a:ea typeface="Calibri" pitchFamily="34" charset="-122"/>
-                          <a:cs typeface="Calibri" pitchFamily="34" charset="-120"/>
+                          <a:latin typeface="Rajdhani" pitchFamily="34" charset="0"/>
+                          <a:ea typeface="Rajdhani" pitchFamily="34" charset="-122"/>
+                          <a:cs typeface="Rajdhani" pitchFamily="34" charset="-120"/>
                         </a:rPr>
                         <a:t>50</a:t>
                       </a:r>
                       <a:endParaRPr lang="en-US" sz="1300" dirty="0">
-                        <a:latin typeface="Calibri" charset="0"/>
-                        <a:ea typeface="Calibri" charset="0"/>
-                        <a:cs typeface="Calibri" charset="0"/>
+                        <a:latin typeface="Rajdhani" charset="0"/>
+                        <a:ea typeface="Rajdhani" charset="0"/>
+                        <a:cs typeface="Rajdhani" charset="0"/>
                       </a:endParaRPr>
                     </a:p>
                   </a:txBody>
@@ -12361,16 +12361,16 @@
                           <a:solidFill>
                             <a:srgbClr val="CACACE"/>
                           </a:solidFill>
-                          <a:latin typeface="Calibri" pitchFamily="34" charset="0"/>
-                          <a:ea typeface="Calibri" pitchFamily="34" charset="-122"/>
-                          <a:cs typeface="Calibri" pitchFamily="34" charset="-120"/>
+                          <a:latin typeface="Rajdhani" pitchFamily="34" charset="0"/>
+                          <a:ea typeface="Rajdhani" pitchFamily="34" charset="-122"/>
+                          <a:cs typeface="Rajdhani" pitchFamily="34" charset="-120"/>
                         </a:rPr>
                         <a:t>steward</a:t>
                       </a:r>
                       <a:endParaRPr lang="en-US" sz="1300" dirty="0">
-                        <a:latin typeface="Calibri" charset="0"/>
-                        <a:ea typeface="Calibri" charset="0"/>
-                        <a:cs typeface="Calibri" charset="0"/>
+                        <a:latin typeface="Rajdhani" charset="0"/>
+                        <a:ea typeface="Rajdhani" charset="0"/>
+                        <a:cs typeface="Rajdhani" charset="0"/>
                       </a:endParaRPr>
                     </a:p>
                   </a:txBody>
@@ -12429,16 +12429,16 @@
                           <a:solidFill>
                             <a:srgbClr val="CACACE"/>
                           </a:solidFill>
-                          <a:latin typeface="Consolas" pitchFamily="34" charset="0"/>
-                          <a:ea typeface="Consolas" pitchFamily="34" charset="-122"/>
-                          <a:cs typeface="Consolas" pitchFamily="34" charset="-120"/>
+                          <a:latin typeface="JetBrains Mono" pitchFamily="34" charset="0"/>
+                          <a:ea typeface="JetBrains Mono" pitchFamily="34" charset="-122"/>
+                          <a:cs typeface="JetBrains Mono" pitchFamily="34" charset="-120"/>
                         </a:rPr>
                         <a:t>verifyGreenRate · Verify green</a:t>
                       </a:r>
                       <a:endParaRPr lang="en-US" sz="1300" dirty="0">
-                        <a:latin typeface="Consolas" charset="0"/>
-                        <a:ea typeface="Consolas" charset="0"/>
-                        <a:cs typeface="Consolas" charset="0"/>
+                        <a:latin typeface="JetBrains Mono" charset="0"/>
+                        <a:ea typeface="JetBrains Mono" charset="0"/>
+                        <a:cs typeface="JetBrains Mono" charset="0"/>
                       </a:endParaRPr>
                     </a:p>
                   </a:txBody>
@@ -12497,16 +12497,16 @@
                           <a:solidFill>
                             <a:srgbClr val="3CD68C"/>
                           </a:solidFill>
-                          <a:latin typeface="Calibri" pitchFamily="34" charset="0"/>
-                          <a:ea typeface="Calibri" pitchFamily="34" charset="-122"/>
-                          <a:cs typeface="Calibri" pitchFamily="34" charset="-120"/>
+                          <a:latin typeface="Rajdhani" pitchFamily="34" charset="0"/>
+                          <a:ea typeface="Rajdhani" pitchFamily="34" charset="-122"/>
+                          <a:cs typeface="Rajdhani" pitchFamily="34" charset="-120"/>
                         </a:rPr>
                         <a:t>90</a:t>
                       </a:r>
                       <a:endParaRPr lang="en-US" sz="1300" dirty="0">
-                        <a:latin typeface="Calibri" charset="0"/>
-                        <a:ea typeface="Calibri" charset="0"/>
-                        <a:cs typeface="Calibri" charset="0"/>
+                        <a:latin typeface="Rajdhani" charset="0"/>
+                        <a:ea typeface="Rajdhani" charset="0"/>
+                        <a:cs typeface="Rajdhani" charset="0"/>
                       </a:endParaRPr>
                     </a:p>
                   </a:txBody>
@@ -12565,16 +12565,16 @@
                           <a:solidFill>
                             <a:srgbClr val="FFB300"/>
                           </a:solidFill>
-                          <a:latin typeface="Calibri" pitchFamily="34" charset="0"/>
-                          <a:ea typeface="Calibri" pitchFamily="34" charset="-122"/>
-                          <a:cs typeface="Calibri" pitchFamily="34" charset="-120"/>
+                          <a:latin typeface="Rajdhani" pitchFamily="34" charset="0"/>
+                          <a:ea typeface="Rajdhani" pitchFamily="34" charset="-122"/>
+                          <a:cs typeface="Rajdhani" pitchFamily="34" charset="-120"/>
                         </a:rPr>
                         <a:t>70</a:t>
                       </a:r>
                       <a:endParaRPr lang="en-US" sz="1300" dirty="0">
-                        <a:latin typeface="Calibri" charset="0"/>
-                        <a:ea typeface="Calibri" charset="0"/>
-                        <a:cs typeface="Calibri" charset="0"/>
+                        <a:latin typeface="Rajdhani" charset="0"/>
+                        <a:ea typeface="Rajdhani" charset="0"/>
+                        <a:cs typeface="Rajdhani" charset="0"/>
                       </a:endParaRPr>
                     </a:p>
                   </a:txBody>
@@ -12635,16 +12635,16 @@
                           <a:solidFill>
                             <a:srgbClr val="CACACE"/>
                           </a:solidFill>
-                          <a:latin typeface="Calibri" pitchFamily="34" charset="0"/>
-                          <a:ea typeface="Calibri" pitchFamily="34" charset="-122"/>
-                          <a:cs typeface="Calibri" pitchFamily="34" charset="-120"/>
+                          <a:latin typeface="Rajdhani" pitchFamily="34" charset="0"/>
+                          <a:ea typeface="Rajdhani" pitchFamily="34" charset="-122"/>
+                          <a:cs typeface="Rajdhani" pitchFamily="34" charset="-120"/>
                         </a:rPr>
                         <a:t>auditor</a:t>
                       </a:r>
                       <a:endParaRPr lang="en-US" sz="1300" dirty="0">
-                        <a:latin typeface="Calibri" charset="0"/>
-                        <a:ea typeface="Calibri" charset="0"/>
-                        <a:cs typeface="Calibri" charset="0"/>
+                        <a:latin typeface="Rajdhani" charset="0"/>
+                        <a:ea typeface="Rajdhani" charset="0"/>
+                        <a:cs typeface="Rajdhani" charset="0"/>
                       </a:endParaRPr>
                     </a:p>
                   </a:txBody>
@@ -12703,16 +12703,16 @@
                           <a:solidFill>
                             <a:srgbClr val="CACACE"/>
                           </a:solidFill>
-                          <a:latin typeface="Consolas" pitchFamily="34" charset="0"/>
-                          <a:ea typeface="Consolas" pitchFamily="34" charset="-122"/>
-                          <a:cs typeface="Consolas" pitchFamily="34" charset="-120"/>
+                          <a:latin typeface="JetBrains Mono" pitchFamily="34" charset="0"/>
+                          <a:ea typeface="JetBrains Mono" pitchFamily="34" charset="-122"/>
+                          <a:cs typeface="JetBrains Mono" pitchFamily="34" charset="-120"/>
                         </a:rPr>
                         <a:t>upheldRate · Upheld</a:t>
                       </a:r>
                       <a:endParaRPr lang="en-US" sz="1300" dirty="0">
-                        <a:latin typeface="Consolas" charset="0"/>
-                        <a:ea typeface="Consolas" charset="0"/>
-                        <a:cs typeface="Consolas" charset="0"/>
+                        <a:latin typeface="JetBrains Mono" charset="0"/>
+                        <a:ea typeface="JetBrains Mono" charset="0"/>
+                        <a:cs typeface="JetBrains Mono" charset="0"/>
                       </a:endParaRPr>
                     </a:p>
                   </a:txBody>
@@ -12771,16 +12771,16 @@
                           <a:solidFill>
                             <a:srgbClr val="3CD68C"/>
                           </a:solidFill>
-                          <a:latin typeface="Calibri" pitchFamily="34" charset="0"/>
-                          <a:ea typeface="Calibri" pitchFamily="34" charset="-122"/>
-                          <a:cs typeface="Calibri" pitchFamily="34" charset="-120"/>
+                          <a:latin typeface="Rajdhani" pitchFamily="34" charset="0"/>
+                          <a:ea typeface="Rajdhani" pitchFamily="34" charset="-122"/>
+                          <a:cs typeface="Rajdhani" pitchFamily="34" charset="-120"/>
                         </a:rPr>
                         <a:t>80</a:t>
                       </a:r>
                       <a:endParaRPr lang="en-US" sz="1300" dirty="0">
-                        <a:latin typeface="Calibri" charset="0"/>
-                        <a:ea typeface="Calibri" charset="0"/>
-                        <a:cs typeface="Calibri" charset="0"/>
+                        <a:latin typeface="Rajdhani" charset="0"/>
+                        <a:ea typeface="Rajdhani" charset="0"/>
+                        <a:cs typeface="Rajdhani" charset="0"/>
                       </a:endParaRPr>
                     </a:p>
                   </a:txBody>
@@ -12839,16 +12839,16 @@
                           <a:solidFill>
                             <a:srgbClr val="FFB300"/>
                           </a:solidFill>
-                          <a:latin typeface="Calibri" pitchFamily="34" charset="0"/>
-                          <a:ea typeface="Calibri" pitchFamily="34" charset="-122"/>
-                          <a:cs typeface="Calibri" pitchFamily="34" charset="-120"/>
+                          <a:latin typeface="Rajdhani" pitchFamily="34" charset="0"/>
+                          <a:ea typeface="Rajdhani" pitchFamily="34" charset="-122"/>
+                          <a:cs typeface="Rajdhani" pitchFamily="34" charset="-120"/>
                         </a:rPr>
                         <a:t>50</a:t>
                       </a:r>
                       <a:endParaRPr lang="en-US" sz="1300" dirty="0">
-                        <a:latin typeface="Calibri" charset="0"/>
-                        <a:ea typeface="Calibri" charset="0"/>
-                        <a:cs typeface="Calibri" charset="0"/>
+                        <a:latin typeface="Rajdhani" charset="0"/>
+                        <a:ea typeface="Rajdhani" charset="0"/>
+                        <a:cs typeface="Rajdhani" charset="0"/>
                       </a:endParaRPr>
                     </a:p>
                   </a:txBody>
@@ -12909,16 +12909,16 @@
                           <a:solidFill>
                             <a:srgbClr val="CACACE"/>
                           </a:solidFill>
-                          <a:latin typeface="Calibri" pitchFamily="34" charset="0"/>
-                          <a:ea typeface="Calibri" pitchFamily="34" charset="-122"/>
-                          <a:cs typeface="Calibri" pitchFamily="34" charset="-120"/>
+                          <a:latin typeface="Rajdhani" pitchFamily="34" charset="0"/>
+                          <a:ea typeface="Rajdhani" pitchFamily="34" charset="-122"/>
+                          <a:cs typeface="Rajdhani" pitchFamily="34" charset="-120"/>
                         </a:rPr>
                         <a:t>root</a:t>
                       </a:r>
                       <a:endParaRPr lang="en-US" sz="1300" dirty="0">
-                        <a:latin typeface="Calibri" charset="0"/>
-                        <a:ea typeface="Calibri" charset="0"/>
-                        <a:cs typeface="Calibri" charset="0"/>
+                        <a:latin typeface="Rajdhani" charset="0"/>
+                        <a:ea typeface="Rajdhani" charset="0"/>
+                        <a:cs typeface="Rajdhani" charset="0"/>
                       </a:endParaRPr>
                     </a:p>
                   </a:txBody>
@@ -12977,16 +12977,16 @@
                           <a:solidFill>
                             <a:srgbClr val="CACACE"/>
                           </a:solidFill>
-                          <a:latin typeface="Consolas" pitchFamily="34" charset="0"/>
-                          <a:ea typeface="Consolas" pitchFamily="34" charset="-122"/>
-                          <a:cs typeface="Consolas" pitchFamily="34" charset="-120"/>
+                          <a:latin typeface="JetBrains Mono" pitchFamily="34" charset="0"/>
+                          <a:ea typeface="JetBrains Mono" pitchFamily="34" charset="-122"/>
+                          <a:cs typeface="JetBrains Mono" pitchFamily="34" charset="-120"/>
                         </a:rPr>
                         <a:t>askDoneRate · Asks done</a:t>
                       </a:r>
                       <a:endParaRPr lang="en-US" sz="1300" dirty="0">
-                        <a:latin typeface="Consolas" charset="0"/>
-                        <a:ea typeface="Consolas" charset="0"/>
-                        <a:cs typeface="Consolas" charset="0"/>
+                        <a:latin typeface="JetBrains Mono" charset="0"/>
+                        <a:ea typeface="JetBrains Mono" charset="0"/>
+                        <a:cs typeface="JetBrains Mono" charset="0"/>
                       </a:endParaRPr>
                     </a:p>
                   </a:txBody>
@@ -13045,16 +13045,16 @@
                           <a:solidFill>
                             <a:srgbClr val="3CD68C"/>
                           </a:solidFill>
-                          <a:latin typeface="Calibri" pitchFamily="34" charset="0"/>
-                          <a:ea typeface="Calibri" pitchFamily="34" charset="-122"/>
-                          <a:cs typeface="Calibri" pitchFamily="34" charset="-120"/>
+                          <a:latin typeface="Rajdhani" pitchFamily="34" charset="0"/>
+                          <a:ea typeface="Rajdhani" pitchFamily="34" charset="-122"/>
+                          <a:cs typeface="Rajdhani" pitchFamily="34" charset="-120"/>
                         </a:rPr>
                         <a:t>80</a:t>
                       </a:r>
                       <a:endParaRPr lang="en-US" sz="1300" dirty="0">
-                        <a:latin typeface="Calibri" charset="0"/>
-                        <a:ea typeface="Calibri" charset="0"/>
-                        <a:cs typeface="Calibri" charset="0"/>
+                        <a:latin typeface="Rajdhani" charset="0"/>
+                        <a:ea typeface="Rajdhani" charset="0"/>
+                        <a:cs typeface="Rajdhani" charset="0"/>
                       </a:endParaRPr>
                     </a:p>
                   </a:txBody>
@@ -13113,16 +13113,16 @@
                           <a:solidFill>
                             <a:srgbClr val="FFB300"/>
                           </a:solidFill>
-                          <a:latin typeface="Calibri" pitchFamily="34" charset="0"/>
-                          <a:ea typeface="Calibri" pitchFamily="34" charset="-122"/>
-                          <a:cs typeface="Calibri" pitchFamily="34" charset="-120"/>
+                          <a:latin typeface="Rajdhani" pitchFamily="34" charset="0"/>
+                          <a:ea typeface="Rajdhani" pitchFamily="34" charset="-122"/>
+                          <a:cs typeface="Rajdhani" pitchFamily="34" charset="-120"/>
                         </a:rPr>
                         <a:t>50</a:t>
                       </a:r>
                       <a:endParaRPr lang="en-US" sz="1300" dirty="0">
-                        <a:latin typeface="Calibri" charset="0"/>
-                        <a:ea typeface="Calibri" charset="0"/>
-                        <a:cs typeface="Calibri" charset="0"/>
+                        <a:latin typeface="Rajdhani" charset="0"/>
+                        <a:ea typeface="Rajdhani" charset="0"/>
+                        <a:cs typeface="Rajdhani" charset="0"/>
                       </a:endParaRPr>
                     </a:p>
                   </a:txBody>
@@ -13183,16 +13183,16 @@
                           <a:solidFill>
                             <a:srgbClr val="CACACE"/>
                           </a:solidFill>
-                          <a:latin typeface="Calibri" pitchFamily="34" charset="0"/>
-                          <a:ea typeface="Calibri" pitchFamily="34" charset="-122"/>
-                          <a:cs typeface="Calibri" pitchFamily="34" charset="-120"/>
+                          <a:latin typeface="Rajdhani" pitchFamily="34" charset="0"/>
+                          <a:ea typeface="Rajdhani" pitchFamily="34" charset="-122"/>
+                          <a:cs typeface="Rajdhani" pitchFamily="34" charset="-120"/>
                         </a:rPr>
                         <a:t>score</a:t>
                       </a:r>
                       <a:endParaRPr lang="en-US" sz="1300" dirty="0">
-                        <a:latin typeface="Calibri" charset="0"/>
-                        <a:ea typeface="Calibri" charset="0"/>
-                        <a:cs typeface="Calibri" charset="0"/>
+                        <a:latin typeface="Rajdhani" charset="0"/>
+                        <a:ea typeface="Rajdhani" charset="0"/>
+                        <a:cs typeface="Rajdhani" charset="0"/>
                       </a:endParaRPr>
                     </a:p>
                   </a:txBody>
@@ -13251,16 +13251,16 @@
                           <a:solidFill>
                             <a:srgbClr val="CACACE"/>
                           </a:solidFill>
-                          <a:latin typeface="Consolas" pitchFamily="34" charset="0"/>
-                          <a:ea typeface="Consolas" pitchFamily="34" charset="-122"/>
-                          <a:cs typeface="Consolas" pitchFamily="34" charset="-120"/>
+                          <a:latin typeface="JetBrains Mono" pitchFamily="34" charset="0"/>
+                          <a:ea typeface="JetBrains Mono" pitchFamily="34" charset="-122"/>
+                          <a:cs typeface="JetBrains Mono" pitchFamily="34" charset="-120"/>
                         </a:rPr>
                         <a:t>the score itself</a:t>
                       </a:r>
                       <a:endParaRPr lang="en-US" sz="1300" dirty="0">
-                        <a:latin typeface="Consolas" charset="0"/>
-                        <a:ea typeface="Consolas" charset="0"/>
-                        <a:cs typeface="Consolas" charset="0"/>
+                        <a:latin typeface="JetBrains Mono" charset="0"/>
+                        <a:ea typeface="JetBrains Mono" charset="0"/>
+                        <a:cs typeface="JetBrains Mono" charset="0"/>
                       </a:endParaRPr>
                     </a:p>
                   </a:txBody>
@@ -13319,16 +13319,16 @@
                           <a:solidFill>
                             <a:srgbClr val="3CD68C"/>
                           </a:solidFill>
-                          <a:latin typeface="Calibri" pitchFamily="34" charset="0"/>
-                          <a:ea typeface="Calibri" pitchFamily="34" charset="-122"/>
-                          <a:cs typeface="Calibri" pitchFamily="34" charset="-120"/>
+                          <a:latin typeface="Rajdhani" pitchFamily="34" charset="0"/>
+                          <a:ea typeface="Rajdhani" pitchFamily="34" charset="-122"/>
+                          <a:cs typeface="Rajdhani" pitchFamily="34" charset="-120"/>
                         </a:rPr>
                         <a:t>70</a:t>
                       </a:r>
                       <a:endParaRPr lang="en-US" sz="1300" dirty="0">
-                        <a:latin typeface="Calibri" charset="0"/>
-                        <a:ea typeface="Calibri" charset="0"/>
-                        <a:cs typeface="Calibri" charset="0"/>
+                        <a:latin typeface="Rajdhani" charset="0"/>
+                        <a:ea typeface="Rajdhani" charset="0"/>
+                        <a:cs typeface="Rajdhani" charset="0"/>
                       </a:endParaRPr>
                     </a:p>
                   </a:txBody>
@@ -13387,16 +13387,16 @@
                           <a:solidFill>
                             <a:srgbClr val="FFB300"/>
                           </a:solidFill>
-                          <a:latin typeface="Calibri" pitchFamily="34" charset="0"/>
-                          <a:ea typeface="Calibri" pitchFamily="34" charset="-122"/>
-                          <a:cs typeface="Calibri" pitchFamily="34" charset="-120"/>
+                          <a:latin typeface="Rajdhani" pitchFamily="34" charset="0"/>
+                          <a:ea typeface="Rajdhani" pitchFamily="34" charset="-122"/>
+                          <a:cs typeface="Rajdhani" pitchFamily="34" charset="-120"/>
                         </a:rPr>
                         <a:t>40</a:t>
                       </a:r>
                       <a:endParaRPr lang="en-US" sz="1300" dirty="0">
-                        <a:latin typeface="Calibri" charset="0"/>
-                        <a:ea typeface="Calibri" charset="0"/>
-                        <a:cs typeface="Calibri" charset="0"/>
+                        <a:latin typeface="Rajdhani" charset="0"/>
+                        <a:ea typeface="Rajdhani" charset="0"/>
+                        <a:cs typeface="Rajdhani" charset="0"/>
                       </a:endParaRPr>
                     </a:p>
                   </a:txBody>
@@ -13482,9 +13482,9 @@
                 <a:solidFill>
                   <a:srgbClr val="E8E8E8"/>
                 </a:solidFill>
-                <a:latin typeface="Consolas" pitchFamily="34" charset="0"/>
-                <a:ea typeface="Consolas" pitchFamily="34" charset="-122"/>
-                <a:cs typeface="Consolas" pitchFamily="34" charset="-120"/>
+                <a:latin typeface="JetBrains Mono" pitchFamily="34" charset="0"/>
+                <a:ea typeface="JetBrains Mono" pitchFamily="34" charset="-122"/>
+                <a:cs typeface="JetBrains Mono" pitchFamily="34" charset="-120"/>
               </a:rPr>
               <a:t>ranks:</a:t>
             </a:r>
@@ -13499,9 +13499,9 @@
                 <a:solidFill>
                   <a:srgbClr val="E8E8E8"/>
                 </a:solidFill>
-                <a:latin typeface="Consolas" pitchFamily="34" charset="0"/>
-                <a:ea typeface="Consolas" pitchFamily="34" charset="-122"/>
-                <a:cs typeface="Consolas" pitchFamily="34" charset="-120"/>
+                <a:latin typeface="JetBrains Mono" pitchFamily="34" charset="0"/>
+                <a:ea typeface="JetBrains Mono" pitchFamily="34" charset="-122"/>
+                <a:cs typeface="JetBrains Mono" pitchFamily="34" charset="-120"/>
               </a:rPr>
               <a:t>  slime:</a:t>
             </a:r>
@@ -13516,9 +13516,9 @@
                 <a:solidFill>
                   <a:srgbClr val="E8E8E8"/>
                 </a:solidFill>
-                <a:latin typeface="Consolas" pitchFamily="34" charset="0"/>
-                <a:ea typeface="Consolas" pitchFamily="34" charset="-122"/>
-                <a:cs typeface="Consolas" pitchFamily="34" charset="-120"/>
+                <a:latin typeface="JetBrains Mono" pitchFamily="34" charset="0"/>
+                <a:ea typeface="JetBrains Mono" pitchFamily="34" charset="-122"/>
+                <a:cs typeface="JetBrains Mono" pitchFamily="34" charset="-120"/>
               </a:rPr>
               <a:t>    value:</a:t>
             </a:r>
@@ -13533,9 +13533,9 @@
                 <a:solidFill>
                   <a:srgbClr val="E8E8E8"/>
                 </a:solidFill>
-                <a:latin typeface="Consolas" pitchFamily="34" charset="0"/>
-                <a:ea typeface="Consolas" pitchFamily="34" charset="-122"/>
-                <a:cs typeface="Consolas" pitchFamily="34" charset="-120"/>
+                <a:latin typeface="JetBrains Mono" pitchFamily="34" charset="0"/>
+                <a:ea typeface="JetBrains Mono" pitchFamily="34" charset="-122"/>
+                <a:cs typeface="JetBrains Mono" pitchFamily="34" charset="-120"/>
               </a:rPr>
               <a:t>      score: "0.5*landRate + 0.5*gateRate"</a:t>
             </a:r>
@@ -13550,9 +13550,9 @@
                 <a:solidFill>
                   <a:srgbClr val="E8E8E8"/>
                 </a:solidFill>
-                <a:latin typeface="Consolas" pitchFamily="34" charset="0"/>
-                <a:ea typeface="Consolas" pitchFamily="34" charset="-122"/>
-                <a:cs typeface="Consolas" pitchFamily="34" charset="-120"/>
+                <a:latin typeface="JetBrains Mono" pitchFamily="34" charset="0"/>
+                <a:ea typeface="JetBrains Mono" pitchFamily="34" charset="-122"/>
+                <a:cs typeface="JetBrains Mono" pitchFamily="34" charset="-120"/>
               </a:rPr>
               <a:t>      meter:</a:t>
             </a:r>
@@ -13567,9 +13567,9 @@
                 <a:solidFill>
                   <a:srgbClr val="E8E8E8"/>
                 </a:solidFill>
-                <a:latin typeface="Consolas" pitchFamily="34" charset="0"/>
-                <a:ea typeface="Consolas" pitchFamily="34" charset="-122"/>
-                <a:cs typeface="Consolas" pitchFamily="34" charset="-120"/>
+                <a:latin typeface="JetBrains Mono" pitchFamily="34" charset="0"/>
+                <a:ea typeface="JetBrains Mono" pitchFamily="34" charset="-122"/>
+                <a:cs typeface="JetBrains Mono" pitchFamily="34" charset="-120"/>
               </a:rPr>
               <a:t>        signal: gateRate</a:t>
             </a:r>
@@ -13584,9 +13584,9 @@
                 <a:solidFill>
                   <a:srgbClr val="E8E8E8"/>
                 </a:solidFill>
-                <a:latin typeface="Consolas" pitchFamily="34" charset="0"/>
-                <a:ea typeface="Consolas" pitchFamily="34" charset="-122"/>
-                <a:cs typeface="Consolas" pitchFamily="34" charset="-120"/>
+                <a:latin typeface="JetBrains Mono" pitchFamily="34" charset="0"/>
+                <a:ea typeface="JetBrains Mono" pitchFamily="34" charset="-122"/>
+                <a:cs typeface="JetBrains Mono" pitchFamily="34" charset="-120"/>
               </a:rPr>
               <a:t>        bands: { ok: 85, warn: 60 }</a:t>
             </a:r>
@@ -13607,9 +13607,9 @@
                 <a:solidFill>
                   <a:srgbClr val="E8E8E8"/>
                 </a:solidFill>
-                <a:latin typeface="Consolas" pitchFamily="34" charset="0"/>
-                <a:ea typeface="Consolas" pitchFamily="34" charset="-122"/>
-                <a:cs typeface="Consolas" pitchFamily="34" charset="-120"/>
+                <a:latin typeface="JetBrains Mono" pitchFamily="34" charset="0"/>
+                <a:ea typeface="JetBrains Mono" pitchFamily="34" charset="-122"/>
+                <a:cs typeface="JetBrains Mono" pitchFamily="34" charset="-120"/>
               </a:rPr>
               <a:t>ui:</a:t>
             </a:r>
@@ -13624,9 +13624,9 @@
                 <a:solidFill>
                   <a:srgbClr val="E8E8E8"/>
                 </a:solidFill>
-                <a:latin typeface="Consolas" pitchFamily="34" charset="0"/>
-                <a:ea typeface="Consolas" pitchFamily="34" charset="-122"/>
-                <a:cs typeface="Consolas" pitchFamily="34" charset="-120"/>
+                <a:latin typeface="JetBrains Mono" pitchFamily="34" charset="0"/>
+                <a:ea typeface="JetBrains Mono" pitchFamily="34" charset="-122"/>
+                <a:cs typeface="JetBrains Mono" pitchFamily="34" charset="-120"/>
               </a:rPr>
               <a:t>  meters:</a:t>
             </a:r>
@@ -13641,9 +13641,9 @@
                 <a:solidFill>
                   <a:srgbClr val="E8E8E8"/>
                 </a:solidFill>
-                <a:latin typeface="Consolas" pitchFamily="34" charset="0"/>
-                <a:ea typeface="Consolas" pitchFamily="34" charset="-122"/>
-                <a:cs typeface="Consolas" pitchFamily="34" charset="-120"/>
+                <a:latin typeface="JetBrains Mono" pitchFamily="34" charset="0"/>
+                <a:ea typeface="JetBrains Mono" pitchFamily="34" charset="-122"/>
+                <a:cs typeface="JetBrains Mono" pitchFamily="34" charset="-120"/>
               </a:rPr>
               <a:t>    score: { signal: score,</a:t>
             </a:r>
@@ -13658,9 +13658,9 @@
                 <a:solidFill>
                   <a:srgbClr val="E8E8E8"/>
                 </a:solidFill>
-                <a:latin typeface="Consolas" pitchFamily="34" charset="0"/>
-                <a:ea typeface="Consolas" pitchFamily="34" charset="-122"/>
-                <a:cs typeface="Consolas" pitchFamily="34" charset="-120"/>
+                <a:latin typeface="JetBrains Mono" pitchFamily="34" charset="0"/>
+                <a:ea typeface="JetBrains Mono" pitchFamily="34" charset="-122"/>
+                <a:cs typeface="JetBrains Mono" pitchFamily="34" charset="-120"/>
               </a:rPr>
               <a:t>             bands: { ok: 75, warn: 45 } }</a:t>
             </a:r>
@@ -13749,9 +13749,9 @@
                 <a:solidFill>
                   <a:srgbClr val="A3A3AD"/>
                 </a:solidFill>
-                <a:latin typeface="Calibri" pitchFamily="34" charset="0"/>
-                <a:ea typeface="Calibri" pitchFamily="34" charset="-122"/>
-                <a:cs typeface="Calibri" pitchFamily="34" charset="-120"/>
+                <a:latin typeface="Rajdhani" pitchFamily="34" charset="0"/>
+                <a:ea typeface="Rajdhani" pitchFamily="34" charset="-122"/>
+                <a:cs typeface="Rajdhani" pitchFamily="34" charset="-120"/>
               </a:rPr>
               <a:t>ISEKAI ⋄ STRESS AND VALUE</a:t>
             </a:r>
@@ -13788,9 +13788,9 @@
                 <a:solidFill>
                   <a:srgbClr val="A3A3AD"/>
                 </a:solidFill>
-                <a:latin typeface="Calibri" pitchFamily="34" charset="0"/>
-                <a:ea typeface="Calibri" pitchFamily="34" charset="-122"/>
-                <a:cs typeface="Calibri" pitchFamily="34" charset="-120"/>
+                <a:latin typeface="Rajdhani" pitchFamily="34" charset="0"/>
+                <a:ea typeface="Rajdhani" pitchFamily="34" charset="-122"/>
+                <a:cs typeface="Rajdhani" pitchFamily="34" charset="-120"/>
               </a:rPr>
               <a:t>8</a:t>
             </a:r>
@@ -13827,9 +13827,9 @@
                 <a:solidFill>
                   <a:srgbClr val="FF8550"/>
                 </a:solidFill>
-                <a:latin typeface="Calibri" pitchFamily="34" charset="0"/>
-                <a:ea typeface="Calibri" pitchFamily="34" charset="-122"/>
-                <a:cs typeface="Calibri" pitchFamily="34" charset="-120"/>
+                <a:latin typeface="Rajdhani" pitchFamily="34" charset="0"/>
+                <a:ea typeface="Rajdhani" pitchFamily="34" charset="-122"/>
+                <a:cs typeface="Rajdhani" pitchFamily="34" charset="-120"/>
               </a:rPr>
               <a:t>STRESS</a:t>
             </a:r>
@@ -13862,17 +13862,17 @@
               <a:buNone/>
             </a:pPr>
             <a:r>
-              <a:rPr lang="en-US" sz="2800" dirty="0">
+              <a:rPr lang="en-US" sz="2400" b="1" dirty="0">
                 <a:solidFill>
                   <a:srgbClr val="E8E8E8"/>
                 </a:solidFill>
-                <a:latin typeface="Arial Black" pitchFamily="34" charset="0"/>
-                <a:ea typeface="Arial Black" pitchFamily="34" charset="-122"/>
-                <a:cs typeface="Arial Black" pitchFamily="34" charset="-120"/>
+                <a:latin typeface="Orbitron" pitchFamily="34" charset="0"/>
+                <a:ea typeface="Orbitron" pitchFamily="34" charset="-122"/>
+                <a:cs typeface="Orbitron" pitchFamily="34" charset="-120"/>
               </a:rPr>
               <a:t>Strain: every run that never lands adds to it; a clean landing clears it</a:t>
             </a:r>
-            <a:endParaRPr lang="en-US" sz="2800" dirty="0"/>
+            <a:endParaRPr lang="en-US" sz="2400" dirty="0"/>
           </a:p>
         </p:txBody>
       </p:sp>
@@ -13962,17 +13962,17 @@
               <a:buNone/>
             </a:pPr>
             <a:r>
-              <a:rPr lang="en-US" sz="1600" b="1" dirty="0">
+              <a:rPr lang="en-US" sz="1800" b="1" dirty="0">
                 <a:solidFill>
                   <a:srgbClr val="FFB300"/>
                 </a:solidFill>
-                <a:latin typeface="Calibri" pitchFamily="34" charset="0"/>
-                <a:ea typeface="Calibri" pitchFamily="34" charset="-122"/>
-                <a:cs typeface="Calibri" pitchFamily="34" charset="-120"/>
+                <a:latin typeface="Rajdhani" pitchFamily="34" charset="0"/>
+                <a:ea typeface="Rajdhani" pitchFamily="34" charset="-122"/>
+                <a:cs typeface="Rajdhani" pitchFamily="34" charset="-120"/>
               </a:rPr>
               <a:t>adds</a:t>
             </a:r>
-            <a:endParaRPr lang="en-US" sz="1600" dirty="0"/>
+            <a:endParaRPr lang="en-US" sz="1800" dirty="0"/>
           </a:p>
         </p:txBody>
       </p:sp>
@@ -14004,17 +14004,17 @@
               <a:buNone/>
             </a:pPr>
             <a:r>
-              <a:rPr lang="en-US" sz="1300" dirty="0">
+              <a:rPr lang="en-US" sz="1500" dirty="0">
                 <a:solidFill>
                   <a:srgbClr val="CACACE"/>
                 </a:solidFill>
-                <a:latin typeface="Calibri" pitchFamily="34" charset="0"/>
-                <a:ea typeface="Calibri" pitchFamily="34" charset="-122"/>
-                <a:cs typeface="Calibri" pitchFamily="34" charset="-120"/>
+                <a:latin typeface="Rajdhani" pitchFamily="34" charset="0"/>
+                <a:ea typeface="Rajdhani" pitchFamily="34" charset="-122"/>
+                <a:cs typeface="Rajdhani" pitchFamily="34" charset="-120"/>
               </a:rPr>
               <a:t>a run ended FAIL or CHECKPOINT, or the body's own word was FAIL / ESCALATE: its sent-backs + 1</a:t>
             </a:r>
-            <a:endParaRPr lang="en-US" sz="1300" dirty="0"/>
+            <a:endParaRPr lang="en-US" sz="1500" dirty="0"/>
           </a:p>
         </p:txBody>
       </p:sp>
@@ -14088,17 +14088,17 @@
               <a:buNone/>
             </a:pPr>
             <a:r>
-              <a:rPr lang="en-US" sz="1600" b="1" dirty="0">
+              <a:rPr lang="en-US" sz="1800" b="1" dirty="0">
                 <a:solidFill>
                   <a:srgbClr val="3CD68C"/>
                 </a:solidFill>
-                <a:latin typeface="Calibri" pitchFamily="34" charset="0"/>
-                <a:ea typeface="Calibri" pitchFamily="34" charset="-122"/>
-                <a:cs typeface="Calibri" pitchFamily="34" charset="-120"/>
+                <a:latin typeface="Rajdhani" pitchFamily="34" charset="0"/>
+                <a:ea typeface="Rajdhani" pitchFamily="34" charset="-122"/>
+                <a:cs typeface="Rajdhani" pitchFamily="34" charset="-120"/>
               </a:rPr>
               <a:t>clears</a:t>
             </a:r>
-            <a:endParaRPr lang="en-US" sz="1600" dirty="0"/>
+            <a:endParaRPr lang="en-US" sz="1800" dirty="0"/>
           </a:p>
         </p:txBody>
       </p:sp>
@@ -14130,17 +14130,17 @@
               <a:buNone/>
             </a:pPr>
             <a:r>
-              <a:rPr lang="en-US" sz="1300" dirty="0">
+              <a:rPr lang="en-US" sz="1500" dirty="0">
                 <a:solidFill>
                   <a:srgbClr val="CACACE"/>
                 </a:solidFill>
-                <a:latin typeface="Calibri" pitchFamily="34" charset="0"/>
-                <a:ea typeface="Calibri" pitchFamily="34" charset="-122"/>
-                <a:cs typeface="Calibri" pitchFamily="34" charset="-120"/>
+                <a:latin typeface="Rajdhani" pitchFamily="34" charset="0"/>
+                <a:ea typeface="Rajdhani" pitchFamily="34" charset="-122"/>
+                <a:cs typeface="Rajdhani" pitchFamily="34" charset="-120"/>
               </a:rPr>
               <a:t>the body's first clean landing</a:t>
             </a:r>
-            <a:endParaRPr lang="en-US" sz="1300" dirty="0"/>
+            <a:endParaRPr lang="en-US" sz="1500" dirty="0"/>
           </a:p>
         </p:txBody>
       </p:sp>
@@ -14214,17 +14214,17 @@
               <a:buNone/>
             </a:pPr>
             <a:r>
-              <a:rPr lang="en-US" sz="1600" b="1" dirty="0">
+              <a:rPr lang="en-US" sz="1800" b="1" dirty="0">
                 <a:solidFill>
                   <a:srgbClr val="55A9FF"/>
                 </a:solidFill>
-                <a:latin typeface="Calibri" pitchFamily="34" charset="0"/>
-                <a:ea typeface="Calibri" pitchFamily="34" charset="-122"/>
-                <a:cs typeface="Calibri" pitchFamily="34" charset="-120"/>
+                <a:latin typeface="Rajdhani" pitchFamily="34" charset="0"/>
+                <a:ea typeface="Rajdhani" pitchFamily="34" charset="-122"/>
+                <a:cs typeface="Rajdhani" pitchFamily="34" charset="-120"/>
               </a:rPr>
               <a:t>the desk</a:t>
             </a:r>
-            <a:endParaRPr lang="en-US" sz="1600" dirty="0"/>
+            <a:endParaRPr lang="en-US" sz="1800" dirty="0"/>
           </a:p>
         </p:txBody>
       </p:sp>
@@ -14256,17 +14256,17 @@
               <a:buNone/>
             </a:pPr>
             <a:r>
-              <a:rPr lang="en-US" sz="1300" dirty="0">
+              <a:rPr lang="en-US" sz="1500" dirty="0">
                 <a:solidFill>
                   <a:srgbClr val="CACACE"/>
                 </a:solidFill>
-                <a:latin typeface="Calibri" pitchFamily="34" charset="0"/>
-                <a:ea typeface="Calibri" pitchFamily="34" charset="-122"/>
-                <a:cs typeface="Calibri" pitchFamily="34" charset="-120"/>
+                <a:latin typeface="Rajdhani" pitchFamily="34" charset="0"/>
+                <a:ea typeface="Rajdhani" pitchFamily="34" charset="-122"/>
+                <a:cs typeface="Rajdhani" pitchFamily="34" charset="-120"/>
               </a:rPr>
               <a:t>working memory: over thoughtsMax (7) thoughts on a stressed creature is the evolution trigger</a:t>
             </a:r>
-            <a:endParaRPr lang="en-US" sz="1300" dirty="0"/>
+            <a:endParaRPr lang="en-US" sz="1500" dirty="0"/>
           </a:p>
         </p:txBody>
       </p:sp>
@@ -14351,9 +14351,9 @@
                 <a:solidFill>
                   <a:srgbClr val="A3A3AD"/>
                 </a:solidFill>
-                <a:latin typeface="Calibri" pitchFamily="34" charset="0"/>
-                <a:ea typeface="Calibri" pitchFamily="34" charset="-122"/>
-                <a:cs typeface="Calibri" pitchFamily="34" charset="-120"/>
+                <a:latin typeface="Rajdhani" pitchFamily="34" charset="0"/>
+                <a:ea typeface="Rajdhani" pitchFamily="34" charset="-122"/>
+                <a:cs typeface="Rajdhani" pitchFamily="34" charset="-120"/>
               </a:rPr>
               <a:t>ISEKAI ⋄ STRESS AND VALUE</a:t>
             </a:r>
@@ -14390,9 +14390,9 @@
                 <a:solidFill>
                   <a:srgbClr val="A3A3AD"/>
                 </a:solidFill>
-                <a:latin typeface="Calibri" pitchFamily="34" charset="0"/>
-                <a:ea typeface="Calibri" pitchFamily="34" charset="-122"/>
-                <a:cs typeface="Calibri" pitchFamily="34" charset="-120"/>
+                <a:latin typeface="Rajdhani" pitchFamily="34" charset="0"/>
+                <a:ea typeface="Rajdhani" pitchFamily="34" charset="-122"/>
+                <a:cs typeface="Rajdhani" pitchFamily="34" charset="-120"/>
               </a:rPr>
               <a:t>9</a:t>
             </a:r>
@@ -14429,9 +14429,9 @@
                 <a:solidFill>
                   <a:srgbClr val="FF8550"/>
                 </a:solidFill>
-                <a:latin typeface="Calibri" pitchFamily="34" charset="0"/>
-                <a:ea typeface="Calibri" pitchFamily="34" charset="-122"/>
-                <a:cs typeface="Calibri" pitchFamily="34" charset="-120"/>
+                <a:latin typeface="Rajdhani" pitchFamily="34" charset="0"/>
+                <a:ea typeface="Rajdhani" pitchFamily="34" charset="-122"/>
+                <a:cs typeface="Rajdhani" pitchFamily="34" charset="-120"/>
               </a:rPr>
               <a:t>THE COUNCIL</a:t>
             </a:r>
@@ -14464,17 +14464,17 @@
               <a:buNone/>
             </a:pPr>
             <a:r>
-              <a:rPr lang="en-US" sz="2800" dirty="0">
+              <a:rPr lang="en-US" sz="2400" b="1" dirty="0">
                 <a:solidFill>
                   <a:srgbClr val="E8E8E8"/>
                 </a:solidFill>
-                <a:latin typeface="Arial Black" pitchFamily="34" charset="0"/>
-                <a:ea typeface="Arial Black" pitchFamily="34" charset="-122"/>
-                <a:cs typeface="Arial Black" pitchFamily="34" charset="-120"/>
+                <a:latin typeface="Orbitron" pitchFamily="34" charset="0"/>
+                <a:ea typeface="Orbitron" pitchFamily="34" charset="-122"/>
+                <a:cs typeface="Orbitron" pitchFamily="34" charset="-120"/>
               </a:rPr>
               <a:t>Past a line, the creature's manager must answer</a:t>
             </a:r>
-            <a:endParaRPr lang="en-US" sz="2800" dirty="0"/>
+            <a:endParaRPr lang="en-US" sz="2400" dirty="0"/>
           </a:p>
         </p:txBody>
       </p:sp>
@@ -14527,9 +14527,9 @@
                 <a:solidFill>
                   <a:srgbClr val="0C0C10"/>
                 </a:solidFill>
-                <a:latin typeface="Arial Black" pitchFamily="34" charset="0"/>
-                <a:ea typeface="Arial Black" pitchFamily="34" charset="-122"/>
-                <a:cs typeface="Arial Black" pitchFamily="34" charset="-120"/>
+                <a:latin typeface="Orbitron" pitchFamily="34" charset="0"/>
+                <a:ea typeface="Orbitron" pitchFamily="34" charset="-122"/>
+                <a:cs typeface="Orbitron" pitchFamily="34" charset="-120"/>
               </a:rPr>
               <a:t>strain ≥ 5</a:t>
             </a:r>
@@ -14591,9 +14591,9 @@
                 <a:solidFill>
                   <a:srgbClr val="FFB300"/>
                 </a:solidFill>
-                <a:latin typeface="Calibri" pitchFamily="34" charset="0"/>
-                <a:ea typeface="Calibri" pitchFamily="34" charset="-122"/>
-                <a:cs typeface="Calibri" pitchFamily="34" charset="-120"/>
+                <a:latin typeface="Rajdhani" pitchFamily="34" charset="0"/>
+                <a:ea typeface="Rajdhani" pitchFamily="34" charset="-122"/>
+                <a:cs typeface="Rajdhani" pitchFamily="34" charset="-120"/>
               </a:rPr>
               <a:t>warrant  </a:t>
             </a:r>
@@ -14605,9 +14605,9 @@
                 <a:solidFill>
                   <a:srgbClr val="CACACE"/>
                 </a:solidFill>
-                <a:latin typeface="Calibri" pitchFamily="34" charset="0"/>
-                <a:ea typeface="Calibri" pitchFamily="34" charset="-122"/>
-                <a:cs typeface="Calibri" pitchFamily="34" charset="-120"/>
+                <a:latin typeface="Rajdhani" pitchFamily="34" charset="0"/>
+                <a:ea typeface="Rajdhani" pitchFamily="34" charset="-122"/>
+                <a:cs typeface="Rajdhani" pitchFamily="34" charset="-120"/>
               </a:rPr>
               <a:t>the report carries @? council warrant; the dispatcher answers @INSTRUCT, @SPLIT or @ESCALATE (sideways counsel allowed)</a:t>
             </a:r>
@@ -14664,9 +14664,9 @@
                 <a:solidFill>
                   <a:srgbClr val="0C0C10"/>
                 </a:solidFill>
-                <a:latin typeface="Arial Black" pitchFamily="34" charset="0"/>
-                <a:ea typeface="Arial Black" pitchFamily="34" charset="-122"/>
-                <a:cs typeface="Arial Black" pitchFamily="34" charset="-120"/>
+                <a:latin typeface="Orbitron" pitchFamily="34" charset="0"/>
+                <a:ea typeface="Orbitron" pitchFamily="34" charset="-122"/>
+                <a:cs typeface="Orbitron" pitchFamily="34" charset="-120"/>
               </a:rPr>
               <a:t>3 consults</a:t>
             </a:r>
@@ -14728,9 +14728,9 @@
                 <a:solidFill>
                   <a:srgbClr val="FF8550"/>
                 </a:solidFill>
-                <a:latin typeface="Calibri" pitchFamily="34" charset="0"/>
-                <a:ea typeface="Calibri" pitchFamily="34" charset="-122"/>
-                <a:cs typeface="Calibri" pitchFamily="34" charset="-120"/>
+                <a:latin typeface="Rajdhani" pitchFamily="34" charset="0"/>
+                <a:ea typeface="Rajdhani" pitchFamily="34" charset="-122"/>
+                <a:cs typeface="Rajdhani" pitchFamily="34" charset="-120"/>
               </a:rPr>
               <a:t>escalate  </a:t>
             </a:r>
@@ -14742,9 +14742,9 @@
                 <a:solidFill>
                   <a:srgbClr val="CACACE"/>
                 </a:solidFill>
-                <a:latin typeface="Calibri" pitchFamily="34" charset="0"/>
-                <a:ea typeface="Calibri" pitchFamily="34" charset="-122"/>
-                <a:cs typeface="Calibri" pitchFamily="34" charset="-120"/>
+                <a:latin typeface="Rajdhani" pitchFamily="34" charset="0"/>
+                <a:ea typeface="Rajdhani" pitchFamily="34" charset="-122"/>
+                <a:cs typeface="Rajdhani" pitchFamily="34" charset="-120"/>
               </a:rPr>
               <a:t>still strained after maxConsults: the run ends @S ESCALATE and rises to the human (Veldora)</a:t>
             </a:r>
@@ -14801,9 +14801,9 @@
                 <a:solidFill>
                   <a:srgbClr val="0C0C10"/>
                 </a:solidFill>
-                <a:latin typeface="Arial Black" pitchFamily="34" charset="0"/>
-                <a:ea typeface="Arial Black" pitchFamily="34" charset="-122"/>
-                <a:cs typeface="Arial Black" pitchFamily="34" charset="-120"/>
+                <a:latin typeface="Orbitron" pitchFamily="34" charset="0"/>
+                <a:ea typeface="Orbitron" pitchFamily="34" charset="-122"/>
+                <a:cs typeface="Orbitron" pitchFamily="34" charset="-120"/>
               </a:rPr>
               <a:t>strain ≥ 7</a:t>
             </a:r>
@@ -14865,9 +14865,9 @@
                 <a:solidFill>
                   <a:srgbClr val="FE8184"/>
                 </a:solidFill>
-                <a:latin typeface="Calibri" pitchFamily="34" charset="0"/>
-                <a:ea typeface="Calibri" pitchFamily="34" charset="-122"/>
-                <a:cs typeface="Calibri" pitchFamily="34" charset="-120"/>
+                <a:latin typeface="Rajdhani" pitchFamily="34" charset="0"/>
+                <a:ea typeface="Rajdhani" pitchFamily="34" charset="-122"/>
+                <a:cs typeface="Rajdhani" pitchFamily="34" charset="-120"/>
               </a:rPr>
               <a:t>relief  </a:t>
             </a:r>
@@ -14879,9 +14879,9 @@
                 <a:solidFill>
                   <a:srgbClr val="CACACE"/>
                 </a:solidFill>
-                <a:latin typeface="Calibri" pitchFamily="34" charset="0"/>
-                <a:ea typeface="Calibri" pitchFamily="34" charset="-122"/>
-                <a:cs typeface="Calibri" pitchFamily="34" charset="-120"/>
+                <a:latin typeface="Rajdhani" pitchFamily="34" charset="0"/>
+                <a:ea typeface="Rajdhani" pitchFamily="34" charset="-122"/>
+                <a:cs typeface="Rajdhani" pitchFamily="34" charset="-120"/>
               </a:rPr>
               <a:t>the territory is wrong, not the worker: split a ≥2-prefix territory into two young ones, or retire a narrower one (memory kept, no soil)</a:t>
             </a:r>
@@ -14938,9 +14938,9 @@
                 <a:solidFill>
                   <a:srgbClr val="0C0C10"/>
                 </a:solidFill>
-                <a:latin typeface="Arial Black" pitchFamily="34" charset="0"/>
-                <a:ea typeface="Arial Black" pitchFamily="34" charset="-122"/>
-                <a:cs typeface="Arial Black" pitchFamily="34" charset="-120"/>
+                <a:latin typeface="Orbitron" pitchFamily="34" charset="0"/>
+                <a:ea typeface="Orbitron" pitchFamily="34" charset="-122"/>
+                <a:cs typeface="Orbitron" pitchFamily="34" charset="-120"/>
               </a:rPr>
               <a:t>genome</a:t>
             </a:r>
@@ -15002,9 +15002,9 @@
                 <a:solidFill>
                   <a:srgbClr val="A999FD"/>
                 </a:solidFill>
-                <a:latin typeface="Calibri" pitchFamily="34" charset="0"/>
-                <a:ea typeface="Calibri" pitchFamily="34" charset="-122"/>
-                <a:cs typeface="Calibri" pitchFamily="34" charset="-120"/>
+                <a:latin typeface="Rajdhani" pitchFamily="34" charset="0"/>
+                <a:ea typeface="Rajdhani" pitchFamily="34" charset="-122"/>
+                <a:cs typeface="Rajdhani" pitchFamily="34" charset="-120"/>
               </a:rPr>
               <a:t>the human (Veldora)'s word  </a:t>
             </a:r>
@@ -15016,9 +15016,9 @@
                 <a:solidFill>
                   <a:srgbClr val="CACACE"/>
                 </a:solidFill>
-                <a:latin typeface="Calibri" pitchFamily="34" charset="0"/>
-                <a:ea typeface="Calibri" pitchFamily="34" charset="-122"/>
-                <a:cs typeface="Calibri" pitchFamily="34" charset="-120"/>
+                <a:latin typeface="Rajdhani" pitchFamily="34" charset="0"/>
+                <a:ea typeface="Rajdhani" pitchFamily="34" charset="-122"/>
+                <a:cs typeface="Rajdhani" pitchFamily="34" charset="-120"/>
               </a:rPr>
               <a:t>a shift of a lane's DNA is drafted to the slab, never applied silently</a:t>
             </a:r>
